--- a/docs/GuardIA-ProyectoFinal-IdoyagaMolina.pptx
+++ b/docs/GuardIA-ProyectoFinal-IdoyagaMolina.pptx
@@ -21,9 +21,10 @@
     <p:sldId id="269" r:id="rId15"/>
     <p:sldId id="270" r:id="rId16"/>
     <p:sldId id="271" r:id="rId17"/>
+    <p:sldId id="272" r:id="rId18"/>
   </p:sldIdLst>
   <p:notesMasterIdLst>
-    <p:notesMasterId r:id="rId18"/>
+    <p:notesMasterId r:id="rId19"/>
   </p:notesMasterIdLst>
   <p:sldSz cx="12192000" cy="6858000"/>
   <p:notesSz cx="6858000" cy="12192000"/>
@@ -693,7 +694,7 @@
           <a:p>
             <a:r>
               <a:rPr lang="en-US" dirty="0"/>
-              <a:t>Los dos modelos del curso trabajan de forma complementaria: texto-texto para analizar, texto-imagen para concientizar.</a:t>
+              <a:t>La consigna pide código organizado de manera lógica y comentado adecuadamente. La separación entre interfaz y lógica es la decisión estructural principal.</a:t>
             </a:r>
             <a:endParaRPr lang="en-US" dirty="0"/>
           </a:p>
@@ -781,7 +782,7 @@
           <a:p>
             <a:r>
               <a:rPr lang="en-US" dirty="0"/>
-              <a:t>Incluso con miles de consultas mensuales el gasto se mantiene en pocos dólares: el costo de operar la herramienta es marginal frente al costo de un solo incidente.</a:t>
+              <a:t>La pre-entrega proponía OpenAI y dos modelos. El cambio a Gemini responde a una restricción concreta —operar sin costo— y la placa queda documentada como próxima función.</a:t>
             </a:r>
             <a:endParaRPr lang="en-US" dirty="0"/>
           </a:p>
@@ -869,7 +870,7 @@
           <a:p>
             <a:r>
               <a:rPr lang="en-US" dirty="0"/>
-              <a:t>Reconocer los límites es parte del diseño responsable de una herramienta de seguridad.</a:t>
+              <a:t>El costo real es cero. La columna de la derecha responde a la pregunta "¿y si esto lo usaran mil personas?": incluso pagando, el gasto es marginal frente al costo de un solo incidente.</a:t>
             </a:r>
             <a:endParaRPr lang="en-US" dirty="0"/>
           </a:p>
@@ -957,7 +958,7 @@
           <a:p>
             <a:r>
               <a:rPr lang="en-US" dirty="0"/>
-              <a:t>Antes de compartir: pegar la URL real de Streamlit, la del repositorio de GitHub y la del video.</a:t>
+              <a:t>Reconocer los límites es parte del diseño responsable de una herramienta de seguridad.</a:t>
             </a:r>
             <a:endParaRPr lang="en-US" dirty="0"/>
           </a:p>
@@ -1045,7 +1046,7 @@
           <a:p>
             <a:r>
               <a:rPr lang="en-US" dirty="0"/>
-              <a:t>Cierre: qué resuelve, cómo lo resuelve y por qué importa.</a:t>
+              <a:t>Antes de compartir: pegar la URL real de Streamlit, la del repositorio de GitHub y la del video.</a:t>
             </a:r>
             <a:endParaRPr lang="en-US" dirty="0"/>
           </a:p>
@@ -1133,7 +1134,7 @@
           <a:p>
             <a:r>
               <a:rPr lang="en-US" dirty="0"/>
-              <a:t>Gracias.</a:t>
+              <a:t>Cierre: qué resuelve, cómo lo resuelve y por qué importa.</a:t>
             </a:r>
             <a:endParaRPr lang="en-US" dirty="0"/>
           </a:p>
@@ -1157,6 +1158,94 @@
             <a:fld id="{F7021451-1387-4CA6-816F-3879F97B5CBC}" type="slidenum">
               <a:rPr lang="en-US"/>
               <a:t>16</a:t>
+            </a:fld>
+            <a:endParaRPr lang="en-US"/>
+          </a:p>
+        </p:txBody>
+      </p:sp>
+    </p:spTree>
+    <p:extLst>
+      <p:ext uri="{BB962C8B-B14F-4D97-AF65-F5344CB8AC3E}">
+        <p14:creationId xmlns:p14="http://schemas.microsoft.com/office/powerpoint/2010/main" val="1024086991"/>
+      </p:ext>
+    </p:extLst>
+  </p:cSld>
+  <p:clrMapOvr>
+    <a:masterClrMapping/>
+  </p:clrMapOvr>
+</p:notes>
+</file>
+
+<file path=ppt/notesSlides/notesSlide17.xml><?xml version="1.0" encoding="utf-8"?>
+<p:notes xmlns:a="http://schemas.openxmlformats.org/drawingml/2006/main" xmlns:r="http://schemas.openxmlformats.org/officeDocument/2006/relationships" xmlns:p="http://schemas.openxmlformats.org/presentationml/2006/main">
+  <p:cSld>
+    <p:spTree>
+      <p:nvGrpSpPr>
+        <p:cNvPr id="1" name=""/>
+        <p:cNvGrpSpPr/>
+        <p:nvPr/>
+      </p:nvGrpSpPr>
+      <p:grpSpPr>
+        <a:xfrm>
+          <a:off x="0" y="0"/>
+          <a:ext cx="0" cy="0"/>
+          <a:chOff x="0" y="0"/>
+          <a:chExt cx="0" cy="0"/>
+        </a:xfrm>
+      </p:grpSpPr>
+      <p:sp>
+        <p:nvSpPr>
+          <p:cNvPr id="2" name="Slide Image Placeholder 1"/>
+          <p:cNvSpPr>
+            <a:spLocks noGrp="1" noRot="1" noChangeAspect="1"/>
+          </p:cNvSpPr>
+          <p:nvPr>
+            <p:ph type="sldImg"/>
+          </p:nvPr>
+        </p:nvSpPr>
+        <p:spPr/>
+      </p:sp>
+      <p:sp>
+        <p:nvSpPr>
+          <p:cNvPr id="3" name="Notes Placeholder 2"/>
+          <p:cNvSpPr>
+            <a:spLocks noGrp="1"/>
+          </p:cNvSpPr>
+          <p:nvPr>
+            <p:ph type="body" idx="1"/>
+          </p:nvPr>
+        </p:nvSpPr>
+        <p:spPr/>
+        <p:txBody>
+          <a:bodyPr/>
+          <a:lstStyle/>
+          <a:p>
+            <a:r>
+              <a:rPr lang="en-US" dirty="0"/>
+              <a:t>Gracias.</a:t>
+            </a:r>
+            <a:endParaRPr lang="en-US" dirty="0"/>
+          </a:p>
+        </p:txBody>
+      </p:sp>
+      <p:sp>
+        <p:nvSpPr>
+          <p:cNvPr id="4" name="Slide Number Placeholder 3"/>
+          <p:cNvSpPr>
+            <a:spLocks noGrp="1"/>
+          </p:cNvSpPr>
+          <p:nvPr>
+            <p:ph type="sldNum" sz="quarter" idx="10"/>
+          </p:nvPr>
+        </p:nvSpPr>
+        <p:spPr/>
+        <p:txBody>
+          <a:bodyPr/>
+          <a:lstStyle/>
+          <a:p>
+            <a:fld id="{F7021451-1387-4CA6-816F-3879F97B5CBC}" type="slidenum">
+              <a:rPr lang="en-US"/>
+              <a:t>17</a:t>
             </a:fld>
             <a:endParaRPr lang="en-US"/>
           </a:p>
@@ -2980,7 +3069,7 @@
                 <a:ea typeface="Calibri" pitchFamily="34" charset="-122"/>
                 <a:cs typeface="Calibri" pitchFamily="34" charset="-120"/>
               </a:rPr>
-              <a:t>En lugar de pedirle al modelo "respondeme en JSON" y confiar en que obedezca, GuardIA envía un esquema JSON con strict: true. La API valida la respuesta contra ese esquema antes de devolverla.</a:t>
+              <a:t>En lugar de pedirle al modelo "respondeme en JSON" y confiar en que obedezca, GuardIA envía el esquema de la respuesta junto con la consulta, y la API garantiza que el resultado lo cumpla.</a:t>
             </a:r>
             <a:endParaRPr lang="en-US" sz="1400" dirty="0"/>
           </a:p>
@@ -3206,7 +3295,7 @@
                 <a:ea typeface="Courier New" pitchFamily="34" charset="-122"/>
                 <a:cs typeface="Courier New" pitchFamily="34" charset="-120"/>
               </a:rPr>
-              <a:t>  "nivel_riesgo": "bajo | medio | alto |</a:t>
+              <a:t>  "tipo_de_engano": "técnica detectada",</a:t>
             </a:r>
             <a:endParaRPr lang="en-US" sz="1150" dirty="0"/>
           </a:p>
@@ -3226,7 +3315,7 @@
                 <a:ea typeface="Courier New" pitchFamily="34" charset="-122"/>
                 <a:cs typeface="Courier New" pitchFamily="34" charset="-120"/>
               </a:rPr>
-              <a:t>                   indeterminado",</a:t>
+              <a:t>  "senales": [</a:t>
             </a:r>
             <a:endParaRPr lang="en-US" sz="1150" dirty="0"/>
           </a:p>
@@ -3246,7 +3335,7 @@
                 <a:ea typeface="Courier New" pitchFamily="34" charset="-122"/>
                 <a:cs typeface="Courier New" pitchFamily="34" charset="-120"/>
               </a:rPr>
-              <a:t>  "puntaje": 0-100,</a:t>
+              <a:t>    {</a:t>
             </a:r>
             <a:endParaRPr lang="en-US" sz="1150" dirty="0"/>
           </a:p>
@@ -3266,7 +3355,7 @@
                 <a:ea typeface="Courier New" pitchFamily="34" charset="-122"/>
                 <a:cs typeface="Courier New" pitchFamily="34" charset="-120"/>
               </a:rPr>
-              <a:t>  "tipo_de_engano": "técnica detectada",</a:t>
+              <a:t>      "titulo": "nombre breve",</a:t>
             </a:r>
             <a:endParaRPr lang="en-US" sz="1150" dirty="0"/>
           </a:p>
@@ -3286,7 +3375,7 @@
                 <a:ea typeface="Courier New" pitchFamily="34" charset="-122"/>
                 <a:cs typeface="Courier New" pitchFamily="34" charset="-120"/>
               </a:rPr>
-              <a:t>  "senales": [</a:t>
+              <a:t>      "detalle": "qué lo dispara y por qué",</a:t>
             </a:r>
             <a:endParaRPr lang="en-US" sz="1150" dirty="0"/>
           </a:p>
@@ -3306,7 +3395,7 @@
                 <a:ea typeface="Courier New" pitchFamily="34" charset="-122"/>
                 <a:cs typeface="Courier New" pitchFamily="34" charset="-120"/>
               </a:rPr>
-              <a:t>    {</a:t>
+              <a:t>      "gravedad": "baja | media | alta"</a:t>
             </a:r>
             <a:endParaRPr lang="en-US" sz="1150" dirty="0"/>
           </a:p>
@@ -3326,7 +3415,7 @@
                 <a:ea typeface="Courier New" pitchFamily="34" charset="-122"/>
                 <a:cs typeface="Courier New" pitchFamily="34" charset="-120"/>
               </a:rPr>
-              <a:t>      "titulo": "nombre breve",</a:t>
+              <a:t>    }</a:t>
             </a:r>
             <a:endParaRPr lang="en-US" sz="1150" dirty="0"/>
           </a:p>
@@ -3346,7 +3435,7 @@
                 <a:ea typeface="Courier New" pitchFamily="34" charset="-122"/>
                 <a:cs typeface="Courier New" pitchFamily="34" charset="-120"/>
               </a:rPr>
-              <a:t>      "detalle": "qué lo dispara y por qué",</a:t>
+              <a:t>  ],</a:t>
             </a:r>
             <a:endParaRPr lang="en-US" sz="1150" dirty="0"/>
           </a:p>
@@ -3366,7 +3455,7 @@
                 <a:ea typeface="Courier New" pitchFamily="34" charset="-122"/>
                 <a:cs typeface="Courier New" pitchFamily="34" charset="-120"/>
               </a:rPr>
-              <a:t>      "gravedad": "baja | media | alta"</a:t>
+              <a:t>  "puntaje": 0-100,</a:t>
             </a:r>
             <a:endParaRPr lang="en-US" sz="1150" dirty="0"/>
           </a:p>
@@ -3386,7 +3475,7 @@
                 <a:ea typeface="Courier New" pitchFamily="34" charset="-122"/>
                 <a:cs typeface="Courier New" pitchFamily="34" charset="-120"/>
               </a:rPr>
-              <a:t>    }</a:t>
+              <a:t>  "nivel_riesgo": "bajo | medio | alto |</a:t>
             </a:r>
             <a:endParaRPr lang="en-US" sz="1150" dirty="0"/>
           </a:p>
@@ -3406,7 +3495,7 @@
                 <a:ea typeface="Courier New" pitchFamily="34" charset="-122"/>
                 <a:cs typeface="Courier New" pitchFamily="34" charset="-120"/>
               </a:rPr>
-              <a:t>  ],</a:t>
+              <a:t>                   indeterminado",</a:t>
             </a:r>
             <a:endParaRPr lang="en-US" sz="1150" dirty="0"/>
           </a:p>
@@ -3520,6 +3609,45 @@
         </p:nvSpPr>
         <p:spPr>
           <a:xfrm>
+            <a:off x="6172200" y="5852160"/>
+            <a:ext cx="5330952" cy="365760"/>
+          </a:xfrm>
+          <a:prstGeom prst="rect">
+            <a:avLst/>
+          </a:prstGeom>
+          <a:noFill/>
+          <a:ln/>
+        </p:spPr>
+        <p:txBody>
+          <a:bodyPr wrap="square" lIns="0" tIns="0" rIns="0" bIns="0" rtlCol="0" anchor="t"/>
+          <a:lstStyle/>
+          <a:p>
+            <a:pPr indent="0" marL="0">
+              <a:buNone/>
+            </a:pPr>
+            <a:r>
+              <a:rPr lang="en-US" sz="950" i="1" dirty="0">
+                <a:solidFill>
+                  <a:srgbClr val="6B7C8C"/>
+                </a:solidFill>
+                <a:latin typeface="Calibri" pitchFamily="34" charset="0"/>
+                <a:ea typeface="Calibri" pitchFamily="34" charset="-122"/>
+                <a:cs typeface="Calibri" pitchFamily="34" charset="-120"/>
+              </a:rPr>
+              <a:t>El orden no es casual: el modelo detecta las señales antes de puntuar y de redactar, así el texto se apoya en lo que ya identificó.</a:t>
+            </a:r>
+            <a:endParaRPr lang="en-US" sz="950" dirty="0"/>
+          </a:p>
+        </p:txBody>
+      </p:sp>
+      <p:sp>
+        <p:nvSpPr>
+          <p:cNvPr id="11" name="Text 9"/>
+          <p:cNvSpPr/>
+          <p:nvPr/>
+        </p:nvSpPr>
+        <p:spPr>
+          <a:xfrm>
             <a:off x="685800" y="6355080"/>
             <a:ext cx="10271455" cy="274320"/>
           </a:xfrm>
@@ -3567,7 +3695,7 @@
       </p:sp>
       <p:sp>
         <p:nvSpPr>
-          <p:cNvPr id="11" name="Text 9"/>
+          <p:cNvPr id="12" name="Text 10"/>
           <p:cNvSpPr/>
           <p:nvPr/>
         </p:nvSpPr>
@@ -3669,7 +3797,7 @@
                 <a:ea typeface="Calibri" pitchFamily="34" charset="-122"/>
                 <a:cs typeface="Calibri" pitchFamily="34" charset="-120"/>
               </a:rPr>
-              <a:t>Segundo modelo: texto → imagen</a:t>
+              <a:t>Cómo está organizado el código</a:t>
             </a:r>
             <a:endParaRPr lang="en-US" sz="3600" dirty="0"/>
           </a:p>
@@ -3708,7 +3836,7 @@
                 <a:ea typeface="Calibri" pitchFamily="34" charset="-122"/>
                 <a:cs typeface="Calibri" pitchFamily="34" charset="-120"/>
               </a:rPr>
-              <a:t>Cada intento de phishing recibido se convierte en material de capacitación para todo el equipo.</a:t>
+              <a:t>La interfaz separada de la lógica, y todo lo que le pedimos a la IA en un solo archivo.</a:t>
             </a:r>
             <a:endParaRPr lang="en-US" sz="1500" dirty="0"/>
           </a:p>
@@ -3723,11 +3851,11 @@
         <p:spPr>
           <a:xfrm>
             <a:off x="685800" y="1874520"/>
-            <a:ext cx="5943600" cy="2286000"/>
+            <a:ext cx="6035040" cy="3200400"/>
           </a:xfrm>
           <a:prstGeom prst="roundRect">
             <a:avLst>
-              <a:gd name="adj" fmla="val 2400"/>
+              <a:gd name="adj" fmla="val 1714"/>
             </a:avLst>
           </a:prstGeom>
           <a:solidFill>
@@ -3750,7 +3878,7 @@
         <p:spPr>
           <a:xfrm>
             <a:off x="886968" y="2020824"/>
-            <a:ext cx="5541264" cy="1993392"/>
+            <a:ext cx="5632704" cy="2907792"/>
           </a:xfrm>
           <a:prstGeom prst="rect">
             <a:avLst/>
@@ -3764,12 +3892,12 @@
           <a:p>
             <a:pPr algn="l" indent="0" marL="0">
               <a:lnSpc>
-                <a:spcPct val="105000"/>
+                <a:spcPct val="114000"/>
               </a:lnSpc>
               <a:buNone/>
             </a:pPr>
             <a:r>
-              <a:rPr lang="en-US" sz="1050" dirty="0">
+              <a:rPr lang="en-US" sz="1150" dirty="0">
                 <a:solidFill>
                   <a:srgbClr val="D6E4EC"/>
                 </a:solidFill>
@@ -3777,19 +3905,19 @@
                 <a:ea typeface="Courier New" pitchFamily="34" charset="-122"/>
                 <a:cs typeface="Courier New" pitchFamily="34" charset="-120"/>
               </a:rPr>
-              <a:t>Ilustración plana y minimalista para una placa de</a:t>
-            </a:r>
-            <a:endParaRPr lang="en-US" sz="1050" dirty="0"/>
+              <a:t>GuardIA/</a:t>
+            </a:r>
+            <a:endParaRPr lang="en-US" sz="1150" dirty="0"/>
           </a:p>
           <a:p>
             <a:pPr algn="l" indent="0" marL="0">
               <a:lnSpc>
-                <a:spcPct val="105000"/>
+                <a:spcPct val="114000"/>
               </a:lnSpc>
               <a:buNone/>
             </a:pPr>
             <a:r>
-              <a:rPr lang="en-US" sz="1050" dirty="0">
+              <a:rPr lang="en-US" sz="1150" dirty="0">
                 <a:solidFill>
                   <a:srgbClr val="D6E4EC"/>
                 </a:solidFill>
@@ -3797,28 +3925,19 @@
                 <a:ea typeface="Courier New" pitchFamily="34" charset="-122"/>
                 <a:cs typeface="Courier New" pitchFamily="34" charset="-120"/>
               </a:rPr>
-              <a:t>concientización sobre seguridad informática.</a:t>
-            </a:r>
-            <a:endParaRPr lang="en-US" sz="1050" dirty="0"/>
+              <a:t>├── app.py            interfaz web (Streamlit)</a:t>
+            </a:r>
+            <a:endParaRPr lang="en-US" sz="1150" dirty="0"/>
           </a:p>
           <a:p>
             <a:pPr algn="l" indent="0" marL="0">
               <a:lnSpc>
-                <a:spcPct val="105000"/>
+                <a:spcPct val="114000"/>
               </a:lnSpc>
               <a:buNone/>
             </a:pPr>
-            <a:endParaRPr lang="en-US" sz="1050" dirty="0"/>
-          </a:p>
-          <a:p>
-            <a:pPr algn="l" indent="0" marL="0">
-              <a:lnSpc>
-                <a:spcPct val="105000"/>
-              </a:lnSpc>
-              <a:buNone/>
-            </a:pPr>
-            <a:r>
-              <a:rPr lang="en-US" sz="1050" dirty="0">
+            <a:r>
+              <a:rPr lang="en-US" sz="1150" dirty="0">
                 <a:solidFill>
                   <a:srgbClr val="D6E4EC"/>
                 </a:solidFill>
@@ -3826,19 +3945,19 @@
                 <a:ea typeface="Courier New" pitchFamily="34" charset="-122"/>
                 <a:cs typeface="Courier New" pitchFamily="34" charset="-120"/>
               </a:rPr>
-              <a:t>Tema: {tipo_de_engano_detectado}.</a:t>
-            </a:r>
-            <a:endParaRPr lang="en-US" sz="1050" dirty="0"/>
+              <a:t>├── guardia/</a:t>
+            </a:r>
+            <a:endParaRPr lang="en-US" sz="1150" dirty="0"/>
           </a:p>
           <a:p>
             <a:pPr algn="l" indent="0" marL="0">
               <a:lnSpc>
-                <a:spcPct val="105000"/>
+                <a:spcPct val="114000"/>
               </a:lnSpc>
               <a:buNone/>
             </a:pPr>
             <a:r>
-              <a:rPr lang="en-US" sz="1050" dirty="0">
+              <a:rPr lang="en-US" sz="1150" dirty="0">
                 <a:solidFill>
                   <a:srgbClr val="D6E4EC"/>
                 </a:solidFill>
@@ -3846,19 +3965,19 @@
                 <a:ea typeface="Courier New" pitchFamily="34" charset="-122"/>
                 <a:cs typeface="Courier New" pitchFamily="34" charset="-120"/>
               </a:rPr>
-              <a:t>Estilo: vectorial, colores sobrios (azul y verde</a:t>
-            </a:r>
-            <a:endParaRPr lang="en-US" sz="1050" dirty="0"/>
+              <a:t>│   ├── prompts.py    prompt y esquema de salida</a:t>
+            </a:r>
+            <a:endParaRPr lang="en-US" sz="1150" dirty="0"/>
           </a:p>
           <a:p>
             <a:pPr algn="l" indent="0" marL="0">
               <a:lnSpc>
-                <a:spcPct val="105000"/>
+                <a:spcPct val="114000"/>
               </a:lnSpc>
               <a:buNone/>
             </a:pPr>
             <a:r>
-              <a:rPr lang="en-US" sz="1050" dirty="0">
+              <a:rPr lang="en-US" sz="1150" dirty="0">
                 <a:solidFill>
                   <a:srgbClr val="D6E4EC"/>
                 </a:solidFill>
@@ -3866,28 +3985,19 @@
                 <a:ea typeface="Courier New" pitchFamily="34" charset="-122"/>
                 <a:cs typeface="Courier New" pitchFamily="34" charset="-120"/>
               </a:rPr>
-              <a:t>azulado), fondo claro, apto para uso corporativo.</a:t>
-            </a:r>
-            <a:endParaRPr lang="en-US" sz="1050" dirty="0"/>
+              <a:t>│   ├── analisis.py   cliente de Gemini y consumo</a:t>
+            </a:r>
+            <a:endParaRPr lang="en-US" sz="1150" dirty="0"/>
           </a:p>
           <a:p>
             <a:pPr algn="l" indent="0" marL="0">
               <a:lnSpc>
-                <a:spcPct val="105000"/>
+                <a:spcPct val="114000"/>
               </a:lnSpc>
               <a:buNone/>
             </a:pPr>
-            <a:endParaRPr lang="en-US" sz="1050" dirty="0"/>
-          </a:p>
-          <a:p>
-            <a:pPr algn="l" indent="0" marL="0">
-              <a:lnSpc>
-                <a:spcPct val="105000"/>
-              </a:lnSpc>
-              <a:buNone/>
-            </a:pPr>
-            <a:r>
-              <a:rPr lang="en-US" sz="1050" dirty="0">
+            <a:r>
+              <a:rPr lang="en-US" sz="1150" dirty="0">
                 <a:solidFill>
                   <a:srgbClr val="D6E4EC"/>
                 </a:solidFill>
@@ -3895,19 +4005,19 @@
                 <a:ea typeface="Courier New" pitchFamily="34" charset="-122"/>
                 <a:cs typeface="Courier New" pitchFamily="34" charset="-120"/>
               </a:rPr>
-              <a:t>Importante: la imagen NO debe contener ningún texto,</a:t>
-            </a:r>
-            <a:endParaRPr lang="en-US" sz="1050" dirty="0"/>
+              <a:t>│   └── ejemplos.py   mensajes de prueba</a:t>
+            </a:r>
+            <a:endParaRPr lang="en-US" sz="1150" dirty="0"/>
           </a:p>
           <a:p>
             <a:pPr algn="l" indent="0" marL="0">
               <a:lnSpc>
-                <a:spcPct val="105000"/>
+                <a:spcPct val="114000"/>
               </a:lnSpc>
               <a:buNone/>
             </a:pPr>
             <a:r>
-              <a:rPr lang="en-US" sz="1050" dirty="0">
+              <a:rPr lang="en-US" sz="1150" dirty="0">
                 <a:solidFill>
                   <a:srgbClr val="D6E4EC"/>
                 </a:solidFill>
@@ -3915,9 +4025,69 @@
                 <a:ea typeface="Courier New" pitchFamily="34" charset="-122"/>
                 <a:cs typeface="Courier New" pitchFamily="34" charset="-120"/>
               </a:rPr>
-              <a:t>letra, número, palabra ni logotipo.</a:t>
-            </a:r>
-            <a:endParaRPr lang="en-US" sz="1050" dirty="0"/>
+              <a:t>├── .streamlit/</a:t>
+            </a:r>
+            <a:endParaRPr lang="en-US" sz="1150" dirty="0"/>
+          </a:p>
+          <a:p>
+            <a:pPr algn="l" indent="0" marL="0">
+              <a:lnSpc>
+                <a:spcPct val="114000"/>
+              </a:lnSpc>
+              <a:buNone/>
+            </a:pPr>
+            <a:r>
+              <a:rPr lang="en-US" sz="1150" dirty="0">
+                <a:solidFill>
+                  <a:srgbClr val="D6E4EC"/>
+                </a:solidFill>
+                <a:latin typeface="Courier New" pitchFamily="34" charset="0"/>
+                <a:ea typeface="Courier New" pitchFamily="34" charset="-122"/>
+                <a:cs typeface="Courier New" pitchFamily="34" charset="-120"/>
+              </a:rPr>
+              <a:t>│   ├── config.toml   paleta de colores</a:t>
+            </a:r>
+            <a:endParaRPr lang="en-US" sz="1150" dirty="0"/>
+          </a:p>
+          <a:p>
+            <a:pPr algn="l" indent="0" marL="0">
+              <a:lnSpc>
+                <a:spcPct val="114000"/>
+              </a:lnSpc>
+              <a:buNone/>
+            </a:pPr>
+            <a:r>
+              <a:rPr lang="en-US" sz="1150" dirty="0">
+                <a:solidFill>
+                  <a:srgbClr val="D6E4EC"/>
+                </a:solidFill>
+                <a:latin typeface="Courier New" pitchFamily="34" charset="0"/>
+                <a:ea typeface="Courier New" pitchFamily="34" charset="-122"/>
+                <a:cs typeface="Courier New" pitchFamily="34" charset="-120"/>
+              </a:rPr>
+              <a:t>│   └── secrets.toml  la clave (fuera del repo)</a:t>
+            </a:r>
+            <a:endParaRPr lang="en-US" sz="1150" dirty="0"/>
+          </a:p>
+          <a:p>
+            <a:pPr algn="l" indent="0" marL="0">
+              <a:lnSpc>
+                <a:spcPct val="114000"/>
+              </a:lnSpc>
+              <a:buNone/>
+            </a:pPr>
+            <a:r>
+              <a:rPr lang="en-US" sz="1150" dirty="0">
+                <a:solidFill>
+                  <a:srgbClr val="D6E4EC"/>
+                </a:solidFill>
+                <a:latin typeface="Courier New" pitchFamily="34" charset="0"/>
+                <a:ea typeface="Courier New" pitchFamily="34" charset="-122"/>
+                <a:cs typeface="Courier New" pitchFamily="34" charset="-120"/>
+              </a:rPr>
+              <a:t>└── requirements.txt  dependencias</a:t>
+            </a:r>
+            <a:endParaRPr lang="en-US" sz="1150" dirty="0"/>
           </a:p>
         </p:txBody>
       </p:sp>
@@ -3929,8 +4099,8 @@
         </p:nvSpPr>
         <p:spPr>
           <a:xfrm>
-            <a:off x="685800" y="4297680"/>
-            <a:ext cx="5943600" cy="777240"/>
+            <a:off x="685800" y="5257800"/>
+            <a:ext cx="6035040" cy="640080"/>
           </a:xfrm>
           <a:prstGeom prst="rect">
             <a:avLst/>
@@ -3944,12 +4114,12 @@
           <a:p>
             <a:pPr indent="0" marL="0">
               <a:lnSpc>
-                <a:spcPct val="118000"/>
+                <a:spcPct val="115000"/>
               </a:lnSpc>
               <a:buNone/>
             </a:pPr>
             <a:r>
-              <a:rPr lang="en-US" sz="1250" dirty="0">
+              <a:rPr lang="en-US" sz="1200" dirty="0">
                 <a:solidFill>
                   <a:srgbClr val="26323E"/>
                 </a:solidFill>
@@ -3957,9 +4127,9 @@
                 <a:ea typeface="Calibri" pitchFamily="34" charset="-122"/>
                 <a:cs typeface="Calibri" pitchFamily="34" charset="-120"/>
               </a:rPr>
-              <a:t>Se le pide expresamente que no escriba texto: los modelos visuales deforman las palabras, sobre todo en español. Los textos se agregan después desde la aplicación con Pillow, lo que permite mantenerlos correctos y en español.</a:t>
-            </a:r>
-            <a:endParaRPr lang="en-US" sz="1250" dirty="0"/>
+              <a:t>Todas las funciones están documentadas y los bloques comentados explican el porqué de cada decisión, no lo que ya dice el código.</a:t>
+            </a:r>
+            <a:endParaRPr lang="en-US" sz="1200" dirty="0"/>
           </a:p>
         </p:txBody>
       </p:sp>
@@ -3971,35 +4141,8 @@
         </p:nvSpPr>
         <p:spPr>
           <a:xfrm>
-            <a:off x="685800" y="5166360"/>
-            <a:ext cx="2834640" cy="1051560"/>
-          </a:xfrm>
-          <a:prstGeom prst="roundRect">
-            <a:avLst>
-              <a:gd name="adj" fmla="val 7826"/>
-            </a:avLst>
-          </a:prstGeom>
-          <a:solidFill>
-            <a:srgbClr val="F4F7F9"/>
-          </a:solidFill>
-          <a:ln w="12700">
-            <a:solidFill>
-              <a:srgbClr val="DFE6EC"/>
-            </a:solidFill>
-            <a:prstDash val="solid"/>
-          </a:ln>
-        </p:spPr>
-      </p:sp>
-      <p:sp>
-        <p:nvSpPr>
-          <p:cNvPr id="8" name="Shape 6"/>
-          <p:cNvSpPr/>
-          <p:nvPr/>
-        </p:nvSpPr>
-        <p:spPr>
-          <a:xfrm>
-            <a:off x="886968" y="5367528"/>
-            <a:ext cx="384048" cy="384048"/>
+            <a:off x="7360920" y="1929384"/>
+            <a:ext cx="420624" cy="420624"/>
           </a:xfrm>
           <a:prstGeom prst="ellipse">
             <a:avLst/>
@@ -4017,14 +4160,53 @@
       </p:sp>
       <p:sp>
         <p:nvSpPr>
+          <p:cNvPr id="8" name="Text 6"/>
+          <p:cNvSpPr/>
+          <p:nvPr/>
+        </p:nvSpPr>
+        <p:spPr>
+          <a:xfrm>
+            <a:off x="7360920" y="1929384"/>
+            <a:ext cx="420624" cy="420624"/>
+          </a:xfrm>
+          <a:prstGeom prst="rect">
+            <a:avLst/>
+          </a:prstGeom>
+          <a:noFill/>
+          <a:ln/>
+        </p:spPr>
+        <p:txBody>
+          <a:bodyPr wrap="square" lIns="0" tIns="0" rIns="0" bIns="0" rtlCol="0" anchor="ctr"/>
+          <a:lstStyle/>
+          <a:p>
+            <a:pPr algn="ctr" indent="0" marL="0">
+              <a:buNone/>
+            </a:pPr>
+            <a:r>
+              <a:rPr lang="en-US" sz="1300" b="1" dirty="0">
+                <a:solidFill>
+                  <a:srgbClr val="FFFFFF"/>
+                </a:solidFill>
+                <a:latin typeface="Calibri" pitchFamily="34" charset="0"/>
+                <a:ea typeface="Calibri" pitchFamily="34" charset="-122"/>
+                <a:cs typeface="Calibri" pitchFamily="34" charset="-120"/>
+              </a:rPr>
+              <a:t>1</a:t>
+            </a:r>
+            <a:endParaRPr lang="en-US" sz="1300" dirty="0"/>
+          </a:p>
+        </p:txBody>
+      </p:sp>
+      <p:sp>
+        <p:nvSpPr>
           <p:cNvPr id="9" name="Text 7"/>
           <p:cNvSpPr/>
           <p:nvPr/>
         </p:nvSpPr>
         <p:spPr>
           <a:xfrm>
-            <a:off x="886968" y="5367528"/>
-            <a:ext cx="384048" cy="384048"/>
+            <a:off x="7973568" y="1874520"/>
+            <a:ext cx="3566160" cy="274320"/>
           </a:xfrm>
           <a:prstGeom prst="rect">
             <a:avLst/>
@@ -4036,21 +4218,21 @@
           <a:bodyPr wrap="square" lIns="0" tIns="0" rIns="0" bIns="0" rtlCol="0" anchor="ctr"/>
           <a:lstStyle/>
           <a:p>
-            <a:pPr algn="ctr" indent="0" marL="0">
-              <a:buNone/>
-            </a:pPr>
-            <a:r>
-              <a:rPr lang="en-US" sz="1300" b="1" dirty="0">
-                <a:solidFill>
-                  <a:srgbClr val="FFFFFF"/>
-                </a:solidFill>
-                <a:latin typeface="Calibri" pitchFamily="34" charset="0"/>
-                <a:ea typeface="Calibri" pitchFamily="34" charset="-122"/>
-                <a:cs typeface="Calibri" pitchFamily="34" charset="-120"/>
-              </a:rPr>
-              <a:t>1</a:t>
-            </a:r>
-            <a:endParaRPr lang="en-US" sz="1300" dirty="0"/>
+            <a:pPr indent="0" marL="0">
+              <a:buNone/>
+            </a:pPr>
+            <a:r>
+              <a:rPr lang="en-US" sz="1350" b="1" dirty="0">
+                <a:solidFill>
+                  <a:srgbClr val="0B2E4F"/>
+                </a:solidFill>
+                <a:latin typeface="Calibri" pitchFamily="34" charset="0"/>
+                <a:ea typeface="Calibri" pitchFamily="34" charset="-122"/>
+                <a:cs typeface="Calibri" pitchFamily="34" charset="-120"/>
+              </a:rPr>
+              <a:t>La interfaz no sabe de IA</a:t>
+            </a:r>
+            <a:endParaRPr lang="en-US" sz="1350" dirty="0"/>
           </a:p>
         </p:txBody>
       </p:sp>
@@ -4062,47 +4244,8 @@
         </p:nvSpPr>
         <p:spPr>
           <a:xfrm>
-            <a:off x="1371600" y="5303520"/>
-            <a:ext cx="2103120" cy="329184"/>
-          </a:xfrm>
-          <a:prstGeom prst="rect">
-            <a:avLst/>
-          </a:prstGeom>
-          <a:noFill/>
-          <a:ln/>
-        </p:spPr>
-        <p:txBody>
-          <a:bodyPr wrap="square" lIns="0" tIns="0" rIns="0" bIns="0" rtlCol="0" anchor="ctr"/>
-          <a:lstStyle/>
-          <a:p>
-            <a:pPr indent="0" marL="0">
-              <a:buNone/>
-            </a:pPr>
-            <a:r>
-              <a:rPr lang="en-US" sz="1250" b="1" dirty="0">
-                <a:solidFill>
-                  <a:srgbClr val="0B2E4F"/>
-                </a:solidFill>
-                <a:latin typeface="Calibri" pitchFamily="34" charset="0"/>
-                <a:ea typeface="Calibri" pitchFamily="34" charset="-122"/>
-                <a:cs typeface="Calibri" pitchFamily="34" charset="-120"/>
-              </a:rPr>
-              <a:t>La IA ilustra</a:t>
-            </a:r>
-            <a:endParaRPr lang="en-US" sz="1250" dirty="0"/>
-          </a:p>
-        </p:txBody>
-      </p:sp>
-      <p:sp>
-        <p:nvSpPr>
-          <p:cNvPr id="11" name="Text 9"/>
-          <p:cNvSpPr/>
-          <p:nvPr/>
-        </p:nvSpPr>
-        <p:spPr>
-          <a:xfrm>
-            <a:off x="886968" y="5669280"/>
-            <a:ext cx="2514600" cy="457200"/>
+            <a:off x="7973568" y="2167128"/>
+            <a:ext cx="3566160" cy="676656"/>
           </a:xfrm>
           <a:prstGeom prst="rect">
             <a:avLst/>
@@ -4121,7 +4264,7 @@
               <a:buNone/>
             </a:pPr>
             <a:r>
-              <a:rPr lang="en-US" sz="950" dirty="0">
+              <a:rPr lang="en-US" sz="1050" dirty="0">
                 <a:solidFill>
                   <a:srgbClr val="26323E"/>
                 </a:solidFill>
@@ -4129,49 +4272,22 @@
                 <a:ea typeface="Calibri" pitchFamily="34" charset="-122"/>
                 <a:cs typeface="Calibri" pitchFamily="34" charset="-120"/>
               </a:rPr>
-              <a:t>Genera la imagen según el tipo de engaño detectado en el análisis.</a:t>
-            </a:r>
-            <a:endParaRPr lang="en-US" sz="950" dirty="0"/>
-          </a:p>
-        </p:txBody>
-      </p:sp>
-      <p:sp>
-        <p:nvSpPr>
-          <p:cNvPr id="12" name="Shape 10"/>
-          <p:cNvSpPr/>
-          <p:nvPr/>
-        </p:nvSpPr>
-        <p:spPr>
-          <a:xfrm>
-            <a:off x="3749040" y="5166360"/>
-            <a:ext cx="2834640" cy="1051560"/>
-          </a:xfrm>
-          <a:prstGeom prst="roundRect">
-            <a:avLst>
-              <a:gd name="adj" fmla="val 7826"/>
-            </a:avLst>
-          </a:prstGeom>
-          <a:solidFill>
-            <a:srgbClr val="F4F7F9"/>
-          </a:solidFill>
-          <a:ln w="12700">
-            <a:solidFill>
-              <a:srgbClr val="DFE6EC"/>
-            </a:solidFill>
-            <a:prstDash val="solid"/>
-          </a:ln>
-        </p:spPr>
-      </p:sp>
-      <p:sp>
-        <p:nvSpPr>
-          <p:cNvPr id="13" name="Shape 11"/>
-          <p:cNvSpPr/>
-          <p:nvPr/>
-        </p:nvSpPr>
-        <p:spPr>
-          <a:xfrm>
-            <a:off x="3950208" y="5367528"/>
-            <a:ext cx="384048" cy="384048"/>
+              <a:t>app.py solo llama a funciones del paquete guardia/. Cambiar de proveedor implica reescribir un archivo y ninguno más.</a:t>
+            </a:r>
+            <a:endParaRPr lang="en-US" sz="1050" dirty="0"/>
+          </a:p>
+        </p:txBody>
+      </p:sp>
+      <p:sp>
+        <p:nvSpPr>
+          <p:cNvPr id="11" name="Shape 9"/>
+          <p:cNvSpPr/>
+          <p:nvPr/>
+        </p:nvSpPr>
+        <p:spPr>
+          <a:xfrm>
+            <a:off x="7360920" y="2962656"/>
+            <a:ext cx="420624" cy="420624"/>
           </a:xfrm>
           <a:prstGeom prst="ellipse">
             <a:avLst/>
@@ -4189,92 +4305,92 @@
       </p:sp>
       <p:sp>
         <p:nvSpPr>
+          <p:cNvPr id="12" name="Text 10"/>
+          <p:cNvSpPr/>
+          <p:nvPr/>
+        </p:nvSpPr>
+        <p:spPr>
+          <a:xfrm>
+            <a:off x="7360920" y="2962656"/>
+            <a:ext cx="420624" cy="420624"/>
+          </a:xfrm>
+          <a:prstGeom prst="rect">
+            <a:avLst/>
+          </a:prstGeom>
+          <a:noFill/>
+          <a:ln/>
+        </p:spPr>
+        <p:txBody>
+          <a:bodyPr wrap="square" lIns="0" tIns="0" rIns="0" bIns="0" rtlCol="0" anchor="ctr"/>
+          <a:lstStyle/>
+          <a:p>
+            <a:pPr algn="ctr" indent="0" marL="0">
+              <a:buNone/>
+            </a:pPr>
+            <a:r>
+              <a:rPr lang="en-US" sz="1300" b="1" dirty="0">
+                <a:solidFill>
+                  <a:srgbClr val="FFFFFF"/>
+                </a:solidFill>
+                <a:latin typeface="Calibri" pitchFamily="34" charset="0"/>
+                <a:ea typeface="Calibri" pitchFamily="34" charset="-122"/>
+                <a:cs typeface="Calibri" pitchFamily="34" charset="-120"/>
+              </a:rPr>
+              <a:t>2</a:t>
+            </a:r>
+            <a:endParaRPr lang="en-US" sz="1300" dirty="0"/>
+          </a:p>
+        </p:txBody>
+      </p:sp>
+      <p:sp>
+        <p:nvSpPr>
+          <p:cNvPr id="13" name="Text 11"/>
+          <p:cNvSpPr/>
+          <p:nvPr/>
+        </p:nvSpPr>
+        <p:spPr>
+          <a:xfrm>
+            <a:off x="7973568" y="2907792"/>
+            <a:ext cx="3566160" cy="274320"/>
+          </a:xfrm>
+          <a:prstGeom prst="rect">
+            <a:avLst/>
+          </a:prstGeom>
+          <a:noFill/>
+          <a:ln/>
+        </p:spPr>
+        <p:txBody>
+          <a:bodyPr wrap="square" lIns="0" tIns="0" rIns="0" bIns="0" rtlCol="0" anchor="ctr"/>
+          <a:lstStyle/>
+          <a:p>
+            <a:pPr indent="0" marL="0">
+              <a:buNone/>
+            </a:pPr>
+            <a:r>
+              <a:rPr lang="en-US" sz="1350" b="1" dirty="0">
+                <a:solidFill>
+                  <a:srgbClr val="0B2E4F"/>
+                </a:solidFill>
+                <a:latin typeface="Calibri" pitchFamily="34" charset="0"/>
+                <a:ea typeface="Calibri" pitchFamily="34" charset="-122"/>
+                <a:cs typeface="Calibri" pitchFamily="34" charset="-120"/>
+              </a:rPr>
+              <a:t>Los prompts, en un solo lugar</a:t>
+            </a:r>
+            <a:endParaRPr lang="en-US" sz="1350" dirty="0"/>
+          </a:p>
+        </p:txBody>
+      </p:sp>
+      <p:sp>
+        <p:nvSpPr>
           <p:cNvPr id="14" name="Text 12"/>
           <p:cNvSpPr/>
           <p:nvPr/>
         </p:nvSpPr>
         <p:spPr>
           <a:xfrm>
-            <a:off x="3950208" y="5367528"/>
-            <a:ext cx="384048" cy="384048"/>
-          </a:xfrm>
-          <a:prstGeom prst="rect">
-            <a:avLst/>
-          </a:prstGeom>
-          <a:noFill/>
-          <a:ln/>
-        </p:spPr>
-        <p:txBody>
-          <a:bodyPr wrap="square" lIns="0" tIns="0" rIns="0" bIns="0" rtlCol="0" anchor="ctr"/>
-          <a:lstStyle/>
-          <a:p>
-            <a:pPr algn="ctr" indent="0" marL="0">
-              <a:buNone/>
-            </a:pPr>
-            <a:r>
-              <a:rPr lang="en-US" sz="1300" b="1" dirty="0">
-                <a:solidFill>
-                  <a:srgbClr val="FFFFFF"/>
-                </a:solidFill>
-                <a:latin typeface="Calibri" pitchFamily="34" charset="0"/>
-                <a:ea typeface="Calibri" pitchFamily="34" charset="-122"/>
-                <a:cs typeface="Calibri" pitchFamily="34" charset="-120"/>
-              </a:rPr>
-              <a:t>2</a:t>
-            </a:r>
-            <a:endParaRPr lang="en-US" sz="1300" dirty="0"/>
-          </a:p>
-        </p:txBody>
-      </p:sp>
-      <p:sp>
-        <p:nvSpPr>
-          <p:cNvPr id="15" name="Text 13"/>
-          <p:cNvSpPr/>
-          <p:nvPr/>
-        </p:nvSpPr>
-        <p:spPr>
-          <a:xfrm>
-            <a:off x="4434840" y="5303520"/>
-            <a:ext cx="2103120" cy="329184"/>
-          </a:xfrm>
-          <a:prstGeom prst="rect">
-            <a:avLst/>
-          </a:prstGeom>
-          <a:noFill/>
-          <a:ln/>
-        </p:spPr>
-        <p:txBody>
-          <a:bodyPr wrap="square" lIns="0" tIns="0" rIns="0" bIns="0" rtlCol="0" anchor="ctr"/>
-          <a:lstStyle/>
-          <a:p>
-            <a:pPr indent="0" marL="0">
-              <a:buNone/>
-            </a:pPr>
-            <a:r>
-              <a:rPr lang="en-US" sz="1250" b="1" dirty="0">
-                <a:solidFill>
-                  <a:srgbClr val="0B2E4F"/>
-                </a:solidFill>
-                <a:latin typeface="Calibri" pitchFamily="34" charset="0"/>
-                <a:ea typeface="Calibri" pitchFamily="34" charset="-122"/>
-                <a:cs typeface="Calibri" pitchFamily="34" charset="-120"/>
-              </a:rPr>
-              <a:t>La app compone</a:t>
-            </a:r>
-            <a:endParaRPr lang="en-US" sz="1250" dirty="0"/>
-          </a:p>
-        </p:txBody>
-      </p:sp>
-      <p:sp>
-        <p:nvSpPr>
-          <p:cNvPr id="16" name="Text 14"/>
-          <p:cNvSpPr/>
-          <p:nvPr/>
-        </p:nvSpPr>
-        <p:spPr>
-          <a:xfrm>
-            <a:off x="3950208" y="5669280"/>
-            <a:ext cx="2514600" cy="457200"/>
+            <a:off x="7973568" y="3200400"/>
+            <a:ext cx="3566160" cy="676656"/>
           </a:xfrm>
           <a:prstGeom prst="rect">
             <a:avLst/>
@@ -4293,7 +4409,7 @@
               <a:buNone/>
             </a:pPr>
             <a:r>
-              <a:rPr lang="en-US" sz="950" dirty="0">
+              <a:rPr lang="en-US" sz="1050" dirty="0">
                 <a:solidFill>
                   <a:srgbClr val="26323E"/>
                 </a:solidFill>
@@ -4301,352 +4417,22 @@
                 <a:ea typeface="Calibri" pitchFamily="34" charset="-122"/>
                 <a:cs typeface="Calibri" pitchFamily="34" charset="-120"/>
               </a:rPr>
-              <a:t>Encabezado, riesgo, señales y pie, en español y sin errores.</a:t>
-            </a:r>
-            <a:endParaRPr lang="en-US" sz="950" dirty="0"/>
-          </a:p>
-        </p:txBody>
-      </p:sp>
-      <p:sp>
-        <p:nvSpPr>
-          <p:cNvPr id="17" name="Shape 15"/>
-          <p:cNvSpPr/>
-          <p:nvPr/>
-        </p:nvSpPr>
-        <p:spPr>
-          <a:xfrm>
-            <a:off x="7818120" y="1783080"/>
-            <a:ext cx="2834640" cy="3977640"/>
-          </a:xfrm>
-          <a:prstGeom prst="roundRect">
-            <a:avLst>
-              <a:gd name="adj" fmla="val 1613"/>
-            </a:avLst>
-          </a:prstGeom>
-          <a:solidFill>
-            <a:srgbClr val="FFFFFF"/>
-          </a:solidFill>
-          <a:ln w="15875">
-            <a:solidFill>
-              <a:srgbClr val="DFE6EC"/>
-            </a:solidFill>
-            <a:prstDash val="solid"/>
-          </a:ln>
-        </p:spPr>
-      </p:sp>
-      <p:sp>
-        <p:nvSpPr>
-          <p:cNvPr id="18" name="Shape 16"/>
-          <p:cNvSpPr/>
-          <p:nvPr/>
-        </p:nvSpPr>
-        <p:spPr>
-          <a:xfrm>
-            <a:off x="7818120" y="1783080"/>
-            <a:ext cx="2834640" cy="502920"/>
-          </a:xfrm>
-          <a:prstGeom prst="rect">
-            <a:avLst/>
-          </a:prstGeom>
-          <a:solidFill>
-            <a:srgbClr val="0B2E4F"/>
-          </a:solidFill>
-          <a:ln w="12700">
-            <a:solidFill>
-              <a:srgbClr val="0B2E4F"/>
-            </a:solidFill>
-            <a:prstDash val="solid"/>
-          </a:ln>
-        </p:spPr>
-      </p:sp>
-      <p:sp>
-        <p:nvSpPr>
-          <p:cNvPr id="19" name="Text 17"/>
-          <p:cNvSpPr/>
-          <p:nvPr/>
-        </p:nvSpPr>
-        <p:spPr>
-          <a:xfrm>
-            <a:off x="7982712" y="1856232"/>
-            <a:ext cx="1828800" cy="347472"/>
-          </a:xfrm>
-          <a:prstGeom prst="rect">
-            <a:avLst/>
-          </a:prstGeom>
-          <a:noFill/>
-          <a:ln/>
-        </p:spPr>
-        <p:txBody>
-          <a:bodyPr wrap="square" lIns="0" tIns="0" rIns="0" bIns="0" rtlCol="0" anchor="ctr"/>
-          <a:lstStyle/>
-          <a:p>
-            <a:pPr indent="0" marL="0">
-              <a:buNone/>
-            </a:pPr>
-            <a:r>
-              <a:rPr lang="en-US" sz="1500" b="1" dirty="0">
-                <a:solidFill>
-                  <a:srgbClr val="FFFFFF"/>
-                </a:solidFill>
-                <a:latin typeface="Calibri" pitchFamily="34" charset="0"/>
-                <a:ea typeface="Calibri" pitchFamily="34" charset="-122"/>
-                <a:cs typeface="Calibri" pitchFamily="34" charset="-120"/>
-              </a:rPr>
-              <a:t>Guard</a:t>
-            </a:r>
-            <a:pPr indent="0" marL="0">
-              <a:buNone/>
-            </a:pPr>
-            <a:r>
-              <a:rPr lang="en-US" sz="1500" b="1" dirty="0">
-                <a:solidFill>
-                  <a:srgbClr val="8FD3E0"/>
-                </a:solidFill>
-                <a:latin typeface="Calibri" pitchFamily="34" charset="0"/>
-                <a:ea typeface="Calibri" pitchFamily="34" charset="-122"/>
-                <a:cs typeface="Calibri" pitchFamily="34" charset="-120"/>
-              </a:rPr>
-              <a:t>IA</a:t>
-            </a:r>
-            <a:endParaRPr lang="en-US" sz="1500" dirty="0"/>
-          </a:p>
-        </p:txBody>
-      </p:sp>
-      <p:sp>
-        <p:nvSpPr>
-          <p:cNvPr id="20" name="Shape 18"/>
-          <p:cNvSpPr/>
-          <p:nvPr/>
-        </p:nvSpPr>
-        <p:spPr>
-          <a:xfrm>
-            <a:off x="7818120" y="2286000"/>
-            <a:ext cx="2834640" cy="1600200"/>
-          </a:xfrm>
-          <a:prstGeom prst="rect">
-            <a:avLst/>
-          </a:prstGeom>
-          <a:solidFill>
-            <a:srgbClr val="DCE8F0"/>
-          </a:solidFill>
-          <a:ln w="12700">
-            <a:solidFill>
-              <a:srgbClr val="DCE8F0"/>
-            </a:solidFill>
-            <a:prstDash val="solid"/>
-          </a:ln>
-        </p:spPr>
-      </p:sp>
-      <p:sp>
-        <p:nvSpPr>
-          <p:cNvPr id="21" name="Text 19"/>
-          <p:cNvSpPr/>
-          <p:nvPr/>
-        </p:nvSpPr>
-        <p:spPr>
-          <a:xfrm>
-            <a:off x="7818120" y="2286000"/>
-            <a:ext cx="2834640" cy="1600200"/>
-          </a:xfrm>
-          <a:prstGeom prst="rect">
-            <a:avLst/>
-          </a:prstGeom>
-          <a:noFill/>
-          <a:ln/>
-        </p:spPr>
-        <p:txBody>
-          <a:bodyPr wrap="square" lIns="0" tIns="0" rIns="0" bIns="0" rtlCol="0" anchor="ctr"/>
-          <a:lstStyle/>
-          <a:p>
-            <a:pPr algn="ctr" indent="0" marL="0">
-              <a:buNone/>
-            </a:pPr>
-            <a:r>
-              <a:rPr lang="en-US" sz="1100" i="1" dirty="0">
-                <a:solidFill>
-                  <a:srgbClr val="5F7B8C"/>
-                </a:solidFill>
-                <a:latin typeface="Calibri" pitchFamily="34" charset="0"/>
-                <a:ea typeface="Calibri" pitchFamily="34" charset="-122"/>
-                <a:cs typeface="Calibri" pitchFamily="34" charset="-120"/>
-              </a:rPr>
-              <a:t>ilustración generada</a:t>
-            </a:r>
-            <a:endParaRPr lang="en-US" sz="1100" dirty="0"/>
-          </a:p>
-          <a:p>
-            <a:pPr algn="ctr" indent="0" marL="0">
-              <a:buNone/>
-            </a:pPr>
-            <a:r>
-              <a:rPr lang="en-US" sz="1100" i="1" dirty="0">
-                <a:solidFill>
-                  <a:srgbClr val="5F7B8C"/>
-                </a:solidFill>
-                <a:latin typeface="Calibri" pitchFamily="34" charset="0"/>
-                <a:ea typeface="Calibri" pitchFamily="34" charset="-122"/>
-                <a:cs typeface="Calibri" pitchFamily="34" charset="-120"/>
-              </a:rPr>
-              <a:t>con IA</a:t>
-            </a:r>
-            <a:endParaRPr lang="en-US" sz="1100" dirty="0"/>
-          </a:p>
-        </p:txBody>
-      </p:sp>
-      <p:sp>
-        <p:nvSpPr>
-          <p:cNvPr id="22" name="Shape 20"/>
-          <p:cNvSpPr/>
-          <p:nvPr/>
-        </p:nvSpPr>
-        <p:spPr>
-          <a:xfrm>
-            <a:off x="7982712" y="4050792"/>
-            <a:ext cx="1170432" cy="310896"/>
-          </a:xfrm>
-          <a:prstGeom prst="roundRect">
-            <a:avLst>
-              <a:gd name="adj" fmla="val 50000"/>
-            </a:avLst>
-          </a:prstGeom>
-          <a:solidFill>
-            <a:srgbClr val="D64545"/>
-          </a:solidFill>
-          <a:ln w="12700">
-            <a:solidFill>
-              <a:srgbClr val="D64545"/>
-            </a:solidFill>
-            <a:prstDash val="solid"/>
-          </a:ln>
-        </p:spPr>
-      </p:sp>
-      <p:sp>
-        <p:nvSpPr>
-          <p:cNvPr id="23" name="Text 21"/>
-          <p:cNvSpPr/>
-          <p:nvPr/>
-        </p:nvSpPr>
-        <p:spPr>
-          <a:xfrm>
-            <a:off x="7982712" y="4050792"/>
-            <a:ext cx="1170432" cy="310896"/>
-          </a:xfrm>
-          <a:prstGeom prst="rect">
-            <a:avLst/>
-          </a:prstGeom>
-          <a:noFill/>
-          <a:ln/>
-        </p:spPr>
-        <p:txBody>
-          <a:bodyPr wrap="square" lIns="0" tIns="0" rIns="0" bIns="0" rtlCol="0" anchor="ctr"/>
-          <a:lstStyle/>
-          <a:p>
-            <a:pPr algn="ctr" indent="0" marL="0">
-              <a:buNone/>
-            </a:pPr>
-            <a:r>
-              <a:rPr lang="en-US" sz="900" b="1" dirty="0">
-                <a:solidFill>
-                  <a:srgbClr val="FFFFFF"/>
-                </a:solidFill>
-                <a:latin typeface="Calibri" pitchFamily="34" charset="0"/>
-                <a:ea typeface="Calibri" pitchFamily="34" charset="-122"/>
-                <a:cs typeface="Calibri" pitchFamily="34" charset="-120"/>
-              </a:rPr>
-              <a:t>RIESGO ALTO</a:t>
-            </a:r>
-            <a:endParaRPr lang="en-US" sz="900" dirty="0"/>
-          </a:p>
-        </p:txBody>
-      </p:sp>
-      <p:sp>
-        <p:nvSpPr>
-          <p:cNvPr id="24" name="Text 22"/>
-          <p:cNvSpPr/>
-          <p:nvPr/>
-        </p:nvSpPr>
-        <p:spPr>
-          <a:xfrm>
-            <a:off x="7982712" y="4453128"/>
-            <a:ext cx="2468880" cy="292608"/>
-          </a:xfrm>
-          <a:prstGeom prst="rect">
-            <a:avLst/>
-          </a:prstGeom>
-          <a:noFill/>
-          <a:ln/>
-        </p:spPr>
-        <p:txBody>
-          <a:bodyPr wrap="square" lIns="0" tIns="0" rIns="0" bIns="0" rtlCol="0" anchor="ctr"/>
-          <a:lstStyle/>
-          <a:p>
-            <a:pPr indent="0" marL="0">
-              <a:buNone/>
-            </a:pPr>
-            <a:r>
-              <a:rPr lang="en-US" sz="1400" b="1" dirty="0">
-                <a:solidFill>
-                  <a:srgbClr val="0B2E4F"/>
-                </a:solidFill>
-                <a:latin typeface="Calibri" pitchFamily="34" charset="0"/>
-                <a:ea typeface="Calibri" pitchFamily="34" charset="-122"/>
-                <a:cs typeface="Calibri" pitchFamily="34" charset="-120"/>
-              </a:rPr>
-              <a:t>Suplantación de banco</a:t>
-            </a:r>
-            <a:endParaRPr lang="en-US" sz="1400" dirty="0"/>
-          </a:p>
-        </p:txBody>
-      </p:sp>
-      <p:sp>
-        <p:nvSpPr>
-          <p:cNvPr id="25" name="Text 23"/>
-          <p:cNvSpPr/>
-          <p:nvPr/>
-        </p:nvSpPr>
-        <p:spPr>
-          <a:xfrm>
-            <a:off x="7982712" y="4782312"/>
-            <a:ext cx="2468880" cy="201168"/>
-          </a:xfrm>
-          <a:prstGeom prst="rect">
-            <a:avLst/>
-          </a:prstGeom>
-          <a:noFill/>
-          <a:ln/>
-        </p:spPr>
-        <p:txBody>
-          <a:bodyPr wrap="square" lIns="0" tIns="0" rIns="0" bIns="0" rtlCol="0" anchor="ctr"/>
-          <a:lstStyle/>
-          <a:p>
-            <a:pPr indent="0" marL="0">
-              <a:buNone/>
-            </a:pPr>
-            <a:r>
-              <a:rPr lang="en-US" sz="850" b="1" spc="80" kern="0" dirty="0">
-                <a:solidFill>
-                  <a:srgbClr val="1F7A8C"/>
-                </a:solidFill>
-                <a:latin typeface="Calibri" pitchFamily="34" charset="0"/>
-                <a:ea typeface="Calibri" pitchFamily="34" charset="-122"/>
-                <a:cs typeface="Calibri" pitchFamily="34" charset="-120"/>
-              </a:rPr>
-              <a:t>CÓMO RECONOCERLO</a:t>
-            </a:r>
-            <a:endParaRPr lang="en-US" sz="850" dirty="0"/>
-          </a:p>
-        </p:txBody>
-      </p:sp>
-      <p:sp>
-        <p:nvSpPr>
-          <p:cNvPr id="26" name="Shape 24"/>
-          <p:cNvSpPr/>
-          <p:nvPr/>
-        </p:nvSpPr>
-        <p:spPr>
-          <a:xfrm>
-            <a:off x="8001000" y="5038344"/>
-            <a:ext cx="73152" cy="73152"/>
+              <a:t>Ajustar el comportamiento del análisis no obliga a tocar la interfaz ni las llamadas a la API.</a:t>
+            </a:r>
+            <a:endParaRPr lang="en-US" sz="1050" dirty="0"/>
+          </a:p>
+        </p:txBody>
+      </p:sp>
+      <p:sp>
+        <p:nvSpPr>
+          <p:cNvPr id="15" name="Shape 13"/>
+          <p:cNvSpPr/>
+          <p:nvPr/>
+        </p:nvSpPr>
+        <p:spPr>
+          <a:xfrm>
+            <a:off x="7360920" y="3995928"/>
+            <a:ext cx="420624" cy="420624"/>
           </a:xfrm>
           <a:prstGeom prst="ellipse">
             <a:avLst/>
@@ -4664,14 +4450,14 @@
       </p:sp>
       <p:sp>
         <p:nvSpPr>
-          <p:cNvPr id="27" name="Text 25"/>
-          <p:cNvSpPr/>
-          <p:nvPr/>
-        </p:nvSpPr>
-        <p:spPr>
-          <a:xfrm>
-            <a:off x="8147304" y="4965192"/>
-            <a:ext cx="2377440" cy="219456"/>
+          <p:cNvPr id="16" name="Text 14"/>
+          <p:cNvSpPr/>
+          <p:nvPr/>
+        </p:nvSpPr>
+        <p:spPr>
+          <a:xfrm>
+            <a:off x="7360920" y="3995928"/>
+            <a:ext cx="420624" cy="420624"/>
           </a:xfrm>
           <a:prstGeom prst="rect">
             <a:avLst/>
@@ -4683,11 +4469,92 @@
           <a:bodyPr wrap="square" lIns="0" tIns="0" rIns="0" bIns="0" rtlCol="0" anchor="ctr"/>
           <a:lstStyle/>
           <a:p>
+            <a:pPr algn="ctr" indent="0" marL="0">
+              <a:buNone/>
+            </a:pPr>
+            <a:r>
+              <a:rPr lang="en-US" sz="1300" b="1" dirty="0">
+                <a:solidFill>
+                  <a:srgbClr val="FFFFFF"/>
+                </a:solidFill>
+                <a:latin typeface="Calibri" pitchFamily="34" charset="0"/>
+                <a:ea typeface="Calibri" pitchFamily="34" charset="-122"/>
+                <a:cs typeface="Calibri" pitchFamily="34" charset="-120"/>
+              </a:rPr>
+              <a:t>3</a:t>
+            </a:r>
+            <a:endParaRPr lang="en-US" sz="1300" dirty="0"/>
+          </a:p>
+        </p:txBody>
+      </p:sp>
+      <p:sp>
+        <p:nvSpPr>
+          <p:cNvPr id="17" name="Text 15"/>
+          <p:cNvSpPr/>
+          <p:nvPr/>
+        </p:nvSpPr>
+        <p:spPr>
+          <a:xfrm>
+            <a:off x="7973568" y="3941064"/>
+            <a:ext cx="3566160" cy="274320"/>
+          </a:xfrm>
+          <a:prstGeom prst="rect">
+            <a:avLst/>
+          </a:prstGeom>
+          <a:noFill/>
+          <a:ln/>
+        </p:spPr>
+        <p:txBody>
+          <a:bodyPr wrap="square" lIns="0" tIns="0" rIns="0" bIns="0" rtlCol="0" anchor="ctr"/>
+          <a:lstStyle/>
+          <a:p>
             <a:pPr indent="0" marL="0">
               <a:buNone/>
             </a:pPr>
             <a:r>
-              <a:rPr lang="en-US" sz="900" dirty="0">
+              <a:rPr lang="en-US" sz="1350" b="1" dirty="0">
+                <a:solidFill>
+                  <a:srgbClr val="0B2E4F"/>
+                </a:solidFill>
+                <a:latin typeface="Calibri" pitchFamily="34" charset="0"/>
+                <a:ea typeface="Calibri" pitchFamily="34" charset="-122"/>
+                <a:cs typeface="Calibri" pitchFamily="34" charset="-120"/>
+              </a:rPr>
+              <a:t>Los errores llegan traducidos</a:t>
+            </a:r>
+            <a:endParaRPr lang="en-US" sz="1350" dirty="0"/>
+          </a:p>
+        </p:txBody>
+      </p:sp>
+      <p:sp>
+        <p:nvSpPr>
+          <p:cNvPr id="18" name="Text 16"/>
+          <p:cNvSpPr/>
+          <p:nvPr/>
+        </p:nvSpPr>
+        <p:spPr>
+          <a:xfrm>
+            <a:off x="7973568" y="4233672"/>
+            <a:ext cx="3566160" cy="676656"/>
+          </a:xfrm>
+          <a:prstGeom prst="rect">
+            <a:avLst/>
+          </a:prstGeom>
+          <a:noFill/>
+          <a:ln/>
+        </p:spPr>
+        <p:txBody>
+          <a:bodyPr wrap="square" lIns="0" tIns="0" rIns="0" bIns="0" rtlCol="0" anchor="t"/>
+          <a:lstStyle/>
+          <a:p>
+            <a:pPr indent="0" marL="0">
+              <a:lnSpc>
+                <a:spcPct val="110000"/>
+              </a:lnSpc>
+              <a:buNone/>
+            </a:pPr>
+            <a:r>
+              <a:rPr lang="en-US" sz="1050" dirty="0">
                 <a:solidFill>
                   <a:srgbClr val="26323E"/>
                 </a:solidFill>
@@ -4695,22 +4562,22 @@
                 <a:ea typeface="Calibri" pitchFamily="34" charset="-122"/>
                 <a:cs typeface="Calibri" pitchFamily="34" charset="-120"/>
               </a:rPr>
-              <a:t>El dominio no es el del banco</a:t>
-            </a:r>
-            <a:endParaRPr lang="en-US" sz="900" dirty="0"/>
-          </a:p>
-        </p:txBody>
-      </p:sp>
-      <p:sp>
-        <p:nvSpPr>
-          <p:cNvPr id="28" name="Shape 26"/>
-          <p:cNvSpPr/>
-          <p:nvPr/>
-        </p:nvSpPr>
-        <p:spPr>
-          <a:xfrm>
-            <a:off x="8001000" y="5257800"/>
-            <a:ext cx="73152" cy="73152"/>
+              <a:t>Un "429 RESOURCE_EXHAUSTED" no le sirve a nadie: la app lo convierte en una explicación con la acción a seguir.</a:t>
+            </a:r>
+            <a:endParaRPr lang="en-US" sz="1050" dirty="0"/>
+          </a:p>
+        </p:txBody>
+      </p:sp>
+      <p:sp>
+        <p:nvSpPr>
+          <p:cNvPr id="19" name="Shape 17"/>
+          <p:cNvSpPr/>
+          <p:nvPr/>
+        </p:nvSpPr>
+        <p:spPr>
+          <a:xfrm>
+            <a:off x="7360920" y="5029200"/>
+            <a:ext cx="420624" cy="420624"/>
           </a:xfrm>
           <a:prstGeom prst="ellipse">
             <a:avLst/>
@@ -4728,14 +4595,14 @@
       </p:sp>
       <p:sp>
         <p:nvSpPr>
-          <p:cNvPr id="29" name="Text 27"/>
-          <p:cNvSpPr/>
-          <p:nvPr/>
-        </p:nvSpPr>
-        <p:spPr>
-          <a:xfrm>
-            <a:off x="8147304" y="5184648"/>
-            <a:ext cx="2377440" cy="219456"/>
+          <p:cNvPr id="20" name="Text 18"/>
+          <p:cNvSpPr/>
+          <p:nvPr/>
+        </p:nvSpPr>
+        <p:spPr>
+          <a:xfrm>
+            <a:off x="7360920" y="5029200"/>
+            <a:ext cx="420624" cy="420624"/>
           </a:xfrm>
           <a:prstGeom prst="rect">
             <a:avLst/>
@@ -4747,11 +4614,92 @@
           <a:bodyPr wrap="square" lIns="0" tIns="0" rIns="0" bIns="0" rtlCol="0" anchor="ctr"/>
           <a:lstStyle/>
           <a:p>
+            <a:pPr algn="ctr" indent="0" marL="0">
+              <a:buNone/>
+            </a:pPr>
+            <a:r>
+              <a:rPr lang="en-US" sz="1300" b="1" dirty="0">
+                <a:solidFill>
+                  <a:srgbClr val="FFFFFF"/>
+                </a:solidFill>
+                <a:latin typeface="Calibri" pitchFamily="34" charset="0"/>
+                <a:ea typeface="Calibri" pitchFamily="34" charset="-122"/>
+                <a:cs typeface="Calibri" pitchFamily="34" charset="-120"/>
+              </a:rPr>
+              <a:t>4</a:t>
+            </a:r>
+            <a:endParaRPr lang="en-US" sz="1300" dirty="0"/>
+          </a:p>
+        </p:txBody>
+      </p:sp>
+      <p:sp>
+        <p:nvSpPr>
+          <p:cNvPr id="21" name="Text 19"/>
+          <p:cNvSpPr/>
+          <p:nvPr/>
+        </p:nvSpPr>
+        <p:spPr>
+          <a:xfrm>
+            <a:off x="7973568" y="4974336"/>
+            <a:ext cx="3566160" cy="274320"/>
+          </a:xfrm>
+          <a:prstGeom prst="rect">
+            <a:avLst/>
+          </a:prstGeom>
+          <a:noFill/>
+          <a:ln/>
+        </p:spPr>
+        <p:txBody>
+          <a:bodyPr wrap="square" lIns="0" tIns="0" rIns="0" bIns="0" rtlCol="0" anchor="ctr"/>
+          <a:lstStyle/>
+          <a:p>
             <a:pPr indent="0" marL="0">
               <a:buNone/>
             </a:pPr>
             <a:r>
-              <a:rPr lang="en-US" sz="900" dirty="0">
+              <a:rPr lang="en-US" sz="1350" b="1" dirty="0">
+                <a:solidFill>
+                  <a:srgbClr val="0B2E4F"/>
+                </a:solidFill>
+                <a:latin typeface="Calibri" pitchFamily="34" charset="0"/>
+                <a:ea typeface="Calibri" pitchFamily="34" charset="-122"/>
+                <a:cs typeface="Calibri" pitchFamily="34" charset="-120"/>
+              </a:rPr>
+              <a:t>La clave nunca está en el código</a:t>
+            </a:r>
+            <a:endParaRPr lang="en-US" sz="1350" dirty="0"/>
+          </a:p>
+        </p:txBody>
+      </p:sp>
+      <p:sp>
+        <p:nvSpPr>
+          <p:cNvPr id="22" name="Text 20"/>
+          <p:cNvSpPr/>
+          <p:nvPr/>
+        </p:nvSpPr>
+        <p:spPr>
+          <a:xfrm>
+            <a:off x="7973568" y="5266944"/>
+            <a:ext cx="3566160" cy="676656"/>
+          </a:xfrm>
+          <a:prstGeom prst="rect">
+            <a:avLst/>
+          </a:prstGeom>
+          <a:noFill/>
+          <a:ln/>
+        </p:spPr>
+        <p:txBody>
+          <a:bodyPr wrap="square" lIns="0" tIns="0" rIns="0" bIns="0" rtlCol="0" anchor="t"/>
+          <a:lstStyle/>
+          <a:p>
+            <a:pPr indent="0" marL="0">
+              <a:lnSpc>
+                <a:spcPct val="110000"/>
+              </a:lnSpc>
+              <a:buNone/>
+            </a:pPr>
+            <a:r>
+              <a:rPr lang="en-US" sz="1050" dirty="0">
                 <a:solidFill>
                   <a:srgbClr val="26323E"/>
                 </a:solidFill>
@@ -4759,118 +4707,15 @@
                 <a:ea typeface="Calibri" pitchFamily="34" charset="-122"/>
                 <a:cs typeface="Calibri" pitchFamily="34" charset="-120"/>
               </a:rPr>
-              <a:t>Amenaza con bloquear la cuenta</a:t>
-            </a:r>
-            <a:endParaRPr lang="en-US" sz="900" dirty="0"/>
-          </a:p>
-        </p:txBody>
-      </p:sp>
-      <p:sp>
-        <p:nvSpPr>
-          <p:cNvPr id="30" name="Shape 28"/>
-          <p:cNvSpPr/>
-          <p:nvPr/>
-        </p:nvSpPr>
-        <p:spPr>
-          <a:xfrm>
-            <a:off x="8001000" y="5477256"/>
-            <a:ext cx="73152" cy="73152"/>
-          </a:xfrm>
-          <a:prstGeom prst="ellipse">
-            <a:avLst/>
-          </a:prstGeom>
-          <a:solidFill>
-            <a:srgbClr val="1F7A8C"/>
-          </a:solidFill>
-          <a:ln w="12700">
-            <a:solidFill>
-              <a:srgbClr val="1F7A8C"/>
-            </a:solidFill>
-            <a:prstDash val="solid"/>
-          </a:ln>
-        </p:spPr>
-      </p:sp>
-      <p:sp>
-        <p:nvSpPr>
-          <p:cNvPr id="31" name="Text 29"/>
-          <p:cNvSpPr/>
-          <p:nvPr/>
-        </p:nvSpPr>
-        <p:spPr>
-          <a:xfrm>
-            <a:off x="8147304" y="5404104"/>
-            <a:ext cx="2377440" cy="219456"/>
-          </a:xfrm>
-          <a:prstGeom prst="rect">
-            <a:avLst/>
-          </a:prstGeom>
-          <a:noFill/>
-          <a:ln/>
-        </p:spPr>
-        <p:txBody>
-          <a:bodyPr wrap="square" lIns="0" tIns="0" rIns="0" bIns="0" rtlCol="0" anchor="ctr"/>
-          <a:lstStyle/>
-          <a:p>
-            <a:pPr indent="0" marL="0">
-              <a:buNone/>
-            </a:pPr>
-            <a:r>
-              <a:rPr lang="en-US" sz="900" dirty="0">
-                <a:solidFill>
-                  <a:srgbClr val="26323E"/>
-                </a:solidFill>
-                <a:latin typeface="Calibri" pitchFamily="34" charset="0"/>
-                <a:ea typeface="Calibri" pitchFamily="34" charset="-122"/>
-                <a:cs typeface="Calibri" pitchFamily="34" charset="-120"/>
-              </a:rPr>
-              <a:t>Pide clave y datos de tarjeta</a:t>
-            </a:r>
-            <a:endParaRPr lang="en-US" sz="900" dirty="0"/>
-          </a:p>
-        </p:txBody>
-      </p:sp>
-      <p:sp>
-        <p:nvSpPr>
-          <p:cNvPr id="32" name="Text 30"/>
-          <p:cNvSpPr/>
-          <p:nvPr/>
-        </p:nvSpPr>
-        <p:spPr>
-          <a:xfrm>
-            <a:off x="7818120" y="5852160"/>
-            <a:ext cx="2834640" cy="274320"/>
-          </a:xfrm>
-          <a:prstGeom prst="rect">
-            <a:avLst/>
-          </a:prstGeom>
-          <a:noFill/>
-          <a:ln/>
-        </p:spPr>
-        <p:txBody>
-          <a:bodyPr wrap="square" lIns="0" tIns="0" rIns="0" bIns="0" rtlCol="0" anchor="ctr"/>
-          <a:lstStyle/>
-          <a:p>
-            <a:pPr algn="ctr" indent="0" marL="0">
-              <a:buNone/>
-            </a:pPr>
-            <a:r>
-              <a:rPr lang="en-US" sz="950" i="1" dirty="0">
-                <a:solidFill>
-                  <a:srgbClr val="6B7C8C"/>
-                </a:solidFill>
-                <a:latin typeface="Calibri" pitchFamily="34" charset="0"/>
-                <a:ea typeface="Calibri" pitchFamily="34" charset="-122"/>
-                <a:cs typeface="Calibri" pitchFamily="34" charset="-120"/>
-              </a:rPr>
-              <a:t>Estructura de la placa que genera la app</a:t>
-            </a:r>
-            <a:endParaRPr lang="en-US" sz="950" dirty="0"/>
-          </a:p>
-        </p:txBody>
-      </p:sp>
-      <p:sp>
-        <p:nvSpPr>
-          <p:cNvPr id="33" name="Text 31"/>
+              <a:t>Se lee de los secretos de Streamlit o del entorno, y el archivo está excluido del repositorio.</a:t>
+            </a:r>
+            <a:endParaRPr lang="en-US" sz="1050" dirty="0"/>
+          </a:p>
+        </p:txBody>
+      </p:sp>
+      <p:sp>
+        <p:nvSpPr>
+          <p:cNvPr id="23" name="Text 21"/>
           <p:cNvSpPr/>
           <p:nvPr/>
         </p:nvSpPr>
@@ -4923,7 +4768,7 @@
       </p:sp>
       <p:sp>
         <p:nvSpPr>
-          <p:cNvPr id="34" name="Text 32"/>
+          <p:cNvPr id="24" name="Text 22"/>
           <p:cNvSpPr/>
           <p:nvPr/>
         </p:nvSpPr>
@@ -5025,7 +4870,7 @@
                 <a:ea typeface="Calibri" pitchFamily="34" charset="-122"/>
                 <a:cs typeface="Calibri" pitchFamily="34" charset="-120"/>
               </a:rPr>
-              <a:t>Factibilidad económica</a:t>
+              <a:t>Decisiones técnicas</a:t>
             </a:r>
             <a:endParaRPr lang="en-US" sz="3600" dirty="0"/>
           </a:p>
@@ -5040,7 +4885,7 @@
         <p:spPr>
           <a:xfrm>
             <a:off x="685800" y="1133856"/>
-            <a:ext cx="10058400" cy="502920"/>
+            <a:ext cx="6858000" cy="502920"/>
           </a:xfrm>
           <a:prstGeom prst="rect">
             <a:avLst/>
@@ -5064,7 +4909,7 @@
                 <a:ea typeface="Calibri" pitchFamily="34" charset="-122"/>
                 <a:cs typeface="Calibri" pitchFamily="34" charset="-120"/>
               </a:rPr>
-              <a:t>Cada análisis consume alrededor de 1.500 tokens de entrada y 500 de salida.</a:t>
+              <a:t>Por qué Gemini, y qué queda para la próxima versión.</a:t>
             </a:r>
             <a:endParaRPr lang="en-US" sz="1500" dirty="0"/>
           </a:p>
@@ -5072,18 +4917,57 @@
       </p:sp>
       <p:sp>
         <p:nvSpPr>
-          <p:cNvPr id="4" name="Shape 2"/>
-          <p:cNvSpPr/>
-          <p:nvPr/>
-        </p:nvSpPr>
-        <p:spPr>
-          <a:xfrm>
-            <a:off x="685800" y="1874520"/>
-            <a:ext cx="3429000" cy="1463040"/>
+          <p:cNvPr id="4" name="Text 2"/>
+          <p:cNvSpPr/>
+          <p:nvPr/>
+        </p:nvSpPr>
+        <p:spPr>
+          <a:xfrm>
+            <a:off x="685800" y="1828800"/>
+            <a:ext cx="6309360" cy="256032"/>
+          </a:xfrm>
+          <a:prstGeom prst="rect">
+            <a:avLst/>
+          </a:prstGeom>
+          <a:noFill/>
+          <a:ln/>
+        </p:spPr>
+        <p:txBody>
+          <a:bodyPr wrap="square" lIns="0" tIns="0" rIns="0" bIns="0" rtlCol="0" anchor="ctr"/>
+          <a:lstStyle/>
+          <a:p>
+            <a:pPr indent="0" marL="0">
+              <a:buNone/>
+            </a:pPr>
+            <a:r>
+              <a:rPr lang="en-US" sz="1100" b="1" spc="120" kern="0" dirty="0">
+                <a:solidFill>
+                  <a:srgbClr val="1F7A8C"/>
+                </a:solidFill>
+                <a:latin typeface="Calibri" pitchFamily="34" charset="0"/>
+                <a:ea typeface="Calibri" pitchFamily="34" charset="-122"/>
+                <a:cs typeface="Calibri" pitchFamily="34" charset="-120"/>
+              </a:rPr>
+              <a:t>POR QUÉ ESTE MODELO</a:t>
+            </a:r>
+            <a:endParaRPr lang="en-US" sz="1100" dirty="0"/>
+          </a:p>
+        </p:txBody>
+      </p:sp>
+      <p:sp>
+        <p:nvSpPr>
+          <p:cNvPr id="5" name="Shape 3"/>
+          <p:cNvSpPr/>
+          <p:nvPr/>
+        </p:nvSpPr>
+        <p:spPr>
+          <a:xfrm>
+            <a:off x="685800" y="2212848"/>
+            <a:ext cx="6309360" cy="1152144"/>
           </a:xfrm>
           <a:prstGeom prst="roundRect">
             <a:avLst>
-              <a:gd name="adj" fmla="val 5625"/>
+              <a:gd name="adj" fmla="val 7143"/>
             </a:avLst>
           </a:prstGeom>
           <a:solidFill>
@@ -5099,14 +4983,39 @@
       </p:sp>
       <p:sp>
         <p:nvSpPr>
-          <p:cNvPr id="5" name="Text 3"/>
-          <p:cNvSpPr/>
-          <p:nvPr/>
-        </p:nvSpPr>
-        <p:spPr>
-          <a:xfrm>
-            <a:off x="978408" y="2011680"/>
-            <a:ext cx="2834640" cy="658368"/>
+          <p:cNvPr id="6" name="Shape 4"/>
+          <p:cNvSpPr/>
+          <p:nvPr/>
+        </p:nvSpPr>
+        <p:spPr>
+          <a:xfrm>
+            <a:off x="960120" y="2542032"/>
+            <a:ext cx="493776" cy="493776"/>
+          </a:xfrm>
+          <a:prstGeom prst="ellipse">
+            <a:avLst/>
+          </a:prstGeom>
+          <a:solidFill>
+            <a:srgbClr val="1F7A8C"/>
+          </a:solidFill>
+          <a:ln w="12700">
+            <a:solidFill>
+              <a:srgbClr val="1F7A8C"/>
+            </a:solidFill>
+            <a:prstDash val="solid"/>
+          </a:ln>
+        </p:spPr>
+      </p:sp>
+      <p:sp>
+        <p:nvSpPr>
+          <p:cNvPr id="7" name="Text 5"/>
+          <p:cNvSpPr/>
+          <p:nvPr/>
+        </p:nvSpPr>
+        <p:spPr>
+          <a:xfrm>
+            <a:off x="960120" y="2542032"/>
+            <a:ext cx="493776" cy="493776"/>
           </a:xfrm>
           <a:prstGeom prst="rect">
             <a:avLst/>
@@ -5118,34 +5027,73 @@
           <a:bodyPr wrap="square" lIns="0" tIns="0" rIns="0" bIns="0" rtlCol="0" anchor="ctr"/>
           <a:lstStyle/>
           <a:p>
+            <a:pPr algn="ctr" indent="0" marL="0">
+              <a:buNone/>
+            </a:pPr>
+            <a:r>
+              <a:rPr lang="en-US" sz="1700" b="1" dirty="0">
+                <a:solidFill>
+                  <a:srgbClr val="FFFFFF"/>
+                </a:solidFill>
+                <a:latin typeface="Calibri" pitchFamily="34" charset="0"/>
+                <a:ea typeface="Calibri" pitchFamily="34" charset="-122"/>
+                <a:cs typeface="Calibri" pitchFamily="34" charset="-120"/>
+              </a:rPr>
+              <a:t>1</a:t>
+            </a:r>
+            <a:endParaRPr lang="en-US" sz="1700" dirty="0"/>
+          </a:p>
+        </p:txBody>
+      </p:sp>
+      <p:sp>
+        <p:nvSpPr>
+          <p:cNvPr id="8" name="Text 6"/>
+          <p:cNvSpPr/>
+          <p:nvPr/>
+        </p:nvSpPr>
+        <p:spPr>
+          <a:xfrm>
+            <a:off x="1645920" y="2359152"/>
+            <a:ext cx="5120640" cy="292608"/>
+          </a:xfrm>
+          <a:prstGeom prst="rect">
+            <a:avLst/>
+          </a:prstGeom>
+          <a:noFill/>
+          <a:ln/>
+        </p:spPr>
+        <p:txBody>
+          <a:bodyPr wrap="square" lIns="0" tIns="0" rIns="0" bIns="0" rtlCol="0" anchor="ctr"/>
+          <a:lstStyle/>
+          <a:p>
             <a:pPr indent="0" marL="0">
               <a:buNone/>
             </a:pPr>
             <a:r>
-              <a:rPr lang="en-US" sz="3200" b="1" dirty="0">
-                <a:solidFill>
-                  <a:srgbClr val="1F7A8C"/>
-                </a:solidFill>
-                <a:latin typeface="Calibri" pitchFamily="34" charset="0"/>
-                <a:ea typeface="Calibri" pitchFamily="34" charset="-122"/>
-                <a:cs typeface="Calibri" pitchFamily="34" charset="-120"/>
-              </a:rPr>
-              <a:t>US$ 0,0005</a:t>
-            </a:r>
-            <a:endParaRPr lang="en-US" sz="3200" dirty="0"/>
-          </a:p>
-        </p:txBody>
-      </p:sp>
-      <p:sp>
-        <p:nvSpPr>
-          <p:cNvPr id="6" name="Text 4"/>
-          <p:cNvSpPr/>
-          <p:nvPr/>
-        </p:nvSpPr>
-        <p:spPr>
-          <a:xfrm>
-            <a:off x="978408" y="2670048"/>
-            <a:ext cx="2834640" cy="502920"/>
+              <a:rPr lang="en-US" sz="1450" b="1" dirty="0">
+                <a:solidFill>
+                  <a:srgbClr val="0B2E4F"/>
+                </a:solidFill>
+                <a:latin typeface="Calibri" pitchFamily="34" charset="0"/>
+                <a:ea typeface="Calibri" pitchFamily="34" charset="-122"/>
+                <a:cs typeface="Calibri" pitchFamily="34" charset="-120"/>
+              </a:rPr>
+              <a:t>Nivel gratuito real</a:t>
+            </a:r>
+            <a:endParaRPr lang="en-US" sz="1450" dirty="0"/>
+          </a:p>
+        </p:txBody>
+      </p:sp>
+      <p:sp>
+        <p:nvSpPr>
+          <p:cNvPr id="9" name="Text 7"/>
+          <p:cNvSpPr/>
+          <p:nvPr/>
+        </p:nvSpPr>
+        <p:spPr>
+          <a:xfrm>
+            <a:off x="1645920" y="2670048"/>
+            <a:ext cx="5120640" cy="603504"/>
           </a:xfrm>
           <a:prstGeom prst="rect">
             <a:avLst/>
@@ -5158,10 +5106,13 @@
           <a:lstStyle/>
           <a:p>
             <a:pPr indent="0" marL="0">
-              <a:buNone/>
-            </a:pPr>
-            <a:r>
-              <a:rPr lang="en-US" sz="1200" dirty="0">
+              <a:lnSpc>
+                <a:spcPct val="110000"/>
+              </a:lnSpc>
+              <a:buNone/>
+            </a:pPr>
+            <a:r>
+              <a:rPr lang="en-US" sz="1050" dirty="0">
                 <a:solidFill>
                   <a:srgbClr val="26323E"/>
                 </a:solidFill>
@@ -5169,26 +5120,26 @@
                 <a:ea typeface="Calibri" pitchFamily="34" charset="-122"/>
                 <a:cs typeface="Calibri" pitchFamily="34" charset="-120"/>
               </a:rPr>
-              <a:t>por consulta al modelo</a:t>
-            </a:r>
-            <a:endParaRPr lang="en-US" sz="1200" dirty="0"/>
-          </a:p>
-        </p:txBody>
-      </p:sp>
-      <p:sp>
-        <p:nvSpPr>
-          <p:cNvPr id="7" name="Shape 5"/>
-          <p:cNvSpPr/>
-          <p:nvPr/>
-        </p:nvSpPr>
-        <p:spPr>
-          <a:xfrm>
-            <a:off x="4370832" y="1874520"/>
-            <a:ext cx="3429000" cy="1463040"/>
+              <a:t>La familia Flash de Gemini figura como "free of charge" en la documentación oficial: la herramienta se opera sin costo y sin tarjeta de crédito.</a:t>
+            </a:r>
+            <a:endParaRPr lang="en-US" sz="1050" dirty="0"/>
+          </a:p>
+        </p:txBody>
+      </p:sp>
+      <p:sp>
+        <p:nvSpPr>
+          <p:cNvPr id="10" name="Shape 8"/>
+          <p:cNvSpPr/>
+          <p:nvPr/>
+        </p:nvSpPr>
+        <p:spPr>
+          <a:xfrm>
+            <a:off x="685800" y="3511296"/>
+            <a:ext cx="6309360" cy="1152144"/>
           </a:xfrm>
           <a:prstGeom prst="roundRect">
             <a:avLst>
-              <a:gd name="adj" fmla="val 5625"/>
+              <a:gd name="adj" fmla="val 7143"/>
             </a:avLst>
           </a:prstGeom>
           <a:solidFill>
@@ -5204,14 +5155,39 @@
       </p:sp>
       <p:sp>
         <p:nvSpPr>
-          <p:cNvPr id="8" name="Text 6"/>
-          <p:cNvSpPr/>
-          <p:nvPr/>
-        </p:nvSpPr>
-        <p:spPr>
-          <a:xfrm>
-            <a:off x="4663440" y="2011680"/>
-            <a:ext cx="2834640" cy="658368"/>
+          <p:cNvPr id="11" name="Shape 9"/>
+          <p:cNvSpPr/>
+          <p:nvPr/>
+        </p:nvSpPr>
+        <p:spPr>
+          <a:xfrm>
+            <a:off x="960120" y="3840480"/>
+            <a:ext cx="493776" cy="493776"/>
+          </a:xfrm>
+          <a:prstGeom prst="ellipse">
+            <a:avLst/>
+          </a:prstGeom>
+          <a:solidFill>
+            <a:srgbClr val="1F7A8C"/>
+          </a:solidFill>
+          <a:ln w="12700">
+            <a:solidFill>
+              <a:srgbClr val="1F7A8C"/>
+            </a:solidFill>
+            <a:prstDash val="solid"/>
+          </a:ln>
+        </p:spPr>
+      </p:sp>
+      <p:sp>
+        <p:nvSpPr>
+          <p:cNvPr id="12" name="Text 10"/>
+          <p:cNvSpPr/>
+          <p:nvPr/>
+        </p:nvSpPr>
+        <p:spPr>
+          <a:xfrm>
+            <a:off x="960120" y="3840480"/>
+            <a:ext cx="493776" cy="493776"/>
           </a:xfrm>
           <a:prstGeom prst="rect">
             <a:avLst/>
@@ -5223,11 +5199,50 @@
           <a:bodyPr wrap="square" lIns="0" tIns="0" rIns="0" bIns="0" rtlCol="0" anchor="ctr"/>
           <a:lstStyle/>
           <a:p>
+            <a:pPr algn="ctr" indent="0" marL="0">
+              <a:buNone/>
+            </a:pPr>
+            <a:r>
+              <a:rPr lang="en-US" sz="1700" b="1" dirty="0">
+                <a:solidFill>
+                  <a:srgbClr val="FFFFFF"/>
+                </a:solidFill>
+                <a:latin typeface="Calibri" pitchFamily="34" charset="0"/>
+                <a:ea typeface="Calibri" pitchFamily="34" charset="-122"/>
+                <a:cs typeface="Calibri" pitchFamily="34" charset="-120"/>
+              </a:rPr>
+              <a:t>2</a:t>
+            </a:r>
+            <a:endParaRPr lang="en-US" sz="1700" dirty="0"/>
+          </a:p>
+        </p:txBody>
+      </p:sp>
+      <p:sp>
+        <p:nvSpPr>
+          <p:cNvPr id="13" name="Text 11"/>
+          <p:cNvSpPr/>
+          <p:nvPr/>
+        </p:nvSpPr>
+        <p:spPr>
+          <a:xfrm>
+            <a:off x="1645920" y="3657600"/>
+            <a:ext cx="5120640" cy="292608"/>
+          </a:xfrm>
+          <a:prstGeom prst="rect">
+            <a:avLst/>
+          </a:prstGeom>
+          <a:noFill/>
+          <a:ln/>
+        </p:spPr>
+        <p:txBody>
+          <a:bodyPr wrap="square" lIns="0" tIns="0" rIns="0" bIns="0" rtlCol="0" anchor="ctr"/>
+          <a:lstStyle/>
+          <a:p>
             <a:pPr indent="0" marL="0">
               <a:buNone/>
             </a:pPr>
             <a:r>
-              <a:rPr lang="en-US" sz="3200" b="1" dirty="0">
+              <a:rPr lang="en-US" sz="1450" b="1" dirty="0">
                 <a:solidFill>
                   <a:srgbClr val="0B2E4F"/>
                 </a:solidFill>
@@ -5235,22 +5250,22 @@
                 <a:ea typeface="Calibri" pitchFamily="34" charset="-122"/>
                 <a:cs typeface="Calibri" pitchFamily="34" charset="-120"/>
               </a:rPr>
-              <a:t>US$ 0,27</a:t>
-            </a:r>
-            <a:endParaRPr lang="en-US" sz="3200" dirty="0"/>
-          </a:p>
-        </p:txBody>
-      </p:sp>
-      <p:sp>
-        <p:nvSpPr>
-          <p:cNvPr id="9" name="Text 7"/>
-          <p:cNvSpPr/>
-          <p:nvPr/>
-        </p:nvSpPr>
-        <p:spPr>
-          <a:xfrm>
-            <a:off x="4663440" y="2670048"/>
-            <a:ext cx="2834640" cy="502920"/>
+              <a:t>Salida dirigida con esquema</a:t>
+            </a:r>
+            <a:endParaRPr lang="en-US" sz="1450" dirty="0"/>
+          </a:p>
+        </p:txBody>
+      </p:sp>
+      <p:sp>
+        <p:nvSpPr>
+          <p:cNvPr id="14" name="Text 12"/>
+          <p:cNvSpPr/>
+          <p:nvPr/>
+        </p:nvSpPr>
+        <p:spPr>
+          <a:xfrm>
+            <a:off x="1645920" y="3968496"/>
+            <a:ext cx="5120640" cy="603504"/>
           </a:xfrm>
           <a:prstGeom prst="rect">
             <a:avLst/>
@@ -5263,10 +5278,13 @@
           <a:lstStyle/>
           <a:p>
             <a:pPr indent="0" marL="0">
-              <a:buNone/>
-            </a:pPr>
-            <a:r>
-              <a:rPr lang="en-US" sz="1200" dirty="0">
+              <a:lnSpc>
+                <a:spcPct val="110000"/>
+              </a:lnSpc>
+              <a:buNone/>
+            </a:pPr>
+            <a:r>
+              <a:rPr lang="en-US" sz="1050" dirty="0">
                 <a:solidFill>
                   <a:srgbClr val="26323E"/>
                 </a:solidFill>
@@ -5274,26 +5292,26 @@
                 <a:ea typeface="Calibri" pitchFamily="34" charset="-122"/>
                 <a:cs typeface="Calibri" pitchFamily="34" charset="-120"/>
               </a:rPr>
-              <a:t>por mes, con 500 análisis</a:t>
-            </a:r>
-            <a:endParaRPr lang="en-US" sz="1200" dirty="0"/>
-          </a:p>
-        </p:txBody>
-      </p:sp>
-      <p:sp>
-        <p:nvSpPr>
-          <p:cNvPr id="10" name="Shape 8"/>
-          <p:cNvSpPr/>
-          <p:nvPr/>
-        </p:nvSpPr>
-        <p:spPr>
-          <a:xfrm>
-            <a:off x="8055864" y="1874520"/>
-            <a:ext cx="3429000" cy="1463040"/>
+              <a:t>Es lo que exige la consigna y lo que vuelve confiable a la app: la API garantiza la estructura de la respuesta.</a:t>
+            </a:r>
+            <a:endParaRPr lang="en-US" sz="1050" dirty="0"/>
+          </a:p>
+        </p:txBody>
+      </p:sp>
+      <p:sp>
+        <p:nvSpPr>
+          <p:cNvPr id="15" name="Shape 13"/>
+          <p:cNvSpPr/>
+          <p:nvPr/>
+        </p:nvSpPr>
+        <p:spPr>
+          <a:xfrm>
+            <a:off x="685800" y="4809744"/>
+            <a:ext cx="6309360" cy="1152144"/>
           </a:xfrm>
           <a:prstGeom prst="roundRect">
             <a:avLst>
-              <a:gd name="adj" fmla="val 5625"/>
+              <a:gd name="adj" fmla="val 7143"/>
             </a:avLst>
           </a:prstGeom>
           <a:solidFill>
@@ -5309,6 +5327,1183 @@
       </p:sp>
       <p:sp>
         <p:nvSpPr>
+          <p:cNvPr id="16" name="Shape 14"/>
+          <p:cNvSpPr/>
+          <p:nvPr/>
+        </p:nvSpPr>
+        <p:spPr>
+          <a:xfrm>
+            <a:off x="960120" y="5138928"/>
+            <a:ext cx="493776" cy="493776"/>
+          </a:xfrm>
+          <a:prstGeom prst="ellipse">
+            <a:avLst/>
+          </a:prstGeom>
+          <a:solidFill>
+            <a:srgbClr val="1F7A8C"/>
+          </a:solidFill>
+          <a:ln w="12700">
+            <a:solidFill>
+              <a:srgbClr val="1F7A8C"/>
+            </a:solidFill>
+            <a:prstDash val="solid"/>
+          </a:ln>
+        </p:spPr>
+      </p:sp>
+      <p:sp>
+        <p:nvSpPr>
+          <p:cNvPr id="17" name="Text 15"/>
+          <p:cNvSpPr/>
+          <p:nvPr/>
+        </p:nvSpPr>
+        <p:spPr>
+          <a:xfrm>
+            <a:off x="960120" y="5138928"/>
+            <a:ext cx="493776" cy="493776"/>
+          </a:xfrm>
+          <a:prstGeom prst="rect">
+            <a:avLst/>
+          </a:prstGeom>
+          <a:noFill/>
+          <a:ln/>
+        </p:spPr>
+        <p:txBody>
+          <a:bodyPr wrap="square" lIns="0" tIns="0" rIns="0" bIns="0" rtlCol="0" anchor="ctr"/>
+          <a:lstStyle/>
+          <a:p>
+            <a:pPr algn="ctr" indent="0" marL="0">
+              <a:buNone/>
+            </a:pPr>
+            <a:r>
+              <a:rPr lang="en-US" sz="1700" b="1" dirty="0">
+                <a:solidFill>
+                  <a:srgbClr val="FFFFFF"/>
+                </a:solidFill>
+                <a:latin typeface="Calibri" pitchFamily="34" charset="0"/>
+                <a:ea typeface="Calibri" pitchFamily="34" charset="-122"/>
+                <a:cs typeface="Calibri" pitchFamily="34" charset="-120"/>
+              </a:rPr>
+              <a:t>3</a:t>
+            </a:r>
+            <a:endParaRPr lang="en-US" sz="1700" dirty="0"/>
+          </a:p>
+        </p:txBody>
+      </p:sp>
+      <p:sp>
+        <p:nvSpPr>
+          <p:cNvPr id="18" name="Text 16"/>
+          <p:cNvSpPr/>
+          <p:nvPr/>
+        </p:nvSpPr>
+        <p:spPr>
+          <a:xfrm>
+            <a:off x="1645920" y="4956048"/>
+            <a:ext cx="5120640" cy="292608"/>
+          </a:xfrm>
+          <a:prstGeom prst="rect">
+            <a:avLst/>
+          </a:prstGeom>
+          <a:noFill/>
+          <a:ln/>
+        </p:spPr>
+        <p:txBody>
+          <a:bodyPr wrap="square" lIns="0" tIns="0" rIns="0" bIns="0" rtlCol="0" anchor="ctr"/>
+          <a:lstStyle/>
+          <a:p>
+            <a:pPr indent="0" marL="0">
+              <a:buNone/>
+            </a:pPr>
+            <a:r>
+              <a:rPr lang="en-US" sz="1450" b="1" dirty="0">
+                <a:solidFill>
+                  <a:srgbClr val="0B2E4F"/>
+                </a:solidFill>
+                <a:latin typeface="Calibri" pitchFamily="34" charset="0"/>
+                <a:ea typeface="Calibri" pitchFamily="34" charset="-122"/>
+                <a:cs typeface="Calibri" pitchFamily="34" charset="-120"/>
+              </a:rPr>
+              <a:t>Costo cero como parte de la propuesta</a:t>
+            </a:r>
+            <a:endParaRPr lang="en-US" sz="1450" dirty="0"/>
+          </a:p>
+        </p:txBody>
+      </p:sp>
+      <p:sp>
+        <p:nvSpPr>
+          <p:cNvPr id="19" name="Text 17"/>
+          <p:cNvSpPr/>
+          <p:nvPr/>
+        </p:nvSpPr>
+        <p:spPr>
+          <a:xfrm>
+            <a:off x="1645920" y="5266944"/>
+            <a:ext cx="5120640" cy="603504"/>
+          </a:xfrm>
+          <a:prstGeom prst="rect">
+            <a:avLst/>
+          </a:prstGeom>
+          <a:noFill/>
+          <a:ln/>
+        </p:spPr>
+        <p:txBody>
+          <a:bodyPr wrap="square" lIns="0" tIns="0" rIns="0" bIns="0" rtlCol="0" anchor="t"/>
+          <a:lstStyle/>
+          <a:p>
+            <a:pPr indent="0" marL="0">
+              <a:lnSpc>
+                <a:spcPct val="110000"/>
+              </a:lnSpc>
+              <a:buNone/>
+            </a:pPr>
+            <a:r>
+              <a:rPr lang="en-US" sz="1050" dirty="0">
+                <a:solidFill>
+                  <a:srgbClr val="26323E"/>
+                </a:solidFill>
+                <a:latin typeface="Calibri" pitchFamily="34" charset="0"/>
+                <a:ea typeface="Calibri" pitchFamily="34" charset="-122"/>
+                <a:cs typeface="Calibri" pitchFamily="34" charset="-120"/>
+              </a:rPr>
+              <a:t>Si la herramienta apunta a PyMEs sin presupuesto de seguridad, que su operación no cueste nada no es un detalle: es parte del argumento.</a:t>
+            </a:r>
+            <a:endParaRPr lang="en-US" sz="1050" dirty="0"/>
+          </a:p>
+        </p:txBody>
+      </p:sp>
+      <p:sp>
+        <p:nvSpPr>
+          <p:cNvPr id="20" name="Text 18"/>
+          <p:cNvSpPr/>
+          <p:nvPr/>
+        </p:nvSpPr>
+        <p:spPr>
+          <a:xfrm>
+            <a:off x="7360920" y="1828800"/>
+            <a:ext cx="4160520" cy="256032"/>
+          </a:xfrm>
+          <a:prstGeom prst="rect">
+            <a:avLst/>
+          </a:prstGeom>
+          <a:noFill/>
+          <a:ln/>
+        </p:spPr>
+        <p:txBody>
+          <a:bodyPr wrap="square" lIns="0" tIns="0" rIns="0" bIns="0" rtlCol="0" anchor="ctr"/>
+          <a:lstStyle/>
+          <a:p>
+            <a:pPr indent="0" marL="0">
+              <a:buNone/>
+            </a:pPr>
+            <a:r>
+              <a:rPr lang="en-US" sz="1000" b="1" spc="90" kern="0" dirty="0">
+                <a:solidFill>
+                  <a:srgbClr val="1F7A8C"/>
+                </a:solidFill>
+                <a:latin typeface="Calibri" pitchFamily="34" charset="0"/>
+                <a:ea typeface="Calibri" pitchFamily="34" charset="-122"/>
+                <a:cs typeface="Calibri" pitchFamily="34" charset="-120"/>
+              </a:rPr>
+              <a:t>TRABAJO FUTURO: LA PLACA DE CONCIENTIZACIÓN</a:t>
+            </a:r>
+            <a:endParaRPr lang="en-US" sz="1000" dirty="0"/>
+          </a:p>
+        </p:txBody>
+      </p:sp>
+      <p:sp>
+        <p:nvSpPr>
+          <p:cNvPr id="21" name="Shape 19"/>
+          <p:cNvSpPr/>
+          <p:nvPr/>
+        </p:nvSpPr>
+        <p:spPr>
+          <a:xfrm>
+            <a:off x="7360920" y="2194560"/>
+            <a:ext cx="2148840" cy="3017520"/>
+          </a:xfrm>
+          <a:prstGeom prst="roundRect">
+            <a:avLst>
+              <a:gd name="adj" fmla="val 2128"/>
+            </a:avLst>
+          </a:prstGeom>
+          <a:solidFill>
+            <a:srgbClr val="FFFFFF"/>
+          </a:solidFill>
+          <a:ln w="15875">
+            <a:solidFill>
+              <a:srgbClr val="DFE6EC"/>
+            </a:solidFill>
+            <a:prstDash val="solid"/>
+          </a:ln>
+        </p:spPr>
+      </p:sp>
+      <p:sp>
+        <p:nvSpPr>
+          <p:cNvPr id="22" name="Shape 20"/>
+          <p:cNvSpPr/>
+          <p:nvPr/>
+        </p:nvSpPr>
+        <p:spPr>
+          <a:xfrm>
+            <a:off x="7360920" y="2194560"/>
+            <a:ext cx="2148840" cy="384048"/>
+          </a:xfrm>
+          <a:prstGeom prst="rect">
+            <a:avLst/>
+          </a:prstGeom>
+          <a:solidFill>
+            <a:srgbClr val="0B2E4F"/>
+          </a:solidFill>
+          <a:ln w="12700">
+            <a:solidFill>
+              <a:srgbClr val="0B2E4F"/>
+            </a:solidFill>
+            <a:prstDash val="solid"/>
+          </a:ln>
+        </p:spPr>
+      </p:sp>
+      <p:sp>
+        <p:nvSpPr>
+          <p:cNvPr id="23" name="Text 21"/>
+          <p:cNvSpPr/>
+          <p:nvPr/>
+        </p:nvSpPr>
+        <p:spPr>
+          <a:xfrm>
+            <a:off x="7488936" y="2249424"/>
+            <a:ext cx="1463040" cy="274320"/>
+          </a:xfrm>
+          <a:prstGeom prst="rect">
+            <a:avLst/>
+          </a:prstGeom>
+          <a:noFill/>
+          <a:ln/>
+        </p:spPr>
+        <p:txBody>
+          <a:bodyPr wrap="square" lIns="0" tIns="0" rIns="0" bIns="0" rtlCol="0" anchor="ctr"/>
+          <a:lstStyle/>
+          <a:p>
+            <a:pPr indent="0" marL="0">
+              <a:buNone/>
+            </a:pPr>
+            <a:r>
+              <a:rPr lang="en-US" sz="1200" b="1" dirty="0">
+                <a:solidFill>
+                  <a:srgbClr val="FFFFFF"/>
+                </a:solidFill>
+                <a:latin typeface="Calibri" pitchFamily="34" charset="0"/>
+                <a:ea typeface="Calibri" pitchFamily="34" charset="-122"/>
+                <a:cs typeface="Calibri" pitchFamily="34" charset="-120"/>
+              </a:rPr>
+              <a:t>Guard</a:t>
+            </a:r>
+            <a:pPr indent="0" marL="0">
+              <a:buNone/>
+            </a:pPr>
+            <a:r>
+              <a:rPr lang="en-US" sz="1200" b="1" dirty="0">
+                <a:solidFill>
+                  <a:srgbClr val="8FD3E0"/>
+                </a:solidFill>
+                <a:latin typeface="Calibri" pitchFamily="34" charset="0"/>
+                <a:ea typeface="Calibri" pitchFamily="34" charset="-122"/>
+                <a:cs typeface="Calibri" pitchFamily="34" charset="-120"/>
+              </a:rPr>
+              <a:t>IA</a:t>
+            </a:r>
+            <a:endParaRPr lang="en-US" sz="1200" dirty="0"/>
+          </a:p>
+        </p:txBody>
+      </p:sp>
+      <p:sp>
+        <p:nvSpPr>
+          <p:cNvPr id="24" name="Shape 22"/>
+          <p:cNvSpPr/>
+          <p:nvPr/>
+        </p:nvSpPr>
+        <p:spPr>
+          <a:xfrm>
+            <a:off x="7360920" y="2578608"/>
+            <a:ext cx="2148840" cy="1188720"/>
+          </a:xfrm>
+          <a:prstGeom prst="rect">
+            <a:avLst/>
+          </a:prstGeom>
+          <a:solidFill>
+            <a:srgbClr val="DCE8F0"/>
+          </a:solidFill>
+          <a:ln w="12700">
+            <a:solidFill>
+              <a:srgbClr val="DCE8F0"/>
+            </a:solidFill>
+            <a:prstDash val="solid"/>
+          </a:ln>
+        </p:spPr>
+      </p:sp>
+      <p:sp>
+        <p:nvSpPr>
+          <p:cNvPr id="25" name="Text 23"/>
+          <p:cNvSpPr/>
+          <p:nvPr/>
+        </p:nvSpPr>
+        <p:spPr>
+          <a:xfrm>
+            <a:off x="7360920" y="2578608"/>
+            <a:ext cx="2148840" cy="1188720"/>
+          </a:xfrm>
+          <a:prstGeom prst="rect">
+            <a:avLst/>
+          </a:prstGeom>
+          <a:noFill/>
+          <a:ln/>
+        </p:spPr>
+        <p:txBody>
+          <a:bodyPr wrap="square" lIns="0" tIns="0" rIns="0" bIns="0" rtlCol="0" anchor="ctr"/>
+          <a:lstStyle/>
+          <a:p>
+            <a:pPr algn="ctr" indent="0" marL="0">
+              <a:buNone/>
+            </a:pPr>
+            <a:r>
+              <a:rPr lang="en-US" sz="950" i="1" dirty="0">
+                <a:solidFill>
+                  <a:srgbClr val="5F7B8C"/>
+                </a:solidFill>
+                <a:latin typeface="Calibri" pitchFamily="34" charset="0"/>
+                <a:ea typeface="Calibri" pitchFamily="34" charset="-122"/>
+                <a:cs typeface="Calibri" pitchFamily="34" charset="-120"/>
+              </a:rPr>
+              <a:t>ilustración</a:t>
+            </a:r>
+            <a:endParaRPr lang="en-US" sz="950" dirty="0"/>
+          </a:p>
+          <a:p>
+            <a:pPr algn="ctr" indent="0" marL="0">
+              <a:buNone/>
+            </a:pPr>
+            <a:r>
+              <a:rPr lang="en-US" sz="950" i="1" dirty="0">
+                <a:solidFill>
+                  <a:srgbClr val="5F7B8C"/>
+                </a:solidFill>
+                <a:latin typeface="Calibri" pitchFamily="34" charset="0"/>
+                <a:ea typeface="Calibri" pitchFamily="34" charset="-122"/>
+                <a:cs typeface="Calibri" pitchFamily="34" charset="-120"/>
+              </a:rPr>
+              <a:t>generada con IA</a:t>
+            </a:r>
+            <a:endParaRPr lang="en-US" sz="950" dirty="0"/>
+          </a:p>
+        </p:txBody>
+      </p:sp>
+      <p:sp>
+        <p:nvSpPr>
+          <p:cNvPr id="26" name="Shape 24"/>
+          <p:cNvSpPr/>
+          <p:nvPr/>
+        </p:nvSpPr>
+        <p:spPr>
+          <a:xfrm>
+            <a:off x="7488936" y="3895344"/>
+            <a:ext cx="932688" cy="256032"/>
+          </a:xfrm>
+          <a:prstGeom prst="roundRect">
+            <a:avLst>
+              <a:gd name="adj" fmla="val 50000"/>
+            </a:avLst>
+          </a:prstGeom>
+          <a:solidFill>
+            <a:srgbClr val="D64545"/>
+          </a:solidFill>
+          <a:ln w="12700">
+            <a:solidFill>
+              <a:srgbClr val="D64545"/>
+            </a:solidFill>
+            <a:prstDash val="solid"/>
+          </a:ln>
+        </p:spPr>
+      </p:sp>
+      <p:sp>
+        <p:nvSpPr>
+          <p:cNvPr id="27" name="Text 25"/>
+          <p:cNvSpPr/>
+          <p:nvPr/>
+        </p:nvSpPr>
+        <p:spPr>
+          <a:xfrm>
+            <a:off x="7488936" y="3895344"/>
+            <a:ext cx="932688" cy="256032"/>
+          </a:xfrm>
+          <a:prstGeom prst="rect">
+            <a:avLst/>
+          </a:prstGeom>
+          <a:noFill/>
+          <a:ln/>
+        </p:spPr>
+        <p:txBody>
+          <a:bodyPr wrap="square" lIns="0" tIns="0" rIns="0" bIns="0" rtlCol="0" anchor="ctr"/>
+          <a:lstStyle/>
+          <a:p>
+            <a:pPr algn="ctr" indent="0" marL="0">
+              <a:buNone/>
+            </a:pPr>
+            <a:r>
+              <a:rPr lang="en-US" sz="750" b="1" dirty="0">
+                <a:solidFill>
+                  <a:srgbClr val="FFFFFF"/>
+                </a:solidFill>
+                <a:latin typeface="Calibri" pitchFamily="34" charset="0"/>
+                <a:ea typeface="Calibri" pitchFamily="34" charset="-122"/>
+                <a:cs typeface="Calibri" pitchFamily="34" charset="-120"/>
+              </a:rPr>
+              <a:t>RIESGO ALTO</a:t>
+            </a:r>
+            <a:endParaRPr lang="en-US" sz="750" dirty="0"/>
+          </a:p>
+        </p:txBody>
+      </p:sp>
+      <p:sp>
+        <p:nvSpPr>
+          <p:cNvPr id="28" name="Text 26"/>
+          <p:cNvSpPr/>
+          <p:nvPr/>
+        </p:nvSpPr>
+        <p:spPr>
+          <a:xfrm>
+            <a:off x="7488936" y="4206240"/>
+            <a:ext cx="1920240" cy="256032"/>
+          </a:xfrm>
+          <a:prstGeom prst="rect">
+            <a:avLst/>
+          </a:prstGeom>
+          <a:noFill/>
+          <a:ln/>
+        </p:spPr>
+        <p:txBody>
+          <a:bodyPr wrap="square" lIns="0" tIns="0" rIns="0" bIns="0" rtlCol="0" anchor="ctr"/>
+          <a:lstStyle/>
+          <a:p>
+            <a:pPr indent="0" marL="0">
+              <a:buNone/>
+            </a:pPr>
+            <a:r>
+              <a:rPr lang="en-US" sz="1150" b="1" dirty="0">
+                <a:solidFill>
+                  <a:srgbClr val="0B2E4F"/>
+                </a:solidFill>
+                <a:latin typeface="Calibri" pitchFamily="34" charset="0"/>
+                <a:ea typeface="Calibri" pitchFamily="34" charset="-122"/>
+                <a:cs typeface="Calibri" pitchFamily="34" charset="-120"/>
+              </a:rPr>
+              <a:t>Suplantación de banco</a:t>
+            </a:r>
+            <a:endParaRPr lang="en-US" sz="1150" dirty="0"/>
+          </a:p>
+        </p:txBody>
+      </p:sp>
+      <p:sp>
+        <p:nvSpPr>
+          <p:cNvPr id="29" name="Shape 27"/>
+          <p:cNvSpPr/>
+          <p:nvPr/>
+        </p:nvSpPr>
+        <p:spPr>
+          <a:xfrm>
+            <a:off x="7507224" y="4581144"/>
+            <a:ext cx="64008" cy="64008"/>
+          </a:xfrm>
+          <a:prstGeom prst="ellipse">
+            <a:avLst/>
+          </a:prstGeom>
+          <a:solidFill>
+            <a:srgbClr val="1F7A8C"/>
+          </a:solidFill>
+          <a:ln w="12700">
+            <a:solidFill>
+              <a:srgbClr val="1F7A8C"/>
+            </a:solidFill>
+            <a:prstDash val="solid"/>
+          </a:ln>
+        </p:spPr>
+      </p:sp>
+      <p:sp>
+        <p:nvSpPr>
+          <p:cNvPr id="30" name="Text 28"/>
+          <p:cNvSpPr/>
+          <p:nvPr/>
+        </p:nvSpPr>
+        <p:spPr>
+          <a:xfrm>
+            <a:off x="7635240" y="4517136"/>
+            <a:ext cx="1828800" cy="192024"/>
+          </a:xfrm>
+          <a:prstGeom prst="rect">
+            <a:avLst/>
+          </a:prstGeom>
+          <a:noFill/>
+          <a:ln/>
+        </p:spPr>
+        <p:txBody>
+          <a:bodyPr wrap="square" lIns="0" tIns="0" rIns="0" bIns="0" rtlCol="0" anchor="ctr"/>
+          <a:lstStyle/>
+          <a:p>
+            <a:pPr indent="0" marL="0">
+              <a:buNone/>
+            </a:pPr>
+            <a:r>
+              <a:rPr lang="en-US" sz="750" dirty="0">
+                <a:solidFill>
+                  <a:srgbClr val="26323E"/>
+                </a:solidFill>
+                <a:latin typeface="Calibri" pitchFamily="34" charset="0"/>
+                <a:ea typeface="Calibri" pitchFamily="34" charset="-122"/>
+                <a:cs typeface="Calibri" pitchFamily="34" charset="-120"/>
+              </a:rPr>
+              <a:t>El dominio no es el del banco</a:t>
+            </a:r>
+            <a:endParaRPr lang="en-US" sz="750" dirty="0"/>
+          </a:p>
+        </p:txBody>
+      </p:sp>
+      <p:sp>
+        <p:nvSpPr>
+          <p:cNvPr id="31" name="Shape 29"/>
+          <p:cNvSpPr/>
+          <p:nvPr/>
+        </p:nvSpPr>
+        <p:spPr>
+          <a:xfrm>
+            <a:off x="7507224" y="4773168"/>
+            <a:ext cx="64008" cy="64008"/>
+          </a:xfrm>
+          <a:prstGeom prst="ellipse">
+            <a:avLst/>
+          </a:prstGeom>
+          <a:solidFill>
+            <a:srgbClr val="1F7A8C"/>
+          </a:solidFill>
+          <a:ln w="12700">
+            <a:solidFill>
+              <a:srgbClr val="1F7A8C"/>
+            </a:solidFill>
+            <a:prstDash val="solid"/>
+          </a:ln>
+        </p:spPr>
+      </p:sp>
+      <p:sp>
+        <p:nvSpPr>
+          <p:cNvPr id="32" name="Text 30"/>
+          <p:cNvSpPr/>
+          <p:nvPr/>
+        </p:nvSpPr>
+        <p:spPr>
+          <a:xfrm>
+            <a:off x="7635240" y="4709160"/>
+            <a:ext cx="1828800" cy="192024"/>
+          </a:xfrm>
+          <a:prstGeom prst="rect">
+            <a:avLst/>
+          </a:prstGeom>
+          <a:noFill/>
+          <a:ln/>
+        </p:spPr>
+        <p:txBody>
+          <a:bodyPr wrap="square" lIns="0" tIns="0" rIns="0" bIns="0" rtlCol="0" anchor="ctr"/>
+          <a:lstStyle/>
+          <a:p>
+            <a:pPr indent="0" marL="0">
+              <a:buNone/>
+            </a:pPr>
+            <a:r>
+              <a:rPr lang="en-US" sz="750" dirty="0">
+                <a:solidFill>
+                  <a:srgbClr val="26323E"/>
+                </a:solidFill>
+                <a:latin typeface="Calibri" pitchFamily="34" charset="0"/>
+                <a:ea typeface="Calibri" pitchFamily="34" charset="-122"/>
+                <a:cs typeface="Calibri" pitchFamily="34" charset="-120"/>
+              </a:rPr>
+              <a:t>Amenaza con bloquear la cuenta</a:t>
+            </a:r>
+            <a:endParaRPr lang="en-US" sz="750" dirty="0"/>
+          </a:p>
+        </p:txBody>
+      </p:sp>
+      <p:sp>
+        <p:nvSpPr>
+          <p:cNvPr id="33" name="Shape 31"/>
+          <p:cNvSpPr/>
+          <p:nvPr/>
+        </p:nvSpPr>
+        <p:spPr>
+          <a:xfrm>
+            <a:off x="7507224" y="4965192"/>
+            <a:ext cx="64008" cy="64008"/>
+          </a:xfrm>
+          <a:prstGeom prst="ellipse">
+            <a:avLst/>
+          </a:prstGeom>
+          <a:solidFill>
+            <a:srgbClr val="1F7A8C"/>
+          </a:solidFill>
+          <a:ln w="12700">
+            <a:solidFill>
+              <a:srgbClr val="1F7A8C"/>
+            </a:solidFill>
+            <a:prstDash val="solid"/>
+          </a:ln>
+        </p:spPr>
+      </p:sp>
+      <p:sp>
+        <p:nvSpPr>
+          <p:cNvPr id="34" name="Text 32"/>
+          <p:cNvSpPr/>
+          <p:nvPr/>
+        </p:nvSpPr>
+        <p:spPr>
+          <a:xfrm>
+            <a:off x="7635240" y="4901184"/>
+            <a:ext cx="1828800" cy="192024"/>
+          </a:xfrm>
+          <a:prstGeom prst="rect">
+            <a:avLst/>
+          </a:prstGeom>
+          <a:noFill/>
+          <a:ln/>
+        </p:spPr>
+        <p:txBody>
+          <a:bodyPr wrap="square" lIns="0" tIns="0" rIns="0" bIns="0" rtlCol="0" anchor="ctr"/>
+          <a:lstStyle/>
+          <a:p>
+            <a:pPr indent="0" marL="0">
+              <a:buNone/>
+            </a:pPr>
+            <a:r>
+              <a:rPr lang="en-US" sz="750" dirty="0">
+                <a:solidFill>
+                  <a:srgbClr val="26323E"/>
+                </a:solidFill>
+                <a:latin typeface="Calibri" pitchFamily="34" charset="0"/>
+                <a:ea typeface="Calibri" pitchFamily="34" charset="-122"/>
+                <a:cs typeface="Calibri" pitchFamily="34" charset="-120"/>
+              </a:rPr>
+              <a:t>Pide clave y datos de tarjeta</a:t>
+            </a:r>
+            <a:endParaRPr lang="en-US" sz="750" dirty="0"/>
+          </a:p>
+        </p:txBody>
+      </p:sp>
+      <p:sp>
+        <p:nvSpPr>
+          <p:cNvPr id="35" name="Text 33"/>
+          <p:cNvSpPr/>
+          <p:nvPr/>
+        </p:nvSpPr>
+        <p:spPr>
+          <a:xfrm>
+            <a:off x="9692640" y="2194560"/>
+            <a:ext cx="1828800" cy="3566160"/>
+          </a:xfrm>
+          <a:prstGeom prst="rect">
+            <a:avLst/>
+          </a:prstGeom>
+          <a:noFill/>
+          <a:ln/>
+        </p:spPr>
+        <p:txBody>
+          <a:bodyPr wrap="square" lIns="0" tIns="0" rIns="0" bIns="0" rtlCol="0" anchor="t"/>
+          <a:lstStyle/>
+          <a:p>
+            <a:pPr indent="0" marL="0">
+              <a:lnSpc>
+                <a:spcPct val="112000"/>
+              </a:lnSpc>
+              <a:buNone/>
+            </a:pPr>
+            <a:r>
+              <a:rPr lang="en-US" sz="950" dirty="0">
+                <a:solidFill>
+                  <a:srgbClr val="26323E"/>
+                </a:solidFill>
+                <a:latin typeface="Calibri" pitchFamily="34" charset="0"/>
+                <a:ea typeface="Calibri" pitchFamily="34" charset="-122"/>
+                <a:cs typeface="Calibri" pitchFamily="34" charset="-120"/>
+              </a:rPr>
+              <a:t>Una pieza visual generada con un modelo texto → imagen a partir del diagnóstico, para compartir por el grupo interno de la empresa y convertir cada intento de phishing en material de capacitación.</a:t>
+            </a:r>
+            <a:endParaRPr lang="en-US" sz="950" dirty="0"/>
+          </a:p>
+          <a:p>
+            <a:pPr indent="0" marL="0">
+              <a:lnSpc>
+                <a:spcPct val="112000"/>
+              </a:lnSpc>
+              <a:buNone/>
+            </a:pPr>
+            <a:endParaRPr lang="en-US" sz="950" dirty="0"/>
+          </a:p>
+          <a:p>
+            <a:pPr indent="0" marL="0">
+              <a:lnSpc>
+                <a:spcPct val="112000"/>
+              </a:lnSpc>
+              <a:buNone/>
+            </a:pPr>
+            <a:r>
+              <a:rPr lang="en-US" sz="950" dirty="0">
+                <a:solidFill>
+                  <a:srgbClr val="26323E"/>
+                </a:solidFill>
+                <a:latin typeface="Calibri" pitchFamily="34" charset="0"/>
+                <a:ea typeface="Calibri" pitchFamily="34" charset="-122"/>
+                <a:cs typeface="Calibri" pitchFamily="34" charset="-120"/>
+              </a:rPr>
+              <a:t>Quedó fuera de esta versión porque la generación de imágenes no está disponible en los niveles gratuitos, y operar sin costo es parte de la propuesta.</a:t>
+            </a:r>
+            <a:endParaRPr lang="en-US" sz="950" dirty="0"/>
+          </a:p>
+        </p:txBody>
+      </p:sp>
+      <p:sp>
+        <p:nvSpPr>
+          <p:cNvPr id="36" name="Text 34"/>
+          <p:cNvSpPr/>
+          <p:nvPr/>
+        </p:nvSpPr>
+        <p:spPr>
+          <a:xfrm>
+            <a:off x="685800" y="6355080"/>
+            <a:ext cx="10271455" cy="274320"/>
+          </a:xfrm>
+          <a:prstGeom prst="rect">
+            <a:avLst/>
+          </a:prstGeom>
+          <a:noFill/>
+          <a:ln/>
+        </p:spPr>
+        <p:txBody>
+          <a:bodyPr wrap="square" lIns="0" tIns="0" rIns="0" bIns="0" rtlCol="0" anchor="ctr"/>
+          <a:lstStyle/>
+          <a:p>
+            <a:pPr indent="0" marL="0">
+              <a:buNone/>
+            </a:pPr>
+            <a:r>
+              <a:rPr lang="en-US" sz="900" b="1" dirty="0">
+                <a:solidFill>
+                  <a:srgbClr val="6B7C8C"/>
+                </a:solidFill>
+                <a:latin typeface="Calibri" pitchFamily="34" charset="0"/>
+                <a:ea typeface="Calibri" pitchFamily="34" charset="-122"/>
+                <a:cs typeface="Calibri" pitchFamily="34" charset="-120"/>
+              </a:rPr>
+              <a:t>GuardIA</a:t>
+            </a:r>
+            <a:pPr indent="0" marL="0">
+              <a:buNone/>
+            </a:pPr>
+            <a:r>
+              <a:rPr lang="en-US" sz="900" dirty="0">
+                <a:solidFill>
+                  <a:srgbClr val="6B7C8C"/>
+                </a:solidFill>
+                <a:latin typeface="Calibri" pitchFamily="34" charset="0"/>
+                <a:ea typeface="Calibri" pitchFamily="34" charset="-122"/>
+                <a:cs typeface="Calibri" pitchFamily="34" charset="-120"/>
+              </a:rPr>
+              <a:t>  ·  Proyecto Final — Prompt Engineering para Programadores · CoderHouse</a:t>
+            </a:r>
+            <a:endParaRPr lang="en-US" sz="900" dirty="0"/>
+          </a:p>
+        </p:txBody>
+      </p:sp>
+      <p:sp>
+        <p:nvSpPr>
+          <p:cNvPr id="37" name="Text 35"/>
+          <p:cNvSpPr/>
+          <p:nvPr/>
+        </p:nvSpPr>
+        <p:spPr>
+          <a:xfrm>
+            <a:off x="11048695" y="6355080"/>
+            <a:ext cx="457200" cy="274320"/>
+          </a:xfrm>
+          <a:prstGeom prst="rect">
+            <a:avLst/>
+          </a:prstGeom>
+          <a:noFill/>
+          <a:ln/>
+        </p:spPr>
+        <p:txBody>
+          <a:bodyPr wrap="square" lIns="0" tIns="0" rIns="0" bIns="0" rtlCol="0" anchor="ctr"/>
+          <a:lstStyle/>
+          <a:p>
+            <a:pPr algn="r" indent="0" marL="0">
+              <a:buNone/>
+            </a:pPr>
+            <a:r>
+              <a:rPr lang="en-US" sz="900" dirty="0">
+                <a:solidFill>
+                  <a:srgbClr val="6B7C8C"/>
+                </a:solidFill>
+                <a:latin typeface="Calibri" pitchFamily="34" charset="0"/>
+                <a:ea typeface="Calibri" pitchFamily="34" charset="-122"/>
+                <a:cs typeface="Calibri" pitchFamily="34" charset="-120"/>
+              </a:rPr>
+              <a:t>12</a:t>
+            </a:r>
+            <a:endParaRPr lang="en-US" sz="900" dirty="0"/>
+          </a:p>
+        </p:txBody>
+      </p:sp>
+    </p:spTree>
+  </p:cSld>
+  <p:clrMapOvr>
+    <a:masterClrMapping/>
+  </p:clrMapOvr>
+</p:sld>
+</file>
+
+<file path=ppt/slides/slide13.xml><?xml version="1.0" encoding="utf-8"?>
+<p:sld xmlns:a="http://schemas.openxmlformats.org/drawingml/2006/main" xmlns:r="http://schemas.openxmlformats.org/officeDocument/2006/relationships" xmlns:p="http://schemas.openxmlformats.org/presentationml/2006/main">
+  <p:cSld name="Slide 13">
+    <p:bg>
+      <p:bgPr>
+        <a:solidFill>
+          <a:srgbClr val="FFFFFF"/>
+        </a:solidFill>
+      </p:bgPr>
+    </p:bg>
+    <p:spTree>
+      <p:nvGrpSpPr>
+        <p:cNvPr id="1" name=""/>
+        <p:cNvGrpSpPr/>
+        <p:nvPr/>
+      </p:nvGrpSpPr>
+      <p:grpSpPr>
+        <a:xfrm>
+          <a:off x="0" y="0"/>
+          <a:ext cx="0" cy="0"/>
+          <a:chOff x="0" y="0"/>
+          <a:chExt cx="0" cy="0"/>
+        </a:xfrm>
+      </p:grpSpPr>
+      <p:sp>
+        <p:nvSpPr>
+          <p:cNvPr id="2" name="Text 0"/>
+          <p:cNvSpPr/>
+          <p:nvPr/>
+        </p:nvSpPr>
+        <p:spPr>
+          <a:xfrm>
+            <a:off x="685800" y="411480"/>
+            <a:ext cx="10820095" cy="731520"/>
+          </a:xfrm>
+          <a:prstGeom prst="rect">
+            <a:avLst/>
+          </a:prstGeom>
+          <a:noFill/>
+          <a:ln/>
+        </p:spPr>
+        <p:txBody>
+          <a:bodyPr wrap="square" lIns="0" tIns="0" rIns="0" bIns="0" rtlCol="0" anchor="ctr"/>
+          <a:lstStyle/>
+          <a:p>
+            <a:pPr algn="l" indent="0" marL="0">
+              <a:buNone/>
+            </a:pPr>
+            <a:r>
+              <a:rPr lang="en-US" sz="3600" b="1" dirty="0">
+                <a:solidFill>
+                  <a:srgbClr val="0B2E4F"/>
+                </a:solidFill>
+                <a:latin typeface="Calibri" pitchFamily="34" charset="0"/>
+                <a:ea typeface="Calibri" pitchFamily="34" charset="-122"/>
+                <a:cs typeface="Calibri" pitchFamily="34" charset="-120"/>
+              </a:rPr>
+              <a:t>Factibilidad económica</a:t>
+            </a:r>
+            <a:endParaRPr lang="en-US" sz="3600" dirty="0"/>
+          </a:p>
+        </p:txBody>
+      </p:sp>
+      <p:sp>
+        <p:nvSpPr>
+          <p:cNvPr id="3" name="Text 1"/>
+          <p:cNvSpPr/>
+          <p:nvPr/>
+        </p:nvSpPr>
+        <p:spPr>
+          <a:xfrm>
+            <a:off x="685800" y="1133856"/>
+            <a:ext cx="10515600" cy="502920"/>
+          </a:xfrm>
+          <a:prstGeom prst="rect">
+            <a:avLst/>
+          </a:prstGeom>
+          <a:noFill/>
+          <a:ln/>
+        </p:spPr>
+        <p:txBody>
+          <a:bodyPr wrap="square" lIns="0" tIns="0" rIns="0" bIns="0" rtlCol="0" anchor="t"/>
+          <a:lstStyle/>
+          <a:p>
+            <a:pPr algn="l" indent="0" marL="0">
+              <a:buNone/>
+            </a:pPr>
+            <a:r>
+              <a:rPr lang="en-US" sz="1500" dirty="0">
+                <a:solidFill>
+                  <a:srgbClr val="6B7C8C"/>
+                </a:solidFill>
+                <a:latin typeface="Calibri" pitchFamily="34" charset="0"/>
+                <a:ea typeface="Calibri" pitchFamily="34" charset="-122"/>
+                <a:cs typeface="Calibri" pitchFamily="34" charset="-120"/>
+              </a:rPr>
+              <a:t>El costo de operar la herramienta es cero: nivel gratuito de la API y hosting sin cargo.</a:t>
+            </a:r>
+            <a:endParaRPr lang="en-US" sz="1500" dirty="0"/>
+          </a:p>
+        </p:txBody>
+      </p:sp>
+      <p:sp>
+        <p:nvSpPr>
+          <p:cNvPr id="4" name="Shape 2"/>
+          <p:cNvSpPr/>
+          <p:nvPr/>
+        </p:nvSpPr>
+        <p:spPr>
+          <a:xfrm>
+            <a:off x="685800" y="1874520"/>
+            <a:ext cx="3429000" cy="1463040"/>
+          </a:xfrm>
+          <a:prstGeom prst="roundRect">
+            <a:avLst>
+              <a:gd name="adj" fmla="val 5625"/>
+            </a:avLst>
+          </a:prstGeom>
+          <a:solidFill>
+            <a:srgbClr val="F4F7F9"/>
+          </a:solidFill>
+          <a:ln w="12700">
+            <a:solidFill>
+              <a:srgbClr val="DFE6EC"/>
+            </a:solidFill>
+            <a:prstDash val="solid"/>
+          </a:ln>
+        </p:spPr>
+      </p:sp>
+      <p:sp>
+        <p:nvSpPr>
+          <p:cNvPr id="5" name="Text 3"/>
+          <p:cNvSpPr/>
+          <p:nvPr/>
+        </p:nvSpPr>
+        <p:spPr>
+          <a:xfrm>
+            <a:off x="978408" y="2011680"/>
+            <a:ext cx="2834640" cy="658368"/>
+          </a:xfrm>
+          <a:prstGeom prst="rect">
+            <a:avLst/>
+          </a:prstGeom>
+          <a:noFill/>
+          <a:ln/>
+        </p:spPr>
+        <p:txBody>
+          <a:bodyPr wrap="square" lIns="0" tIns="0" rIns="0" bIns="0" rtlCol="0" anchor="ctr"/>
+          <a:lstStyle/>
+          <a:p>
+            <a:pPr indent="0" marL="0">
+              <a:buNone/>
+            </a:pPr>
+            <a:r>
+              <a:rPr lang="en-US" sz="3200" b="1" dirty="0">
+                <a:solidFill>
+                  <a:srgbClr val="1F7A8C"/>
+                </a:solidFill>
+                <a:latin typeface="Calibri" pitchFamily="34" charset="0"/>
+                <a:ea typeface="Calibri" pitchFamily="34" charset="-122"/>
+                <a:cs typeface="Calibri" pitchFamily="34" charset="-120"/>
+              </a:rPr>
+              <a:t>US$ 0</a:t>
+            </a:r>
+            <a:endParaRPr lang="en-US" sz="3200" dirty="0"/>
+          </a:p>
+        </p:txBody>
+      </p:sp>
+      <p:sp>
+        <p:nvSpPr>
+          <p:cNvPr id="6" name="Text 4"/>
+          <p:cNvSpPr/>
+          <p:nvPr/>
+        </p:nvSpPr>
+        <p:spPr>
+          <a:xfrm>
+            <a:off x="978408" y="2670048"/>
+            <a:ext cx="2834640" cy="548640"/>
+          </a:xfrm>
+          <a:prstGeom prst="rect">
+            <a:avLst/>
+          </a:prstGeom>
+          <a:noFill/>
+          <a:ln/>
+        </p:spPr>
+        <p:txBody>
+          <a:bodyPr wrap="square" lIns="0" tIns="0" rIns="0" bIns="0" rtlCol="0" anchor="t"/>
+          <a:lstStyle/>
+          <a:p>
+            <a:pPr indent="0" marL="0">
+              <a:buNone/>
+            </a:pPr>
+            <a:r>
+              <a:rPr lang="en-US" sz="1200" dirty="0">
+                <a:solidFill>
+                  <a:srgbClr val="26323E"/>
+                </a:solidFill>
+                <a:latin typeface="Calibri" pitchFamily="34" charset="0"/>
+                <a:ea typeface="Calibri" pitchFamily="34" charset="-122"/>
+                <a:cs typeface="Calibri" pitchFamily="34" charset="-120"/>
+              </a:rPr>
+              <a:t>por consulta y por mes, en el nivel gratuito</a:t>
+            </a:r>
+            <a:endParaRPr lang="en-US" sz="1200" dirty="0"/>
+          </a:p>
+        </p:txBody>
+      </p:sp>
+      <p:sp>
+        <p:nvSpPr>
+          <p:cNvPr id="7" name="Shape 5"/>
+          <p:cNvSpPr/>
+          <p:nvPr/>
+        </p:nvSpPr>
+        <p:spPr>
+          <a:xfrm>
+            <a:off x="4370832" y="1874520"/>
+            <a:ext cx="3429000" cy="1463040"/>
+          </a:xfrm>
+          <a:prstGeom prst="roundRect">
+            <a:avLst>
+              <a:gd name="adj" fmla="val 5625"/>
+            </a:avLst>
+          </a:prstGeom>
+          <a:solidFill>
+            <a:srgbClr val="F4F7F9"/>
+          </a:solidFill>
+          <a:ln w="12700">
+            <a:solidFill>
+              <a:srgbClr val="DFE6EC"/>
+            </a:solidFill>
+            <a:prstDash val="solid"/>
+          </a:ln>
+        </p:spPr>
+      </p:sp>
+      <p:sp>
+        <p:nvSpPr>
+          <p:cNvPr id="8" name="Text 6"/>
+          <p:cNvSpPr/>
+          <p:nvPr/>
+        </p:nvSpPr>
+        <p:spPr>
+          <a:xfrm>
+            <a:off x="4663440" y="2011680"/>
+            <a:ext cx="2834640" cy="658368"/>
+          </a:xfrm>
+          <a:prstGeom prst="rect">
+            <a:avLst/>
+          </a:prstGeom>
+          <a:noFill/>
+          <a:ln/>
+        </p:spPr>
+        <p:txBody>
+          <a:bodyPr wrap="square" lIns="0" tIns="0" rIns="0" bIns="0" rtlCol="0" anchor="ctr"/>
+          <a:lstStyle/>
+          <a:p>
+            <a:pPr indent="0" marL="0">
+              <a:buNone/>
+            </a:pPr>
+            <a:r>
+              <a:rPr lang="en-US" sz="3200" b="1" dirty="0">
+                <a:solidFill>
+                  <a:srgbClr val="0B2E4F"/>
+                </a:solidFill>
+                <a:latin typeface="Calibri" pitchFamily="34" charset="0"/>
+                <a:ea typeface="Calibri" pitchFamily="34" charset="-122"/>
+                <a:cs typeface="Calibri" pitchFamily="34" charset="-120"/>
+              </a:rPr>
+              <a:t>US$ 0</a:t>
+            </a:r>
+            <a:endParaRPr lang="en-US" sz="3200" dirty="0"/>
+          </a:p>
+        </p:txBody>
+      </p:sp>
+      <p:sp>
+        <p:nvSpPr>
+          <p:cNvPr id="9" name="Text 7"/>
+          <p:cNvSpPr/>
+          <p:nvPr/>
+        </p:nvSpPr>
+        <p:spPr>
+          <a:xfrm>
+            <a:off x="4663440" y="2670048"/>
+            <a:ext cx="2834640" cy="548640"/>
+          </a:xfrm>
+          <a:prstGeom prst="rect">
+            <a:avLst/>
+          </a:prstGeom>
+          <a:noFill/>
+          <a:ln/>
+        </p:spPr>
+        <p:txBody>
+          <a:bodyPr wrap="square" lIns="0" tIns="0" rIns="0" bIns="0" rtlCol="0" anchor="t"/>
+          <a:lstStyle/>
+          <a:p>
+            <a:pPr indent="0" marL="0">
+              <a:buNone/>
+            </a:pPr>
+            <a:r>
+              <a:rPr lang="en-US" sz="1200" dirty="0">
+                <a:solidFill>
+                  <a:srgbClr val="26323E"/>
+                </a:solidFill>
+                <a:latin typeface="Calibri" pitchFamily="34" charset="0"/>
+                <a:ea typeface="Calibri" pitchFamily="34" charset="-122"/>
+                <a:cs typeface="Calibri" pitchFamily="34" charset="-120"/>
+              </a:rPr>
+              <a:t>de hosting en Streamlit Community Cloud</a:t>
+            </a:r>
+            <a:endParaRPr lang="en-US" sz="1200" dirty="0"/>
+          </a:p>
+        </p:txBody>
+      </p:sp>
+      <p:sp>
+        <p:nvSpPr>
+          <p:cNvPr id="10" name="Shape 8"/>
+          <p:cNvSpPr/>
+          <p:nvPr/>
+        </p:nvSpPr>
+        <p:spPr>
+          <a:xfrm>
+            <a:off x="8055864" y="1874520"/>
+            <a:ext cx="3429000" cy="1463040"/>
+          </a:xfrm>
+          <a:prstGeom prst="roundRect">
+            <a:avLst>
+              <a:gd name="adj" fmla="val 5625"/>
+            </a:avLst>
+          </a:prstGeom>
+          <a:solidFill>
+            <a:srgbClr val="F4F7F9"/>
+          </a:solidFill>
+          <a:ln w="12700">
+            <a:solidFill>
+              <a:srgbClr val="DFE6EC"/>
+            </a:solidFill>
+            <a:prstDash val="solid"/>
+          </a:ln>
+        </p:spPr>
+      </p:sp>
+      <p:sp>
+        <p:nvSpPr>
           <p:cNvPr id="11" name="Text 9"/>
           <p:cNvSpPr/>
           <p:nvPr/>
@@ -5340,7 +6535,7 @@
                 <a:ea typeface="Calibri" pitchFamily="34" charset="-122"/>
                 <a:cs typeface="Calibri" pitchFamily="34" charset="-120"/>
               </a:rPr>
-              <a:t>US$ 0</a:t>
+              <a:t>Sin tarjeta</a:t>
             </a:r>
             <a:endParaRPr lang="en-US" sz="3200" dirty="0"/>
           </a:p>
@@ -5355,7 +6550,7 @@
         <p:spPr>
           <a:xfrm>
             <a:off x="8348472" y="2670048"/>
-            <a:ext cx="2834640" cy="502920"/>
+            <a:ext cx="2834640" cy="548640"/>
           </a:xfrm>
           <a:prstGeom prst="rect">
             <a:avLst/>
@@ -5379,7 +6574,46 @@
                 <a:ea typeface="Calibri" pitchFamily="34" charset="-122"/>
                 <a:cs typeface="Calibri" pitchFamily="34" charset="-120"/>
               </a:rPr>
-              <a:t>de hosting en Streamlit Cloud</a:t>
+              <a:t>no hace falta medio de pago para producción</a:t>
+            </a:r>
+            <a:endParaRPr lang="en-US" sz="1200" dirty="0"/>
+          </a:p>
+        </p:txBody>
+      </p:sp>
+      <p:sp>
+        <p:nvSpPr>
+          <p:cNvPr id="13" name="Text 11"/>
+          <p:cNvSpPr/>
+          <p:nvPr/>
+        </p:nvSpPr>
+        <p:spPr>
+          <a:xfrm>
+            <a:off x="685800" y="3520440"/>
+            <a:ext cx="7315200" cy="365760"/>
+          </a:xfrm>
+          <a:prstGeom prst="rect">
+            <a:avLst/>
+          </a:prstGeom>
+          <a:noFill/>
+          <a:ln/>
+        </p:spPr>
+        <p:txBody>
+          <a:bodyPr wrap="square" lIns="0" tIns="0" rIns="0" bIns="0" rtlCol="0" anchor="t"/>
+          <a:lstStyle/>
+          <a:p>
+            <a:pPr indent="0" marL="0">
+              <a:buNone/>
+            </a:pPr>
+            <a:r>
+              <a:rPr lang="en-US" sz="1200" dirty="0">
+                <a:solidFill>
+                  <a:srgbClr val="26323E"/>
+                </a:solidFill>
+                <a:latin typeface="Calibri" pitchFamily="34" charset="0"/>
+                <a:ea typeface="Calibri" pitchFamily="34" charset="-122"/>
+                <a:cs typeface="Calibri" pitchFamily="34" charset="-120"/>
+              </a:rPr>
+              <a:t>Como referencia de escalabilidad, cada análisis consume unos 1.500 tokens de entrada y 500 de salida. Esto costaría en el nivel pago:</a:t>
             </a:r>
             <a:endParaRPr lang="en-US" sz="1200" dirty="0"/>
           </a:p>
@@ -5387,7 +6621,7 @@
       </p:sp>
       <p:graphicFrame>
         <p:nvGraphicFramePr>
-          <p:cNvPr id="13" name="Table 0"/>
+          <p:cNvPr id="14" name="Table 0"/>
           <p:cNvGraphicFramePr>
             <a:graphicFrameLocks noGrp="1"/>
           </p:cNvGraphicFramePr>
@@ -5400,7 +6634,7 @@
           </p:nvPr>
         </p:nvGraphicFramePr>
         <p:xfrm>
-          <a:off x="685800" y="3611880"/>
+          <a:off x="685800" y="3977640"/>
           <a:ext cx="7315200" cy="914400"/>
         </p:xfrm>
         <a:graphic>
@@ -5408,8 +6642,9 @@
             <a:tbl>
               <a:tblPr/>
               <a:tblGrid>
-                <a:gridCol w="5120640"/>
-                <a:gridCol w="2194560"/>
+                <a:gridCol w="3931920"/>
+                <a:gridCol w="1645920"/>
+                <a:gridCol w="1737360"/>
               </a:tblGrid>
               <a:tr h="301752">
                 <a:tc>
@@ -5421,7 +6656,7 @@
                         <a:buNone/>
                       </a:pPr>
                       <a:r>
-                        <a:rPr lang="en-US" sz="1100" b="1" dirty="0">
+                        <a:rPr lang="en-US" sz="1050" b="1" dirty="0">
                           <a:solidFill>
                             <a:srgbClr val="FFFFFF"/>
                           </a:solidFill>
@@ -5431,14 +6666,14 @@
                         </a:rPr>
                         <a:t>CONCEPTO</a:t>
                       </a:r>
-                      <a:endParaRPr lang="en-US" sz="1100" dirty="0">
+                      <a:endParaRPr lang="en-US" sz="1050" dirty="0">
                         <a:latin typeface="Calibri" charset="0"/>
                         <a:ea typeface="Calibri" charset="0"/>
                         <a:cs typeface="Calibri" charset="0"/>
                       </a:endParaRPr>
                     </a:p>
                   </a:txBody>
-                  <a:tcPr marL="109728" marR="109728" marT="45720" marB="45720" anchor="ctr">
+                  <a:tcPr marL="91440" marR="91440" marT="45720" marB="45720" anchor="ctr">
                     <a:lnL w="12700" cap="flat" cmpd="sng" algn="ctr">
                       <a:solidFill>
                         <a:srgbClr val="DFE6EC"/>
@@ -5489,7 +6724,7 @@
                         <a:buNone/>
                       </a:pPr>
                       <a:r>
-                        <a:rPr lang="en-US" sz="1100" b="1" dirty="0">
+                        <a:rPr lang="en-US" sz="1050" b="1" dirty="0">
                           <a:solidFill>
                             <a:srgbClr val="FFFFFF"/>
                           </a:solidFill>
@@ -5497,16 +6732,84 @@
                           <a:ea typeface="Calibri" pitchFamily="34" charset="-122"/>
                           <a:cs typeface="Calibri" pitchFamily="34" charset="-120"/>
                         </a:rPr>
-                        <a:t>COSTO ESTIMADO</a:t>
+                        <a:t>NIVEL GRATUITO</a:t>
                       </a:r>
-                      <a:endParaRPr lang="en-US" sz="1100" dirty="0">
+                      <a:endParaRPr lang="en-US" sz="1050" dirty="0">
                         <a:latin typeface="Calibri" charset="0"/>
                         <a:ea typeface="Calibri" charset="0"/>
                         <a:cs typeface="Calibri" charset="0"/>
                       </a:endParaRPr>
                     </a:p>
                   </a:txBody>
-                  <a:tcPr marL="109728" marR="109728" marT="45720" marB="45720" anchor="ctr">
+                  <a:tcPr marL="91440" marR="91440" marT="45720" marB="45720" anchor="ctr">
+                    <a:lnL w="12700" cap="flat" cmpd="sng" algn="ctr">
+                      <a:solidFill>
+                        <a:srgbClr val="DFE6EC"/>
+                      </a:solidFill>
+                      <a:prstDash val="solid"/>
+                      <a:round/>
+                      <a:headEnd type="none" w="med" len="med"/>
+                      <a:tailEnd type="none" w="med" len="med"/>
+                    </a:lnL>
+                    <a:lnR w="12700" cap="flat" cmpd="sng" algn="ctr">
+                      <a:solidFill>
+                        <a:srgbClr val="DFE6EC"/>
+                      </a:solidFill>
+                      <a:prstDash val="solid"/>
+                      <a:round/>
+                      <a:headEnd type="none" w="med" len="med"/>
+                      <a:tailEnd type="none" w="med" len="med"/>
+                    </a:lnR>
+                    <a:lnT w="12700" cap="flat" cmpd="sng" algn="ctr">
+                      <a:solidFill>
+                        <a:srgbClr val="DFE6EC"/>
+                      </a:solidFill>
+                      <a:prstDash val="solid"/>
+                      <a:round/>
+                      <a:headEnd type="none" w="med" len="med"/>
+                      <a:tailEnd type="none" w="med" len="med"/>
+                    </a:lnT>
+                    <a:lnB w="12700" cap="flat" cmpd="sng" algn="ctr">
+                      <a:solidFill>
+                        <a:srgbClr val="DFE6EC"/>
+                      </a:solidFill>
+                      <a:prstDash val="solid"/>
+                      <a:round/>
+                      <a:headEnd type="none" w="med" len="med"/>
+                      <a:tailEnd type="none" w="med" len="med"/>
+                    </a:lnB>
+                    <a:solidFill>
+                      <a:srgbClr val="0B2E4F"/>
+                    </a:solidFill>
+                  </a:tcPr>
+                </a:tc>
+                <a:tc>
+                  <a:txBody>
+                    <a:bodyPr/>
+                    <a:lstStyle/>
+                    <a:p>
+                      <a:pPr algn="r" indent="0" marL="0">
+                        <a:buNone/>
+                      </a:pPr>
+                      <a:r>
+                        <a:rPr lang="en-US" sz="1050" b="1" dirty="0">
+                          <a:solidFill>
+                            <a:srgbClr val="FFFFFF"/>
+                          </a:solidFill>
+                          <a:latin typeface="Calibri" pitchFamily="34" charset="0"/>
+                          <a:ea typeface="Calibri" pitchFamily="34" charset="-122"/>
+                          <a:cs typeface="Calibri" pitchFamily="34" charset="-120"/>
+                        </a:rPr>
+                        <a:t>EQUIVALENTE PAGO</a:t>
+                      </a:r>
+                      <a:endParaRPr lang="en-US" sz="1050" dirty="0">
+                        <a:latin typeface="Calibri" charset="0"/>
+                        <a:ea typeface="Calibri" charset="0"/>
+                        <a:cs typeface="Calibri" charset="0"/>
+                      </a:endParaRPr>
+                    </a:p>
+                  </a:txBody>
+                  <a:tcPr marL="91440" marR="91440" marT="45720" marB="45720" anchor="ctr">
                     <a:lnL w="12700" cap="flat" cmpd="sng" algn="ctr">
                       <a:solidFill>
                         <a:srgbClr val="DFE6EC"/>
@@ -5559,7 +6862,7 @@
                         <a:buNone/>
                       </a:pPr>
                       <a:r>
-                        <a:rPr lang="en-US" sz="1200" dirty="0">
+                        <a:rPr lang="en-US" sz="1150" dirty="0">
                           <a:solidFill>
                             <a:srgbClr val="26323E"/>
                           </a:solidFill>
@@ -5567,16 +6870,16 @@
                           <a:ea typeface="Calibri" pitchFamily="34" charset="-122"/>
                           <a:cs typeface="Calibri" pitchFamily="34" charset="-120"/>
                         </a:rPr>
-                        <a:t>Análisis de un mensaje (gpt-4o-mini)</a:t>
+                        <a:t>Un análisis (gemini-2.5-flash)</a:t>
                       </a:r>
-                      <a:endParaRPr lang="en-US" sz="1200" dirty="0">
+                      <a:endParaRPr lang="en-US" sz="1150" dirty="0">
                         <a:latin typeface="Calibri" charset="0"/>
                         <a:ea typeface="Calibri" charset="0"/>
                         <a:cs typeface="Calibri" charset="0"/>
                       </a:endParaRPr>
                     </a:p>
                   </a:txBody>
-                  <a:tcPr marL="109728" marR="109728" marT="45720" marB="45720" anchor="ctr">
+                  <a:tcPr marL="91440" marR="91440" marT="45720" marB="45720" anchor="ctr">
                     <a:lnL w="12700" cap="flat" cmpd="sng" algn="ctr">
                       <a:solidFill>
                         <a:srgbClr val="DFE6EC"/>
@@ -5627,24 +6930,92 @@
                         <a:buNone/>
                       </a:pPr>
                       <a:r>
-                        <a:rPr lang="en-US" sz="1200" b="1" dirty="0">
+                        <a:rPr lang="en-US" sz="1150" b="1" dirty="0">
                           <a:solidFill>
-                            <a:srgbClr val="0B2E4F"/>
+                            <a:srgbClr val="1F7A8C"/>
                           </a:solidFill>
                           <a:latin typeface="Calibri" pitchFamily="34" charset="0"/>
                           <a:ea typeface="Calibri" pitchFamily="34" charset="-122"/>
                           <a:cs typeface="Calibri" pitchFamily="34" charset="-120"/>
                         </a:rPr>
-                        <a:t>≈ US$ 0,00053</a:t>
+                        <a:t>US$ 0</a:t>
                       </a:r>
-                      <a:endParaRPr lang="en-US" sz="1200" dirty="0">
+                      <a:endParaRPr lang="en-US" sz="1150" dirty="0">
                         <a:latin typeface="Calibri" charset="0"/>
                         <a:ea typeface="Calibri" charset="0"/>
                         <a:cs typeface="Calibri" charset="0"/>
                       </a:endParaRPr>
                     </a:p>
                   </a:txBody>
-                  <a:tcPr marL="109728" marR="109728" marT="45720" marB="45720" anchor="ctr">
+                  <a:tcPr marL="91440" marR="91440" marT="45720" marB="45720" anchor="ctr">
+                    <a:lnL w="12700" cap="flat" cmpd="sng" algn="ctr">
+                      <a:solidFill>
+                        <a:srgbClr val="DFE6EC"/>
+                      </a:solidFill>
+                      <a:prstDash val="solid"/>
+                      <a:round/>
+                      <a:headEnd type="none" w="med" len="med"/>
+                      <a:tailEnd type="none" w="med" len="med"/>
+                    </a:lnL>
+                    <a:lnR w="12700" cap="flat" cmpd="sng" algn="ctr">
+                      <a:solidFill>
+                        <a:srgbClr val="DFE6EC"/>
+                      </a:solidFill>
+                      <a:prstDash val="solid"/>
+                      <a:round/>
+                      <a:headEnd type="none" w="med" len="med"/>
+                      <a:tailEnd type="none" w="med" len="med"/>
+                    </a:lnR>
+                    <a:lnT w="12700" cap="flat" cmpd="sng" algn="ctr">
+                      <a:solidFill>
+                        <a:srgbClr val="DFE6EC"/>
+                      </a:solidFill>
+                      <a:prstDash val="solid"/>
+                      <a:round/>
+                      <a:headEnd type="none" w="med" len="med"/>
+                      <a:tailEnd type="none" w="med" len="med"/>
+                    </a:lnT>
+                    <a:lnB w="12700" cap="flat" cmpd="sng" algn="ctr">
+                      <a:solidFill>
+                        <a:srgbClr val="DFE6EC"/>
+                      </a:solidFill>
+                      <a:prstDash val="solid"/>
+                      <a:round/>
+                      <a:headEnd type="none" w="med" len="med"/>
+                      <a:tailEnd type="none" w="med" len="med"/>
+                    </a:lnB>
+                    <a:solidFill>
+                      <a:srgbClr val="F4F7F9"/>
+                    </a:solidFill>
+                  </a:tcPr>
+                </a:tc>
+                <a:tc>
+                  <a:txBody>
+                    <a:bodyPr/>
+                    <a:lstStyle/>
+                    <a:p>
+                      <a:pPr algn="r" indent="0" marL="0">
+                        <a:buNone/>
+                      </a:pPr>
+                      <a:r>
+                        <a:rPr lang="en-US" sz="1150" dirty="0">
+                          <a:solidFill>
+                            <a:srgbClr val="6B7C8C"/>
+                          </a:solidFill>
+                          <a:latin typeface="Calibri" pitchFamily="34" charset="0"/>
+                          <a:ea typeface="Calibri" pitchFamily="34" charset="-122"/>
+                          <a:cs typeface="Calibri" pitchFamily="34" charset="-120"/>
+                        </a:rPr>
+                        <a:t>≈ US$ 0,0017</a:t>
+                      </a:r>
+                      <a:endParaRPr lang="en-US" sz="1150" dirty="0">
+                        <a:latin typeface="Calibri" charset="0"/>
+                        <a:ea typeface="Calibri" charset="0"/>
+                        <a:cs typeface="Calibri" charset="0"/>
+                      </a:endParaRPr>
+                    </a:p>
+                  </a:txBody>
+                  <a:tcPr marL="91440" marR="91440" marT="45720" marB="45720" anchor="ctr">
                     <a:lnL w="12700" cap="flat" cmpd="sng" algn="ctr">
                       <a:solidFill>
                         <a:srgbClr val="DFE6EC"/>
@@ -5697,7 +7068,7 @@
                         <a:buNone/>
                       </a:pPr>
                       <a:r>
-                        <a:rPr lang="en-US" sz="1200" dirty="0">
+                        <a:rPr lang="en-US" sz="1150" dirty="0">
                           <a:solidFill>
                             <a:srgbClr val="26323E"/>
                           </a:solidFill>
@@ -5707,14 +7078,14 @@
                         </a:rPr>
                         <a:t>500 análisis por mes</a:t>
                       </a:r>
-                      <a:endParaRPr lang="en-US" sz="1200" dirty="0">
+                      <a:endParaRPr lang="en-US" sz="1150" dirty="0">
                         <a:latin typeface="Calibri" charset="0"/>
                         <a:ea typeface="Calibri" charset="0"/>
                         <a:cs typeface="Calibri" charset="0"/>
                       </a:endParaRPr>
                     </a:p>
                   </a:txBody>
-                  <a:tcPr marL="109728" marR="109728" marT="45720" marB="45720" anchor="ctr">
+                  <a:tcPr marL="91440" marR="91440" marT="45720" marB="45720" anchor="ctr">
                     <a:lnL w="12700" cap="flat" cmpd="sng" algn="ctr">
                       <a:solidFill>
                         <a:srgbClr val="DFE6EC"/>
@@ -5765,24 +7136,92 @@
                         <a:buNone/>
                       </a:pPr>
                       <a:r>
-                        <a:rPr lang="en-US" sz="1200" b="1" dirty="0">
+                        <a:rPr lang="en-US" sz="1150" b="1" dirty="0">
                           <a:solidFill>
-                            <a:srgbClr val="0B2E4F"/>
+                            <a:srgbClr val="1F7A8C"/>
                           </a:solidFill>
                           <a:latin typeface="Calibri" pitchFamily="34" charset="0"/>
                           <a:ea typeface="Calibri" pitchFamily="34" charset="-122"/>
                           <a:cs typeface="Calibri" pitchFamily="34" charset="-120"/>
                         </a:rPr>
-                        <a:t>≈ US$ 0,27</a:t>
+                        <a:t>US$ 0</a:t>
                       </a:r>
-                      <a:endParaRPr lang="en-US" sz="1200" dirty="0">
+                      <a:endParaRPr lang="en-US" sz="1150" dirty="0">
                         <a:latin typeface="Calibri" charset="0"/>
                         <a:ea typeface="Calibri" charset="0"/>
                         <a:cs typeface="Calibri" charset="0"/>
                       </a:endParaRPr>
                     </a:p>
                   </a:txBody>
-                  <a:tcPr marL="109728" marR="109728" marT="45720" marB="45720" anchor="ctr">
+                  <a:tcPr marL="91440" marR="91440" marT="45720" marB="45720" anchor="ctr">
+                    <a:lnL w="12700" cap="flat" cmpd="sng" algn="ctr">
+                      <a:solidFill>
+                        <a:srgbClr val="DFE6EC"/>
+                      </a:solidFill>
+                      <a:prstDash val="solid"/>
+                      <a:round/>
+                      <a:headEnd type="none" w="med" len="med"/>
+                      <a:tailEnd type="none" w="med" len="med"/>
+                    </a:lnL>
+                    <a:lnR w="12700" cap="flat" cmpd="sng" algn="ctr">
+                      <a:solidFill>
+                        <a:srgbClr val="DFE6EC"/>
+                      </a:solidFill>
+                      <a:prstDash val="solid"/>
+                      <a:round/>
+                      <a:headEnd type="none" w="med" len="med"/>
+                      <a:tailEnd type="none" w="med" len="med"/>
+                    </a:lnR>
+                    <a:lnT w="12700" cap="flat" cmpd="sng" algn="ctr">
+                      <a:solidFill>
+                        <a:srgbClr val="DFE6EC"/>
+                      </a:solidFill>
+                      <a:prstDash val="solid"/>
+                      <a:round/>
+                      <a:headEnd type="none" w="med" len="med"/>
+                      <a:tailEnd type="none" w="med" len="med"/>
+                    </a:lnT>
+                    <a:lnB w="12700" cap="flat" cmpd="sng" algn="ctr">
+                      <a:solidFill>
+                        <a:srgbClr val="DFE6EC"/>
+                      </a:solidFill>
+                      <a:prstDash val="solid"/>
+                      <a:round/>
+                      <a:headEnd type="none" w="med" len="med"/>
+                      <a:tailEnd type="none" w="med" len="med"/>
+                    </a:lnB>
+                    <a:solidFill>
+                      <a:srgbClr val="FFFFFF"/>
+                    </a:solidFill>
+                  </a:tcPr>
+                </a:tc>
+                <a:tc>
+                  <a:txBody>
+                    <a:bodyPr/>
+                    <a:lstStyle/>
+                    <a:p>
+                      <a:pPr algn="r" indent="0" marL="0">
+                        <a:buNone/>
+                      </a:pPr>
+                      <a:r>
+                        <a:rPr lang="en-US" sz="1150" dirty="0">
+                          <a:solidFill>
+                            <a:srgbClr val="6B7C8C"/>
+                          </a:solidFill>
+                          <a:latin typeface="Calibri" pitchFamily="34" charset="0"/>
+                          <a:ea typeface="Calibri" pitchFamily="34" charset="-122"/>
+                          <a:cs typeface="Calibri" pitchFamily="34" charset="-120"/>
+                        </a:rPr>
+                        <a:t>≈ US$ 0,85</a:t>
+                      </a:r>
+                      <a:endParaRPr lang="en-US" sz="1150" dirty="0">
+                        <a:latin typeface="Calibri" charset="0"/>
+                        <a:ea typeface="Calibri" charset="0"/>
+                        <a:cs typeface="Calibri" charset="0"/>
+                      </a:endParaRPr>
+                    </a:p>
+                  </a:txBody>
+                  <a:tcPr marL="91440" marR="91440" marT="45720" marB="45720" anchor="ctr">
                     <a:lnL w="12700" cap="flat" cmpd="sng" algn="ctr">
                       <a:solidFill>
                         <a:srgbClr val="DFE6EC"/>
@@ -5835,7 +7274,7 @@
                         <a:buNone/>
                       </a:pPr>
                       <a:r>
-                        <a:rPr lang="en-US" sz="1200" dirty="0">
+                        <a:rPr lang="en-US" sz="1150" dirty="0">
                           <a:solidFill>
                             <a:srgbClr val="26323E"/>
                           </a:solidFill>
@@ -5845,14 +7284,14 @@
                         </a:rPr>
                         <a:t>5.000 análisis por mes</a:t>
                       </a:r>
-                      <a:endParaRPr lang="en-US" sz="1200" dirty="0">
+                      <a:endParaRPr lang="en-US" sz="1150" dirty="0">
                         <a:latin typeface="Calibri" charset="0"/>
                         <a:ea typeface="Calibri" charset="0"/>
                         <a:cs typeface="Calibri" charset="0"/>
                       </a:endParaRPr>
                     </a:p>
                   </a:txBody>
-                  <a:tcPr marL="109728" marR="109728" marT="45720" marB="45720" anchor="ctr">
+                  <a:tcPr marL="91440" marR="91440" marT="45720" marB="45720" anchor="ctr">
                     <a:lnL w="12700" cap="flat" cmpd="sng" algn="ctr">
                       <a:solidFill>
                         <a:srgbClr val="DFE6EC"/>
@@ -5903,24 +7342,92 @@
                         <a:buNone/>
                       </a:pPr>
                       <a:r>
-                        <a:rPr lang="en-US" sz="1200" b="1" dirty="0">
+                        <a:rPr lang="en-US" sz="1150" b="1" dirty="0">
                           <a:solidFill>
-                            <a:srgbClr val="0B2E4F"/>
+                            <a:srgbClr val="1F7A8C"/>
                           </a:solidFill>
                           <a:latin typeface="Calibri" pitchFamily="34" charset="0"/>
                           <a:ea typeface="Calibri" pitchFamily="34" charset="-122"/>
                           <a:cs typeface="Calibri" pitchFamily="34" charset="-120"/>
                         </a:rPr>
-                        <a:t>≈ US$ 2,65</a:t>
+                        <a:t>US$ 0</a:t>
                       </a:r>
-                      <a:endParaRPr lang="en-US" sz="1200" dirty="0">
+                      <a:endParaRPr lang="en-US" sz="1150" dirty="0">
                         <a:latin typeface="Calibri" charset="0"/>
                         <a:ea typeface="Calibri" charset="0"/>
                         <a:cs typeface="Calibri" charset="0"/>
                       </a:endParaRPr>
                     </a:p>
                   </a:txBody>
-                  <a:tcPr marL="109728" marR="109728" marT="45720" marB="45720" anchor="ctr">
+                  <a:tcPr marL="91440" marR="91440" marT="45720" marB="45720" anchor="ctr">
+                    <a:lnL w="12700" cap="flat" cmpd="sng" algn="ctr">
+                      <a:solidFill>
+                        <a:srgbClr val="DFE6EC"/>
+                      </a:solidFill>
+                      <a:prstDash val="solid"/>
+                      <a:round/>
+                      <a:headEnd type="none" w="med" len="med"/>
+                      <a:tailEnd type="none" w="med" len="med"/>
+                    </a:lnL>
+                    <a:lnR w="12700" cap="flat" cmpd="sng" algn="ctr">
+                      <a:solidFill>
+                        <a:srgbClr val="DFE6EC"/>
+                      </a:solidFill>
+                      <a:prstDash val="solid"/>
+                      <a:round/>
+                      <a:headEnd type="none" w="med" len="med"/>
+                      <a:tailEnd type="none" w="med" len="med"/>
+                    </a:lnR>
+                    <a:lnT w="12700" cap="flat" cmpd="sng" algn="ctr">
+                      <a:solidFill>
+                        <a:srgbClr val="DFE6EC"/>
+                      </a:solidFill>
+                      <a:prstDash val="solid"/>
+                      <a:round/>
+                      <a:headEnd type="none" w="med" len="med"/>
+                      <a:tailEnd type="none" w="med" len="med"/>
+                    </a:lnT>
+                    <a:lnB w="12700" cap="flat" cmpd="sng" algn="ctr">
+                      <a:solidFill>
+                        <a:srgbClr val="DFE6EC"/>
+                      </a:solidFill>
+                      <a:prstDash val="solid"/>
+                      <a:round/>
+                      <a:headEnd type="none" w="med" len="med"/>
+                      <a:tailEnd type="none" w="med" len="med"/>
+                    </a:lnB>
+                    <a:solidFill>
+                      <a:srgbClr val="F4F7F9"/>
+                    </a:solidFill>
+                  </a:tcPr>
+                </a:tc>
+                <a:tc>
+                  <a:txBody>
+                    <a:bodyPr/>
+                    <a:lstStyle/>
+                    <a:p>
+                      <a:pPr algn="r" indent="0" marL="0">
+                        <a:buNone/>
+                      </a:pPr>
+                      <a:r>
+                        <a:rPr lang="en-US" sz="1150" dirty="0">
+                          <a:solidFill>
+                            <a:srgbClr val="6B7C8C"/>
+                          </a:solidFill>
+                          <a:latin typeface="Calibri" pitchFamily="34" charset="0"/>
+                          <a:ea typeface="Calibri" pitchFamily="34" charset="-122"/>
+                          <a:cs typeface="Calibri" pitchFamily="34" charset="-120"/>
+                        </a:rPr>
+                        <a:t>≈ US$ 8,50</a:t>
+                      </a:r>
+                      <a:endParaRPr lang="en-US" sz="1150" dirty="0">
+                        <a:latin typeface="Calibri" charset="0"/>
+                        <a:ea typeface="Calibri" charset="0"/>
+                        <a:cs typeface="Calibri" charset="0"/>
+                      </a:endParaRPr>
+                    </a:p>
+                  </a:txBody>
+                  <a:tcPr marL="91440" marR="91440" marT="45720" marB="45720" anchor="ctr">
                     <a:lnL w="12700" cap="flat" cmpd="sng" algn="ctr">
                       <a:solidFill>
                         <a:srgbClr val="DFE6EC"/>
@@ -5973,7 +7480,7 @@
                         <a:buNone/>
                       </a:pPr>
                       <a:r>
-                        <a:rPr lang="en-US" sz="1200" dirty="0">
+                        <a:rPr lang="en-US" sz="1150" dirty="0">
                           <a:solidFill>
                             <a:srgbClr val="26323E"/>
                           </a:solidFill>
@@ -5981,16 +7488,16 @@
                           <a:ea typeface="Calibri" pitchFamily="34" charset="-122"/>
                           <a:cs typeface="Calibri" pitchFamily="34" charset="-120"/>
                         </a:rPr>
-                        <a:t>Placa de concientización (opcional, a pedido)</a:t>
+                        <a:t>Hosting en Streamlit Community Cloud</a:t>
                       </a:r>
-                      <a:endParaRPr lang="en-US" sz="1200" dirty="0">
+                      <a:endParaRPr lang="en-US" sz="1150" dirty="0">
                         <a:latin typeface="Calibri" charset="0"/>
                         <a:ea typeface="Calibri" charset="0"/>
                         <a:cs typeface="Calibri" charset="0"/>
                       </a:endParaRPr>
                     </a:p>
                   </a:txBody>
-                  <a:tcPr marL="109728" marR="109728" marT="45720" marB="45720" anchor="ctr">
+                  <a:tcPr marL="91440" marR="91440" marT="45720" marB="45720" anchor="ctr">
                     <a:lnL w="12700" cap="flat" cmpd="sng" algn="ctr">
                       <a:solidFill>
                         <a:srgbClr val="DFE6EC"/>
@@ -6041,24 +7548,92 @@
                         <a:buNone/>
                       </a:pPr>
                       <a:r>
-                        <a:rPr lang="en-US" sz="1200" b="1" dirty="0">
+                        <a:rPr lang="en-US" sz="1150" b="1" dirty="0">
                           <a:solidFill>
-                            <a:srgbClr val="0B2E4F"/>
+                            <a:srgbClr val="1F7A8C"/>
                           </a:solidFill>
                           <a:latin typeface="Calibri" pitchFamily="34" charset="0"/>
                           <a:ea typeface="Calibri" pitchFamily="34" charset="-122"/>
                           <a:cs typeface="Calibri" pitchFamily="34" charset="-120"/>
                         </a:rPr>
-                        <a:t>≈ US$ 0,01</a:t>
+                        <a:t>US$ 0</a:t>
                       </a:r>
-                      <a:endParaRPr lang="en-US" sz="1200" dirty="0">
+                      <a:endParaRPr lang="en-US" sz="1150" dirty="0">
                         <a:latin typeface="Calibri" charset="0"/>
                         <a:ea typeface="Calibri" charset="0"/>
                         <a:cs typeface="Calibri" charset="0"/>
                       </a:endParaRPr>
                     </a:p>
                   </a:txBody>
-                  <a:tcPr marL="109728" marR="109728" marT="45720" marB="45720" anchor="ctr">
+                  <a:tcPr marL="91440" marR="91440" marT="45720" marB="45720" anchor="ctr">
+                    <a:lnL w="12700" cap="flat" cmpd="sng" algn="ctr">
+                      <a:solidFill>
+                        <a:srgbClr val="DFE6EC"/>
+                      </a:solidFill>
+                      <a:prstDash val="solid"/>
+                      <a:round/>
+                      <a:headEnd type="none" w="med" len="med"/>
+                      <a:tailEnd type="none" w="med" len="med"/>
+                    </a:lnL>
+                    <a:lnR w="12700" cap="flat" cmpd="sng" algn="ctr">
+                      <a:solidFill>
+                        <a:srgbClr val="DFE6EC"/>
+                      </a:solidFill>
+                      <a:prstDash val="solid"/>
+                      <a:round/>
+                      <a:headEnd type="none" w="med" len="med"/>
+                      <a:tailEnd type="none" w="med" len="med"/>
+                    </a:lnR>
+                    <a:lnT w="12700" cap="flat" cmpd="sng" algn="ctr">
+                      <a:solidFill>
+                        <a:srgbClr val="DFE6EC"/>
+                      </a:solidFill>
+                      <a:prstDash val="solid"/>
+                      <a:round/>
+                      <a:headEnd type="none" w="med" len="med"/>
+                      <a:tailEnd type="none" w="med" len="med"/>
+                    </a:lnT>
+                    <a:lnB w="12700" cap="flat" cmpd="sng" algn="ctr">
+                      <a:solidFill>
+                        <a:srgbClr val="DFE6EC"/>
+                      </a:solidFill>
+                      <a:prstDash val="solid"/>
+                      <a:round/>
+                      <a:headEnd type="none" w="med" len="med"/>
+                      <a:tailEnd type="none" w="med" len="med"/>
+                    </a:lnB>
+                    <a:solidFill>
+                      <a:srgbClr val="FFFFFF"/>
+                    </a:solidFill>
+                  </a:tcPr>
+                </a:tc>
+                <a:tc>
+                  <a:txBody>
+                    <a:bodyPr/>
+                    <a:lstStyle/>
+                    <a:p>
+                      <a:pPr algn="r" indent="0" marL="0">
+                        <a:buNone/>
+                      </a:pPr>
+                      <a:r>
+                        <a:rPr lang="en-US" sz="1150" dirty="0">
+                          <a:solidFill>
+                            <a:srgbClr val="6B7C8C"/>
+                          </a:solidFill>
+                          <a:latin typeface="Calibri" pitchFamily="34" charset="0"/>
+                          <a:ea typeface="Calibri" pitchFamily="34" charset="-122"/>
+                          <a:cs typeface="Calibri" pitchFamily="34" charset="-120"/>
+                        </a:rPr>
+                        <a:t>US$ 0</a:t>
+                      </a:r>
+                      <a:endParaRPr lang="en-US" sz="1150" dirty="0">
+                        <a:latin typeface="Calibri" charset="0"/>
+                        <a:ea typeface="Calibri" charset="0"/>
+                        <a:cs typeface="Calibri" charset="0"/>
+                      </a:endParaRPr>
+                    </a:p>
+                  </a:txBody>
+                  <a:tcPr marL="91440" marR="91440" marT="45720" marB="45720" anchor="ctr">
                     <a:lnL w="12700" cap="flat" cmpd="sng" algn="ctr">
                       <a:solidFill>
                         <a:srgbClr val="DFE6EC"/>
@@ -6111,7 +7686,7 @@
                         <a:buNone/>
                       </a:pPr>
                       <a:r>
-                        <a:rPr lang="en-US" sz="1200" dirty="0">
+                        <a:rPr lang="en-US" sz="1150" dirty="0">
                           <a:solidFill>
                             <a:srgbClr val="26323E"/>
                           </a:solidFill>
@@ -6119,16 +7694,16 @@
                           <a:ea typeface="Calibri" pitchFamily="34" charset="-122"/>
                           <a:cs typeface="Calibri" pitchFamily="34" charset="-120"/>
                         </a:rPr>
-                        <a:t>Hosting en Streamlit Community Cloud</a:t>
+                        <a:t>Repositorio (GitHub) y entorno (Python, VS Code)</a:t>
                       </a:r>
-                      <a:endParaRPr lang="en-US" sz="1200" dirty="0">
+                      <a:endParaRPr lang="en-US" sz="1150" dirty="0">
                         <a:latin typeface="Calibri" charset="0"/>
                         <a:ea typeface="Calibri" charset="0"/>
                         <a:cs typeface="Calibri" charset="0"/>
                       </a:endParaRPr>
                     </a:p>
                   </a:txBody>
-                  <a:tcPr marL="109728" marR="109728" marT="45720" marB="45720" anchor="ctr">
+                  <a:tcPr marL="91440" marR="91440" marT="45720" marB="45720" anchor="ctr">
                     <a:lnL w="12700" cap="flat" cmpd="sng" algn="ctr">
                       <a:solidFill>
                         <a:srgbClr val="DFE6EC"/>
@@ -6179,9 +7754,9 @@
                         <a:buNone/>
                       </a:pPr>
                       <a:r>
-                        <a:rPr lang="en-US" sz="1200" b="1" dirty="0">
+                        <a:rPr lang="en-US" sz="1150" b="1" dirty="0">
                           <a:solidFill>
-                            <a:srgbClr val="0B2E4F"/>
+                            <a:srgbClr val="1F7A8C"/>
                           </a:solidFill>
                           <a:latin typeface="Calibri" pitchFamily="34" charset="0"/>
                           <a:ea typeface="Calibri" pitchFamily="34" charset="-122"/>
@@ -6189,14 +7764,82 @@
                         </a:rPr>
                         <a:t>US$ 0</a:t>
                       </a:r>
-                      <a:endParaRPr lang="en-US" sz="1200" dirty="0">
+                      <a:endParaRPr lang="en-US" sz="1150" dirty="0">
                         <a:latin typeface="Calibri" charset="0"/>
                         <a:ea typeface="Calibri" charset="0"/>
                         <a:cs typeface="Calibri" charset="0"/>
                       </a:endParaRPr>
                     </a:p>
                   </a:txBody>
-                  <a:tcPr marL="109728" marR="109728" marT="45720" marB="45720" anchor="ctr">
+                  <a:tcPr marL="91440" marR="91440" marT="45720" marB="45720" anchor="ctr">
+                    <a:lnL w="12700" cap="flat" cmpd="sng" algn="ctr">
+                      <a:solidFill>
+                        <a:srgbClr val="DFE6EC"/>
+                      </a:solidFill>
+                      <a:prstDash val="solid"/>
+                      <a:round/>
+                      <a:headEnd type="none" w="med" len="med"/>
+                      <a:tailEnd type="none" w="med" len="med"/>
+                    </a:lnL>
+                    <a:lnR w="12700" cap="flat" cmpd="sng" algn="ctr">
+                      <a:solidFill>
+                        <a:srgbClr val="DFE6EC"/>
+                      </a:solidFill>
+                      <a:prstDash val="solid"/>
+                      <a:round/>
+                      <a:headEnd type="none" w="med" len="med"/>
+                      <a:tailEnd type="none" w="med" len="med"/>
+                    </a:lnR>
+                    <a:lnT w="12700" cap="flat" cmpd="sng" algn="ctr">
+                      <a:solidFill>
+                        <a:srgbClr val="DFE6EC"/>
+                      </a:solidFill>
+                      <a:prstDash val="solid"/>
+                      <a:round/>
+                      <a:headEnd type="none" w="med" len="med"/>
+                      <a:tailEnd type="none" w="med" len="med"/>
+                    </a:lnT>
+                    <a:lnB w="12700" cap="flat" cmpd="sng" algn="ctr">
+                      <a:solidFill>
+                        <a:srgbClr val="DFE6EC"/>
+                      </a:solidFill>
+                      <a:prstDash val="solid"/>
+                      <a:round/>
+                      <a:headEnd type="none" w="med" len="med"/>
+                      <a:tailEnd type="none" w="med" len="med"/>
+                    </a:lnB>
+                    <a:solidFill>
+                      <a:srgbClr val="F4F7F9"/>
+                    </a:solidFill>
+                  </a:tcPr>
+                </a:tc>
+                <a:tc>
+                  <a:txBody>
+                    <a:bodyPr/>
+                    <a:lstStyle/>
+                    <a:p>
+                      <a:pPr algn="r" indent="0" marL="0">
+                        <a:buNone/>
+                      </a:pPr>
+                      <a:r>
+                        <a:rPr lang="en-US" sz="1150" dirty="0">
+                          <a:solidFill>
+                            <a:srgbClr val="6B7C8C"/>
+                          </a:solidFill>
+                          <a:latin typeface="Calibri" pitchFamily="34" charset="0"/>
+                          <a:ea typeface="Calibri" pitchFamily="34" charset="-122"/>
+                          <a:cs typeface="Calibri" pitchFamily="34" charset="-120"/>
+                        </a:rPr>
+                        <a:t>US$ 0</a:t>
+                      </a:r>
+                      <a:endParaRPr lang="en-US" sz="1150" dirty="0">
+                        <a:latin typeface="Calibri" charset="0"/>
+                        <a:ea typeface="Calibri" charset="0"/>
+                        <a:cs typeface="Calibri" charset="0"/>
+                      </a:endParaRPr>
+                    </a:p>
+                  </a:txBody>
+                  <a:tcPr marL="91440" marR="91440" marT="45720" marB="45720" anchor="ctr">
                     <a:lnL w="12700" cap="flat" cmpd="sng" algn="ctr">
                       <a:solidFill>
                         <a:srgbClr val="DFE6EC"/>
@@ -6239,162 +7882,24 @@
                   </a:tcPr>
                 </a:tc>
               </a:tr>
-              <a:tr h="301752">
-                <a:tc>
-                  <a:txBody>
-                    <a:bodyPr/>
-                    <a:lstStyle/>
-                    <a:p>
-                      <a:pPr indent="0" marL="0">
-                        <a:buNone/>
-                      </a:pPr>
-                      <a:r>
-                        <a:rPr lang="en-US" sz="1200" dirty="0">
-                          <a:solidFill>
-                            <a:srgbClr val="26323E"/>
-                          </a:solidFill>
-                          <a:latin typeface="Calibri" pitchFamily="34" charset="0"/>
-                          <a:ea typeface="Calibri" pitchFamily="34" charset="-122"/>
-                          <a:cs typeface="Calibri" pitchFamily="34" charset="-120"/>
-                        </a:rPr>
-                        <a:t>Repositorio (GitHub) y entorno (Python, VS Code)</a:t>
-                      </a:r>
-                      <a:endParaRPr lang="en-US" sz="1200" dirty="0">
-                        <a:latin typeface="Calibri" charset="0"/>
-                        <a:ea typeface="Calibri" charset="0"/>
-                        <a:cs typeface="Calibri" charset="0"/>
-                      </a:endParaRPr>
-                    </a:p>
-                  </a:txBody>
-                  <a:tcPr marL="109728" marR="109728" marT="45720" marB="45720" anchor="ctr">
-                    <a:lnL w="12700" cap="flat" cmpd="sng" algn="ctr">
-                      <a:solidFill>
-                        <a:srgbClr val="DFE6EC"/>
-                      </a:solidFill>
-                      <a:prstDash val="solid"/>
-                      <a:round/>
-                      <a:headEnd type="none" w="med" len="med"/>
-                      <a:tailEnd type="none" w="med" len="med"/>
-                    </a:lnL>
-                    <a:lnR w="12700" cap="flat" cmpd="sng" algn="ctr">
-                      <a:solidFill>
-                        <a:srgbClr val="DFE6EC"/>
-                      </a:solidFill>
-                      <a:prstDash val="solid"/>
-                      <a:round/>
-                      <a:headEnd type="none" w="med" len="med"/>
-                      <a:tailEnd type="none" w="med" len="med"/>
-                    </a:lnR>
-                    <a:lnT w="12700" cap="flat" cmpd="sng" algn="ctr">
-                      <a:solidFill>
-                        <a:srgbClr val="DFE6EC"/>
-                      </a:solidFill>
-                      <a:prstDash val="solid"/>
-                      <a:round/>
-                      <a:headEnd type="none" w="med" len="med"/>
-                      <a:tailEnd type="none" w="med" len="med"/>
-                    </a:lnT>
-                    <a:lnB w="12700" cap="flat" cmpd="sng" algn="ctr">
-                      <a:solidFill>
-                        <a:srgbClr val="DFE6EC"/>
-                      </a:solidFill>
-                      <a:prstDash val="solid"/>
-                      <a:round/>
-                      <a:headEnd type="none" w="med" len="med"/>
-                      <a:tailEnd type="none" w="med" len="med"/>
-                    </a:lnB>
-                    <a:solidFill>
-                      <a:srgbClr val="FFFFFF"/>
-                    </a:solidFill>
-                  </a:tcPr>
-                </a:tc>
-                <a:tc>
-                  <a:txBody>
-                    <a:bodyPr/>
-                    <a:lstStyle/>
-                    <a:p>
-                      <a:pPr algn="r" indent="0" marL="0">
-                        <a:buNone/>
-                      </a:pPr>
-                      <a:r>
-                        <a:rPr lang="en-US" sz="1200" b="1" dirty="0">
-                          <a:solidFill>
-                            <a:srgbClr val="0B2E4F"/>
-                          </a:solidFill>
-                          <a:latin typeface="Calibri" pitchFamily="34" charset="0"/>
-                          <a:ea typeface="Calibri" pitchFamily="34" charset="-122"/>
-                          <a:cs typeface="Calibri" pitchFamily="34" charset="-120"/>
-                        </a:rPr>
-                        <a:t>US$ 0</a:t>
-                      </a:r>
-                      <a:endParaRPr lang="en-US" sz="1200" dirty="0">
-                        <a:latin typeface="Calibri" charset="0"/>
-                        <a:ea typeface="Calibri" charset="0"/>
-                        <a:cs typeface="Calibri" charset="0"/>
-                      </a:endParaRPr>
-                    </a:p>
-                  </a:txBody>
-                  <a:tcPr marL="109728" marR="109728" marT="45720" marB="45720" anchor="ctr">
-                    <a:lnL w="12700" cap="flat" cmpd="sng" algn="ctr">
-                      <a:solidFill>
-                        <a:srgbClr val="DFE6EC"/>
-                      </a:solidFill>
-                      <a:prstDash val="solid"/>
-                      <a:round/>
-                      <a:headEnd type="none" w="med" len="med"/>
-                      <a:tailEnd type="none" w="med" len="med"/>
-                    </a:lnL>
-                    <a:lnR w="12700" cap="flat" cmpd="sng" algn="ctr">
-                      <a:solidFill>
-                        <a:srgbClr val="DFE6EC"/>
-                      </a:solidFill>
-                      <a:prstDash val="solid"/>
-                      <a:round/>
-                      <a:headEnd type="none" w="med" len="med"/>
-                      <a:tailEnd type="none" w="med" len="med"/>
-                    </a:lnR>
-                    <a:lnT w="12700" cap="flat" cmpd="sng" algn="ctr">
-                      <a:solidFill>
-                        <a:srgbClr val="DFE6EC"/>
-                      </a:solidFill>
-                      <a:prstDash val="solid"/>
-                      <a:round/>
-                      <a:headEnd type="none" w="med" len="med"/>
-                      <a:tailEnd type="none" w="med" len="med"/>
-                    </a:lnT>
-                    <a:lnB w="12700" cap="flat" cmpd="sng" algn="ctr">
-                      <a:solidFill>
-                        <a:srgbClr val="DFE6EC"/>
-                      </a:solidFill>
-                      <a:prstDash val="solid"/>
-                      <a:round/>
-                      <a:headEnd type="none" w="med" len="med"/>
-                      <a:tailEnd type="none" w="med" len="med"/>
-                    </a:lnB>
-                    <a:solidFill>
-                      <a:srgbClr val="FFFFFF"/>
-                    </a:solidFill>
-                  </a:tcPr>
-                </a:tc>
-              </a:tr>
             </a:tbl>
           </a:graphicData>
         </a:graphic>
       </p:graphicFrame>
       <p:sp>
         <p:nvSpPr>
-          <p:cNvPr id="14" name="Shape 11"/>
-          <p:cNvSpPr/>
-          <p:nvPr/>
-        </p:nvSpPr>
-        <p:spPr>
-          <a:xfrm>
-            <a:off x="8366760" y="3611880"/>
-            <a:ext cx="3136392" cy="2157984"/>
+          <p:cNvPr id="15" name="Shape 12"/>
+          <p:cNvSpPr/>
+          <p:nvPr/>
+        </p:nvSpPr>
+        <p:spPr>
+          <a:xfrm>
+            <a:off x="8366760" y="3520440"/>
+            <a:ext cx="3136392" cy="2286000"/>
           </a:xfrm>
           <a:prstGeom prst="roundRect">
             <a:avLst>
-              <a:gd name="adj" fmla="val 3814"/>
+              <a:gd name="adj" fmla="val 3600"/>
             </a:avLst>
           </a:prstGeom>
           <a:solidFill>
@@ -6410,13 +7915,13 @@
       </p:sp>
       <p:sp>
         <p:nvSpPr>
-          <p:cNvPr id="15" name="Text 12"/>
-          <p:cNvSpPr/>
-          <p:nvPr/>
-        </p:nvSpPr>
-        <p:spPr>
-          <a:xfrm>
-            <a:off x="8366760" y="3749040"/>
+          <p:cNvPr id="16" name="Text 13"/>
+          <p:cNvSpPr/>
+          <p:nvPr/>
+        </p:nvSpPr>
+        <p:spPr>
+          <a:xfrm>
+            <a:off x="8366760" y="3657600"/>
             <a:ext cx="3136392" cy="237744"/>
           </a:xfrm>
           <a:prstGeom prst="rect">
@@ -6441,7 +7946,7 @@
                 <a:ea typeface="Calibri" pitchFamily="34" charset="-122"/>
                 <a:cs typeface="Calibri" pitchFamily="34" charset="-120"/>
               </a:rPr>
-              <a:t>LA APP MUESTRA EL COSTO REAL</a:t>
+              <a:t>LA APP MIDE SU PROPIO CONSUMO</a:t>
             </a:r>
             <a:endParaRPr lang="en-US" sz="950" dirty="0"/>
           </a:p>
@@ -6449,7 +7954,7 @@
       </p:sp>
       <p:pic>
         <p:nvPicPr>
-          <p:cNvPr id="16" name="Image 0" descr="/Users/agustin/Documents/Coder House/GuardIA/docs/app-consumo.png">    </p:cNvPr>
+          <p:cNvPr id="17" name="Image 0" descr="/Users/agustin/Documents/Coder House/GuardIA/docs/app-consumo.png">    </p:cNvPr>
           <p:cNvPicPr>
             <a:picLocks noChangeAspect="1"/>
           </p:cNvPicPr>
@@ -6463,8 +7968,8 @@
         </p:blipFill>
         <p:spPr>
           <a:xfrm>
-            <a:off x="9006840" y="4069080"/>
-            <a:ext cx="1856232" cy="1591056"/>
+            <a:off x="9052560" y="3977640"/>
+            <a:ext cx="1764792" cy="1700784"/>
           </a:xfrm>
           <a:prstGeom prst="rect">
             <a:avLst/>
@@ -6473,7 +7978,7 @@
       </p:pic>
       <p:sp>
         <p:nvSpPr>
-          <p:cNvPr id="17" name="Text 13"/>
+          <p:cNvPr id="18" name="Text 14"/>
           <p:cNvSpPr/>
           <p:nvPr/>
         </p:nvSpPr>
@@ -6504,7 +8009,7 @@
                 <a:ea typeface="Calibri" pitchFamily="34" charset="-122"/>
                 <a:cs typeface="Calibri" pitchFamily="34" charset="-120"/>
               </a:rPr>
-              <a:t>Precios de OpenAI vigentes en agosto de 2026: US$ 0,15 por millón de tokens de entrada y US$ 0,60 por millón de salida (gpt-4o-mini).</a:t>
+              <a:t>Precios del nivel pago vigentes en agosto de 2026: US$ 0,30 por millón de tokens de entrada y US$ 2,50 por millón de salida (gemini-2.5-flash).</a:t>
             </a:r>
             <a:endParaRPr lang="en-US" sz="950" dirty="0"/>
           </a:p>
@@ -6512,7 +8017,7 @@
       </p:sp>
       <p:sp>
         <p:nvSpPr>
-          <p:cNvPr id="18" name="Text 14"/>
+          <p:cNvPr id="19" name="Text 15"/>
           <p:cNvSpPr/>
           <p:nvPr/>
         </p:nvSpPr>
@@ -6565,897 +8070,7 @@
       </p:sp>
       <p:sp>
         <p:nvSpPr>
-          <p:cNvPr id="19" name="Text 15"/>
-          <p:cNvSpPr/>
-          <p:nvPr/>
-        </p:nvSpPr>
-        <p:spPr>
-          <a:xfrm>
-            <a:off x="11048695" y="6355080"/>
-            <a:ext cx="457200" cy="274320"/>
-          </a:xfrm>
-          <a:prstGeom prst="rect">
-            <a:avLst/>
-          </a:prstGeom>
-          <a:noFill/>
-          <a:ln/>
-        </p:spPr>
-        <p:txBody>
-          <a:bodyPr wrap="square" lIns="0" tIns="0" rIns="0" bIns="0" rtlCol="0" anchor="ctr"/>
-          <a:lstStyle/>
-          <a:p>
-            <a:pPr algn="r" indent="0" marL="0">
-              <a:buNone/>
-            </a:pPr>
-            <a:r>
-              <a:rPr lang="en-US" sz="900" dirty="0">
-                <a:solidFill>
-                  <a:srgbClr val="6B7C8C"/>
-                </a:solidFill>
-                <a:latin typeface="Calibri" pitchFamily="34" charset="0"/>
-                <a:ea typeface="Calibri" pitchFamily="34" charset="-122"/>
-                <a:cs typeface="Calibri" pitchFamily="34" charset="-120"/>
-              </a:rPr>
-              <a:t>12</a:t>
-            </a:r>
-            <a:endParaRPr lang="en-US" sz="900" dirty="0"/>
-          </a:p>
-        </p:txBody>
-      </p:sp>
-    </p:spTree>
-  </p:cSld>
-  <p:clrMapOvr>
-    <a:masterClrMapping/>
-  </p:clrMapOvr>
-</p:sld>
-</file>
-
-<file path=ppt/slides/slide13.xml><?xml version="1.0" encoding="utf-8"?>
-<p:sld xmlns:a="http://schemas.openxmlformats.org/drawingml/2006/main" xmlns:r="http://schemas.openxmlformats.org/officeDocument/2006/relationships" xmlns:p="http://schemas.openxmlformats.org/presentationml/2006/main">
-  <p:cSld name="Slide 13">
-    <p:bg>
-      <p:bgPr>
-        <a:solidFill>
-          <a:srgbClr val="FFFFFF"/>
-        </a:solidFill>
-      </p:bgPr>
-    </p:bg>
-    <p:spTree>
-      <p:nvGrpSpPr>
-        <p:cNvPr id="1" name=""/>
-        <p:cNvGrpSpPr/>
-        <p:nvPr/>
-      </p:nvGrpSpPr>
-      <p:grpSpPr>
-        <a:xfrm>
-          <a:off x="0" y="0"/>
-          <a:ext cx="0" cy="0"/>
-          <a:chOff x="0" y="0"/>
-          <a:chExt cx="0" cy="0"/>
-        </a:xfrm>
-      </p:grpSpPr>
-      <p:sp>
-        <p:nvSpPr>
-          <p:cNvPr id="2" name="Text 0"/>
-          <p:cNvSpPr/>
-          <p:nvPr/>
-        </p:nvSpPr>
-        <p:spPr>
-          <a:xfrm>
-            <a:off x="685800" y="411480"/>
-            <a:ext cx="10820095" cy="731520"/>
-          </a:xfrm>
-          <a:prstGeom prst="rect">
-            <a:avLst/>
-          </a:prstGeom>
-          <a:noFill/>
-          <a:ln/>
-        </p:spPr>
-        <p:txBody>
-          <a:bodyPr wrap="square" lIns="0" tIns="0" rIns="0" bIns="0" rtlCol="0" anchor="ctr"/>
-          <a:lstStyle/>
-          <a:p>
-            <a:pPr algn="l" indent="0" marL="0">
-              <a:buNone/>
-            </a:pPr>
-            <a:r>
-              <a:rPr lang="en-US" sz="3600" b="1" dirty="0">
-                <a:solidFill>
-                  <a:srgbClr val="0B2E4F"/>
-                </a:solidFill>
-                <a:latin typeface="Calibri" pitchFamily="34" charset="0"/>
-                <a:ea typeface="Calibri" pitchFamily="34" charset="-122"/>
-                <a:cs typeface="Calibri" pitchFamily="34" charset="-120"/>
-              </a:rPr>
-              <a:t>Limitaciones y consideraciones</a:t>
-            </a:r>
-            <a:endParaRPr lang="en-US" sz="3600" dirty="0"/>
-          </a:p>
-        </p:txBody>
-      </p:sp>
-      <p:sp>
-        <p:nvSpPr>
-          <p:cNvPr id="3" name="Text 1"/>
-          <p:cNvSpPr/>
-          <p:nvPr/>
-        </p:nvSpPr>
-        <p:spPr>
-          <a:xfrm>
-            <a:off x="685800" y="1133856"/>
-            <a:ext cx="10515600" cy="502920"/>
-          </a:xfrm>
-          <a:prstGeom prst="rect">
-            <a:avLst/>
-          </a:prstGeom>
-          <a:noFill/>
-          <a:ln/>
-        </p:spPr>
-        <p:txBody>
-          <a:bodyPr wrap="square" lIns="0" tIns="0" rIns="0" bIns="0" rtlCol="0" anchor="t"/>
-          <a:lstStyle/>
-          <a:p>
-            <a:pPr algn="l" indent="0" marL="0">
-              <a:buNone/>
-            </a:pPr>
-            <a:r>
-              <a:rPr lang="en-US" sz="1500" dirty="0">
-                <a:solidFill>
-                  <a:srgbClr val="6B7C8C"/>
-                </a:solidFill>
-                <a:latin typeface="Calibri" pitchFamily="34" charset="0"/>
-                <a:ea typeface="Calibri" pitchFamily="34" charset="-122"/>
-                <a:cs typeface="Calibri" pitchFamily="34" charset="-120"/>
-              </a:rPr>
-              <a:t>Ser honesto respecto de los límites de la herramienta también forma parte de su diseño.</a:t>
-            </a:r>
-            <a:endParaRPr lang="en-US" sz="1500" dirty="0"/>
-          </a:p>
-        </p:txBody>
-      </p:sp>
-      <p:sp>
-        <p:nvSpPr>
-          <p:cNvPr id="4" name="Shape 2"/>
-          <p:cNvSpPr/>
-          <p:nvPr/>
-        </p:nvSpPr>
-        <p:spPr>
-          <a:xfrm>
-            <a:off x="685800" y="1920240"/>
-            <a:ext cx="5193792" cy="1828800"/>
-          </a:xfrm>
-          <a:prstGeom prst="roundRect">
-            <a:avLst>
-              <a:gd name="adj" fmla="val 4500"/>
-            </a:avLst>
-          </a:prstGeom>
-          <a:solidFill>
-            <a:srgbClr val="F4F7F9"/>
-          </a:solidFill>
-          <a:ln w="12700">
-            <a:solidFill>
-              <a:srgbClr val="DFE6EC"/>
-            </a:solidFill>
-            <a:prstDash val="solid"/>
-          </a:ln>
-        </p:spPr>
-      </p:sp>
-      <p:sp>
-        <p:nvSpPr>
-          <p:cNvPr id="5" name="Shape 3"/>
-          <p:cNvSpPr/>
-          <p:nvPr/>
-        </p:nvSpPr>
-        <p:spPr>
-          <a:xfrm>
-            <a:off x="1005840" y="2194560"/>
-            <a:ext cx="475488" cy="475488"/>
-          </a:xfrm>
-          <a:prstGeom prst="ellipse">
-            <a:avLst/>
-          </a:prstGeom>
-          <a:solidFill>
-            <a:srgbClr val="D64545"/>
-          </a:solidFill>
-          <a:ln w="12700">
-            <a:solidFill>
-              <a:srgbClr val="D64545"/>
-            </a:solidFill>
-            <a:prstDash val="solid"/>
-          </a:ln>
-        </p:spPr>
-      </p:sp>
-      <p:sp>
-        <p:nvSpPr>
-          <p:cNvPr id="6" name="Text 4"/>
-          <p:cNvSpPr/>
-          <p:nvPr/>
-        </p:nvSpPr>
-        <p:spPr>
-          <a:xfrm>
-            <a:off x="1005840" y="2194560"/>
-            <a:ext cx="475488" cy="475488"/>
-          </a:xfrm>
-          <a:prstGeom prst="rect">
-            <a:avLst/>
-          </a:prstGeom>
-          <a:noFill/>
-          <a:ln/>
-        </p:spPr>
-        <p:txBody>
-          <a:bodyPr wrap="square" lIns="0" tIns="0" rIns="0" bIns="0" rtlCol="0" anchor="ctr"/>
-          <a:lstStyle/>
-          <a:p>
-            <a:pPr algn="ctr" indent="0" marL="0">
-              <a:buNone/>
-            </a:pPr>
-            <a:r>
-              <a:rPr lang="en-US" sz="1600" b="1" dirty="0">
-                <a:solidFill>
-                  <a:srgbClr val="FFFFFF"/>
-                </a:solidFill>
-                <a:latin typeface="Calibri" pitchFamily="34" charset="0"/>
-                <a:ea typeface="Calibri" pitchFamily="34" charset="-122"/>
-                <a:cs typeface="Calibri" pitchFamily="34" charset="-120"/>
-              </a:rPr>
-              <a:t>!</a:t>
-            </a:r>
-            <a:endParaRPr lang="en-US" sz="1600" dirty="0"/>
-          </a:p>
-        </p:txBody>
-      </p:sp>
-      <p:sp>
-        <p:nvSpPr>
-          <p:cNvPr id="7" name="Text 5"/>
-          <p:cNvSpPr/>
-          <p:nvPr/>
-        </p:nvSpPr>
-        <p:spPr>
-          <a:xfrm>
-            <a:off x="1645920" y="2194560"/>
-            <a:ext cx="4023360" cy="475488"/>
-          </a:xfrm>
-          <a:prstGeom prst="rect">
-            <a:avLst/>
-          </a:prstGeom>
-          <a:noFill/>
-          <a:ln/>
-        </p:spPr>
-        <p:txBody>
-          <a:bodyPr wrap="square" lIns="0" tIns="0" rIns="0" bIns="0" rtlCol="0" anchor="ctr"/>
-          <a:lstStyle/>
-          <a:p>
-            <a:pPr indent="0" marL="0">
-              <a:buNone/>
-            </a:pPr>
-            <a:r>
-              <a:rPr lang="en-US" sz="1500" b="1" dirty="0">
-                <a:solidFill>
-                  <a:srgbClr val="0B2E4F"/>
-                </a:solidFill>
-                <a:latin typeface="Calibri" pitchFamily="34" charset="0"/>
-                <a:ea typeface="Calibri" pitchFamily="34" charset="-122"/>
-                <a:cs typeface="Calibri" pitchFamily="34" charset="-120"/>
-              </a:rPr>
-              <a:t>Alucinaciones y falsos negativos</a:t>
-            </a:r>
-            <a:endParaRPr lang="en-US" sz="1500" dirty="0"/>
-          </a:p>
-        </p:txBody>
-      </p:sp>
-      <p:sp>
-        <p:nvSpPr>
-          <p:cNvPr id="8" name="Text 6"/>
-          <p:cNvSpPr/>
-          <p:nvPr/>
-        </p:nvSpPr>
-        <p:spPr>
-          <a:xfrm>
-            <a:off x="1033272" y="2788920"/>
-            <a:ext cx="4526280" cy="841248"/>
-          </a:xfrm>
-          <a:prstGeom prst="rect">
-            <a:avLst/>
-          </a:prstGeom>
-          <a:noFill/>
-          <a:ln/>
-        </p:spPr>
-        <p:txBody>
-          <a:bodyPr wrap="square" lIns="0" tIns="0" rIns="0" bIns="0" rtlCol="0" anchor="t"/>
-          <a:lstStyle/>
-          <a:p>
-            <a:pPr indent="0" marL="0">
-              <a:lnSpc>
-                <a:spcPct val="114000"/>
-              </a:lnSpc>
-              <a:buNone/>
-            </a:pPr>
-            <a:r>
-              <a:rPr lang="en-US" sz="1150" dirty="0">
-                <a:solidFill>
-                  <a:srgbClr val="26323E"/>
-                </a:solidFill>
-                <a:latin typeface="Calibri" pitchFamily="34" charset="0"/>
-                <a:ea typeface="Calibri" pitchFamily="34" charset="-122"/>
-                <a:cs typeface="Calibri" pitchFamily="34" charset="-120"/>
-              </a:rPr>
-              <a:t>El modelo puede equivocarse en ambos sentidos. GuardIA se presenta como un asistente, no como un veredicto final: siempre recomienda verificar por un canal oficial.</a:t>
-            </a:r>
-            <a:endParaRPr lang="en-US" sz="1150" dirty="0"/>
-          </a:p>
-        </p:txBody>
-      </p:sp>
-      <p:sp>
-        <p:nvSpPr>
-          <p:cNvPr id="9" name="Shape 7"/>
-          <p:cNvSpPr/>
-          <p:nvPr/>
-        </p:nvSpPr>
-        <p:spPr>
-          <a:xfrm>
-            <a:off x="6309360" y="1920240"/>
-            <a:ext cx="5193792" cy="1828800"/>
-          </a:xfrm>
-          <a:prstGeom prst="roundRect">
-            <a:avLst>
-              <a:gd name="adj" fmla="val 4500"/>
-            </a:avLst>
-          </a:prstGeom>
-          <a:solidFill>
-            <a:srgbClr val="F4F7F9"/>
-          </a:solidFill>
-          <a:ln w="12700">
-            <a:solidFill>
-              <a:srgbClr val="DFE6EC"/>
-            </a:solidFill>
-            <a:prstDash val="solid"/>
-          </a:ln>
-        </p:spPr>
-      </p:sp>
-      <p:sp>
-        <p:nvSpPr>
-          <p:cNvPr id="10" name="Shape 8"/>
-          <p:cNvSpPr/>
-          <p:nvPr/>
-        </p:nvSpPr>
-        <p:spPr>
-          <a:xfrm>
-            <a:off x="6629400" y="2194560"/>
-            <a:ext cx="475488" cy="475488"/>
-          </a:xfrm>
-          <a:prstGeom prst="ellipse">
-            <a:avLst/>
-          </a:prstGeom>
-          <a:solidFill>
-            <a:srgbClr val="D64545"/>
-          </a:solidFill>
-          <a:ln w="12700">
-            <a:solidFill>
-              <a:srgbClr val="D64545"/>
-            </a:solidFill>
-            <a:prstDash val="solid"/>
-          </a:ln>
-        </p:spPr>
-      </p:sp>
-      <p:sp>
-        <p:nvSpPr>
-          <p:cNvPr id="11" name="Text 9"/>
-          <p:cNvSpPr/>
-          <p:nvPr/>
-        </p:nvSpPr>
-        <p:spPr>
-          <a:xfrm>
-            <a:off x="6629400" y="2194560"/>
-            <a:ext cx="475488" cy="475488"/>
-          </a:xfrm>
-          <a:prstGeom prst="rect">
-            <a:avLst/>
-          </a:prstGeom>
-          <a:noFill/>
-          <a:ln/>
-        </p:spPr>
-        <p:txBody>
-          <a:bodyPr wrap="square" lIns="0" tIns="0" rIns="0" bIns="0" rtlCol="0" anchor="ctr"/>
-          <a:lstStyle/>
-          <a:p>
-            <a:pPr algn="ctr" indent="0" marL="0">
-              <a:buNone/>
-            </a:pPr>
-            <a:r>
-              <a:rPr lang="en-US" sz="1600" b="1" dirty="0">
-                <a:solidFill>
-                  <a:srgbClr val="FFFFFF"/>
-                </a:solidFill>
-                <a:latin typeface="Calibri" pitchFamily="34" charset="0"/>
-                <a:ea typeface="Calibri" pitchFamily="34" charset="-122"/>
-                <a:cs typeface="Calibri" pitchFamily="34" charset="-120"/>
-              </a:rPr>
-              <a:t>!</a:t>
-            </a:r>
-            <a:endParaRPr lang="en-US" sz="1600" dirty="0"/>
-          </a:p>
-        </p:txBody>
-      </p:sp>
-      <p:sp>
-        <p:nvSpPr>
-          <p:cNvPr id="12" name="Text 10"/>
-          <p:cNvSpPr/>
-          <p:nvPr/>
-        </p:nvSpPr>
-        <p:spPr>
-          <a:xfrm>
-            <a:off x="7269480" y="2194560"/>
-            <a:ext cx="4023360" cy="475488"/>
-          </a:xfrm>
-          <a:prstGeom prst="rect">
-            <a:avLst/>
-          </a:prstGeom>
-          <a:noFill/>
-          <a:ln/>
-        </p:spPr>
-        <p:txBody>
-          <a:bodyPr wrap="square" lIns="0" tIns="0" rIns="0" bIns="0" rtlCol="0" anchor="ctr"/>
-          <a:lstStyle/>
-          <a:p>
-            <a:pPr indent="0" marL="0">
-              <a:buNone/>
-            </a:pPr>
-            <a:r>
-              <a:rPr lang="en-US" sz="1500" b="1" dirty="0">
-                <a:solidFill>
-                  <a:srgbClr val="0B2E4F"/>
-                </a:solidFill>
-                <a:latin typeface="Calibri" pitchFamily="34" charset="0"/>
-                <a:ea typeface="Calibri" pitchFamily="34" charset="-122"/>
-                <a:cs typeface="Calibri" pitchFamily="34" charset="-120"/>
-              </a:rPr>
-              <a:t>Datos sensibles</a:t>
-            </a:r>
-            <a:endParaRPr lang="en-US" sz="1500" dirty="0"/>
-          </a:p>
-        </p:txBody>
-      </p:sp>
-      <p:sp>
-        <p:nvSpPr>
-          <p:cNvPr id="13" name="Text 11"/>
-          <p:cNvSpPr/>
-          <p:nvPr/>
-        </p:nvSpPr>
-        <p:spPr>
-          <a:xfrm>
-            <a:off x="6656832" y="2788920"/>
-            <a:ext cx="4526280" cy="841248"/>
-          </a:xfrm>
-          <a:prstGeom prst="rect">
-            <a:avLst/>
-          </a:prstGeom>
-          <a:noFill/>
-          <a:ln/>
-        </p:spPr>
-        <p:txBody>
-          <a:bodyPr wrap="square" lIns="0" tIns="0" rIns="0" bIns="0" rtlCol="0" anchor="t"/>
-          <a:lstStyle/>
-          <a:p>
-            <a:pPr indent="0" marL="0">
-              <a:lnSpc>
-                <a:spcPct val="114000"/>
-              </a:lnSpc>
-              <a:buNone/>
-            </a:pPr>
-            <a:r>
-              <a:rPr lang="en-US" sz="1150" dirty="0">
-                <a:solidFill>
-                  <a:srgbClr val="26323E"/>
-                </a:solidFill>
-                <a:latin typeface="Calibri" pitchFamily="34" charset="0"/>
-                <a:ea typeface="Calibri" pitchFamily="34" charset="-122"/>
-                <a:cs typeface="Calibri" pitchFamily="34" charset="-120"/>
-              </a:rPr>
-              <a:t>El texto se envía a la API de OpenAI. No debe pegarse información confidencial innecesaria; en un uso productivo correspondería anonimizar y contemplar acuerdos de tratamiento de datos.</a:t>
-            </a:r>
-            <a:endParaRPr lang="en-US" sz="1150" dirty="0"/>
-          </a:p>
-        </p:txBody>
-      </p:sp>
-      <p:sp>
-        <p:nvSpPr>
-          <p:cNvPr id="14" name="Shape 12"/>
-          <p:cNvSpPr/>
-          <p:nvPr/>
-        </p:nvSpPr>
-        <p:spPr>
-          <a:xfrm>
-            <a:off x="685800" y="3931920"/>
-            <a:ext cx="5193792" cy="1828800"/>
-          </a:xfrm>
-          <a:prstGeom prst="roundRect">
-            <a:avLst>
-              <a:gd name="adj" fmla="val 4500"/>
-            </a:avLst>
-          </a:prstGeom>
-          <a:solidFill>
-            <a:srgbClr val="F4F7F9"/>
-          </a:solidFill>
-          <a:ln w="12700">
-            <a:solidFill>
-              <a:srgbClr val="DFE6EC"/>
-            </a:solidFill>
-            <a:prstDash val="solid"/>
-          </a:ln>
-        </p:spPr>
-      </p:sp>
-      <p:sp>
-        <p:nvSpPr>
-          <p:cNvPr id="15" name="Shape 13"/>
-          <p:cNvSpPr/>
-          <p:nvPr/>
-        </p:nvSpPr>
-        <p:spPr>
-          <a:xfrm>
-            <a:off x="1005840" y="4206240"/>
-            <a:ext cx="475488" cy="475488"/>
-          </a:xfrm>
-          <a:prstGeom prst="ellipse">
-            <a:avLst/>
-          </a:prstGeom>
-          <a:solidFill>
-            <a:srgbClr val="D64545"/>
-          </a:solidFill>
-          <a:ln w="12700">
-            <a:solidFill>
-              <a:srgbClr val="D64545"/>
-            </a:solidFill>
-            <a:prstDash val="solid"/>
-          </a:ln>
-        </p:spPr>
-      </p:sp>
-      <p:sp>
-        <p:nvSpPr>
-          <p:cNvPr id="16" name="Text 14"/>
-          <p:cNvSpPr/>
-          <p:nvPr/>
-        </p:nvSpPr>
-        <p:spPr>
-          <a:xfrm>
-            <a:off x="1005840" y="4206240"/>
-            <a:ext cx="475488" cy="475488"/>
-          </a:xfrm>
-          <a:prstGeom prst="rect">
-            <a:avLst/>
-          </a:prstGeom>
-          <a:noFill/>
-          <a:ln/>
-        </p:spPr>
-        <p:txBody>
-          <a:bodyPr wrap="square" lIns="0" tIns="0" rIns="0" bIns="0" rtlCol="0" anchor="ctr"/>
-          <a:lstStyle/>
-          <a:p>
-            <a:pPr algn="ctr" indent="0" marL="0">
-              <a:buNone/>
-            </a:pPr>
-            <a:r>
-              <a:rPr lang="en-US" sz="1600" b="1" dirty="0">
-                <a:solidFill>
-                  <a:srgbClr val="FFFFFF"/>
-                </a:solidFill>
-                <a:latin typeface="Calibri" pitchFamily="34" charset="0"/>
-                <a:ea typeface="Calibri" pitchFamily="34" charset="-122"/>
-                <a:cs typeface="Calibri" pitchFamily="34" charset="-120"/>
-              </a:rPr>
-              <a:t>!</a:t>
-            </a:r>
-            <a:endParaRPr lang="en-US" sz="1600" dirty="0"/>
-          </a:p>
-        </p:txBody>
-      </p:sp>
-      <p:sp>
-        <p:nvSpPr>
-          <p:cNvPr id="17" name="Text 15"/>
-          <p:cNvSpPr/>
-          <p:nvPr/>
-        </p:nvSpPr>
-        <p:spPr>
-          <a:xfrm>
-            <a:off x="1645920" y="4206240"/>
-            <a:ext cx="4023360" cy="475488"/>
-          </a:xfrm>
-          <a:prstGeom prst="rect">
-            <a:avLst/>
-          </a:prstGeom>
-          <a:noFill/>
-          <a:ln/>
-        </p:spPr>
-        <p:txBody>
-          <a:bodyPr wrap="square" lIns="0" tIns="0" rIns="0" bIns="0" rtlCol="0" anchor="ctr"/>
-          <a:lstStyle/>
-          <a:p>
-            <a:pPr indent="0" marL="0">
-              <a:buNone/>
-            </a:pPr>
-            <a:r>
-              <a:rPr lang="en-US" sz="1500" b="1" dirty="0">
-                <a:solidFill>
-                  <a:srgbClr val="0B2E4F"/>
-                </a:solidFill>
-                <a:latin typeface="Calibri" pitchFamily="34" charset="0"/>
-                <a:ea typeface="Calibri" pitchFamily="34" charset="-122"/>
-                <a:cs typeface="Calibri" pitchFamily="34" charset="-120"/>
-              </a:rPr>
-              <a:t>El phishing evoluciona</a:t>
-            </a:r>
-            <a:endParaRPr lang="en-US" sz="1500" dirty="0"/>
-          </a:p>
-        </p:txBody>
-      </p:sp>
-      <p:sp>
-        <p:nvSpPr>
-          <p:cNvPr id="18" name="Text 16"/>
-          <p:cNvSpPr/>
-          <p:nvPr/>
-        </p:nvSpPr>
-        <p:spPr>
-          <a:xfrm>
-            <a:off x="1033272" y="4800600"/>
-            <a:ext cx="4526280" cy="841248"/>
-          </a:xfrm>
-          <a:prstGeom prst="rect">
-            <a:avLst/>
-          </a:prstGeom>
-          <a:noFill/>
-          <a:ln/>
-        </p:spPr>
-        <p:txBody>
-          <a:bodyPr wrap="square" lIns="0" tIns="0" rIns="0" bIns="0" rtlCol="0" anchor="t"/>
-          <a:lstStyle/>
-          <a:p>
-            <a:pPr indent="0" marL="0">
-              <a:lnSpc>
-                <a:spcPct val="114000"/>
-              </a:lnSpc>
-              <a:buNone/>
-            </a:pPr>
-            <a:r>
-              <a:rPr lang="en-US" sz="1150" dirty="0">
-                <a:solidFill>
-                  <a:srgbClr val="26323E"/>
-                </a:solidFill>
-                <a:latin typeface="Calibri" pitchFamily="34" charset="0"/>
-                <a:ea typeface="Calibri" pitchFamily="34" charset="-122"/>
-                <a:cs typeface="Calibri" pitchFamily="34" charset="-120"/>
-              </a:rPr>
-              <a:t>Las técnicas de engaño se renuevan constantemente, por lo que el prompt y los ejemplos deben mantenerse actualizados para no perder efectividad.</a:t>
-            </a:r>
-            <a:endParaRPr lang="en-US" sz="1150" dirty="0"/>
-          </a:p>
-        </p:txBody>
-      </p:sp>
-      <p:sp>
-        <p:nvSpPr>
-          <p:cNvPr id="19" name="Shape 17"/>
-          <p:cNvSpPr/>
-          <p:nvPr/>
-        </p:nvSpPr>
-        <p:spPr>
-          <a:xfrm>
-            <a:off x="6309360" y="3931920"/>
-            <a:ext cx="5193792" cy="1828800"/>
-          </a:xfrm>
-          <a:prstGeom prst="roundRect">
-            <a:avLst>
-              <a:gd name="adj" fmla="val 4500"/>
-            </a:avLst>
-          </a:prstGeom>
-          <a:solidFill>
-            <a:srgbClr val="F4F7F9"/>
-          </a:solidFill>
-          <a:ln w="12700">
-            <a:solidFill>
-              <a:srgbClr val="DFE6EC"/>
-            </a:solidFill>
-            <a:prstDash val="solid"/>
-          </a:ln>
-        </p:spPr>
-      </p:sp>
-      <p:sp>
-        <p:nvSpPr>
-          <p:cNvPr id="20" name="Shape 18"/>
-          <p:cNvSpPr/>
-          <p:nvPr/>
-        </p:nvSpPr>
-        <p:spPr>
-          <a:xfrm>
-            <a:off x="6629400" y="4206240"/>
-            <a:ext cx="475488" cy="475488"/>
-          </a:xfrm>
-          <a:prstGeom prst="ellipse">
-            <a:avLst/>
-          </a:prstGeom>
-          <a:solidFill>
-            <a:srgbClr val="D64545"/>
-          </a:solidFill>
-          <a:ln w="12700">
-            <a:solidFill>
-              <a:srgbClr val="D64545"/>
-            </a:solidFill>
-            <a:prstDash val="solid"/>
-          </a:ln>
-        </p:spPr>
-      </p:sp>
-      <p:sp>
-        <p:nvSpPr>
-          <p:cNvPr id="21" name="Text 19"/>
-          <p:cNvSpPr/>
-          <p:nvPr/>
-        </p:nvSpPr>
-        <p:spPr>
-          <a:xfrm>
-            <a:off x="6629400" y="4206240"/>
-            <a:ext cx="475488" cy="475488"/>
-          </a:xfrm>
-          <a:prstGeom prst="rect">
-            <a:avLst/>
-          </a:prstGeom>
-          <a:noFill/>
-          <a:ln/>
-        </p:spPr>
-        <p:txBody>
-          <a:bodyPr wrap="square" lIns="0" tIns="0" rIns="0" bIns="0" rtlCol="0" anchor="ctr"/>
-          <a:lstStyle/>
-          <a:p>
-            <a:pPr algn="ctr" indent="0" marL="0">
-              <a:buNone/>
-            </a:pPr>
-            <a:r>
-              <a:rPr lang="en-US" sz="1600" b="1" dirty="0">
-                <a:solidFill>
-                  <a:srgbClr val="FFFFFF"/>
-                </a:solidFill>
-                <a:latin typeface="Calibri" pitchFamily="34" charset="0"/>
-                <a:ea typeface="Calibri" pitchFamily="34" charset="-122"/>
-                <a:cs typeface="Calibri" pitchFamily="34" charset="-120"/>
-              </a:rPr>
-              <a:t>!</a:t>
-            </a:r>
-            <a:endParaRPr lang="en-US" sz="1600" dirty="0"/>
-          </a:p>
-        </p:txBody>
-      </p:sp>
-      <p:sp>
-        <p:nvSpPr>
-          <p:cNvPr id="22" name="Text 20"/>
-          <p:cNvSpPr/>
-          <p:nvPr/>
-        </p:nvSpPr>
-        <p:spPr>
-          <a:xfrm>
-            <a:off x="7269480" y="4206240"/>
-            <a:ext cx="4023360" cy="475488"/>
-          </a:xfrm>
-          <a:prstGeom prst="rect">
-            <a:avLst/>
-          </a:prstGeom>
-          <a:noFill/>
-          <a:ln/>
-        </p:spPr>
-        <p:txBody>
-          <a:bodyPr wrap="square" lIns="0" tIns="0" rIns="0" bIns="0" rtlCol="0" anchor="ctr"/>
-          <a:lstStyle/>
-          <a:p>
-            <a:pPr indent="0" marL="0">
-              <a:buNone/>
-            </a:pPr>
-            <a:r>
-              <a:rPr lang="en-US" sz="1500" b="1" dirty="0">
-                <a:solidFill>
-                  <a:srgbClr val="0B2E4F"/>
-                </a:solidFill>
-                <a:latin typeface="Calibri" pitchFamily="34" charset="0"/>
-                <a:ea typeface="Calibri" pitchFamily="34" charset="-122"/>
-                <a:cs typeface="Calibri" pitchFamily="34" charset="-120"/>
-              </a:rPr>
-              <a:t>Alcance acotado</a:t>
-            </a:r>
-            <a:endParaRPr lang="en-US" sz="1500" dirty="0"/>
-          </a:p>
-        </p:txBody>
-      </p:sp>
-      <p:sp>
-        <p:nvSpPr>
-          <p:cNvPr id="23" name="Text 21"/>
-          <p:cNvSpPr/>
-          <p:nvPr/>
-        </p:nvSpPr>
-        <p:spPr>
-          <a:xfrm>
-            <a:off x="6656832" y="4800600"/>
-            <a:ext cx="4526280" cy="841248"/>
-          </a:xfrm>
-          <a:prstGeom prst="rect">
-            <a:avLst/>
-          </a:prstGeom>
-          <a:noFill/>
-          <a:ln/>
-        </p:spPr>
-        <p:txBody>
-          <a:bodyPr wrap="square" lIns="0" tIns="0" rIns="0" bIns="0" rtlCol="0" anchor="t"/>
-          <a:lstStyle/>
-          <a:p>
-            <a:pPr indent="0" marL="0">
-              <a:lnSpc>
-                <a:spcPct val="114000"/>
-              </a:lnSpc>
-              <a:buNone/>
-            </a:pPr>
-            <a:r>
-              <a:rPr lang="en-US" sz="1150" dirty="0">
-                <a:solidFill>
-                  <a:srgbClr val="26323E"/>
-                </a:solidFill>
-                <a:latin typeface="Calibri" pitchFamily="34" charset="0"/>
-                <a:ea typeface="Calibri" pitchFamily="34" charset="-122"/>
-                <a:cs typeface="Calibri" pitchFamily="34" charset="-120"/>
-              </a:rPr>
-              <a:t>Está pensada para phishing por texto: no abre adjuntos ni sigue enlaces. No reemplaza al antivirus, a los filtros de correo ni al MFA, sino que los complementa.</a:t>
-            </a:r>
-            <a:endParaRPr lang="en-US" sz="1150" dirty="0"/>
-          </a:p>
-        </p:txBody>
-      </p:sp>
-      <p:sp>
-        <p:nvSpPr>
-          <p:cNvPr id="24" name="Text 22"/>
-          <p:cNvSpPr/>
-          <p:nvPr/>
-        </p:nvSpPr>
-        <p:spPr>
-          <a:xfrm>
-            <a:off x="685800" y="6355080"/>
-            <a:ext cx="10271455" cy="274320"/>
-          </a:xfrm>
-          <a:prstGeom prst="rect">
-            <a:avLst/>
-          </a:prstGeom>
-          <a:noFill/>
-          <a:ln/>
-        </p:spPr>
-        <p:txBody>
-          <a:bodyPr wrap="square" lIns="0" tIns="0" rIns="0" bIns="0" rtlCol="0" anchor="ctr"/>
-          <a:lstStyle/>
-          <a:p>
-            <a:pPr indent="0" marL="0">
-              <a:buNone/>
-            </a:pPr>
-            <a:r>
-              <a:rPr lang="en-US" sz="900" b="1" dirty="0">
-                <a:solidFill>
-                  <a:srgbClr val="6B7C8C"/>
-                </a:solidFill>
-                <a:latin typeface="Calibri" pitchFamily="34" charset="0"/>
-                <a:ea typeface="Calibri" pitchFamily="34" charset="-122"/>
-                <a:cs typeface="Calibri" pitchFamily="34" charset="-120"/>
-              </a:rPr>
-              <a:t>GuardIA</a:t>
-            </a:r>
-            <a:pPr indent="0" marL="0">
-              <a:buNone/>
-            </a:pPr>
-            <a:r>
-              <a:rPr lang="en-US" sz="900" dirty="0">
-                <a:solidFill>
-                  <a:srgbClr val="6B7C8C"/>
-                </a:solidFill>
-                <a:latin typeface="Calibri" pitchFamily="34" charset="0"/>
-                <a:ea typeface="Calibri" pitchFamily="34" charset="-122"/>
-                <a:cs typeface="Calibri" pitchFamily="34" charset="-120"/>
-              </a:rPr>
-              <a:t>  ·  Proyecto Final — Prompt Engineering para Programadores · CoderHouse</a:t>
-            </a:r>
-            <a:endParaRPr lang="en-US" sz="900" dirty="0"/>
-          </a:p>
-        </p:txBody>
-      </p:sp>
-      <p:sp>
-        <p:nvSpPr>
-          <p:cNvPr id="25" name="Text 23"/>
+          <p:cNvPr id="20" name="Text 16"/>
           <p:cNvSpPr/>
           <p:nvPr/>
         </p:nvSpPr>
@@ -7557,7 +8172,7 @@
                 <a:ea typeface="Calibri" pitchFamily="34" charset="-122"/>
                 <a:cs typeface="Calibri" pitchFamily="34" charset="-120"/>
               </a:rPr>
-              <a:t>Enlaces del proyecto</a:t>
+              <a:t>Limitaciones y consideraciones</a:t>
             </a:r>
             <a:endParaRPr lang="en-US" sz="3600" dirty="0"/>
           </a:p>
@@ -7572,7 +8187,7 @@
         <p:spPr>
           <a:xfrm>
             <a:off x="685800" y="1133856"/>
-            <a:ext cx="10058400" cy="502920"/>
+            <a:ext cx="10515600" cy="502920"/>
           </a:xfrm>
           <a:prstGeom prst="rect">
             <a:avLst/>
@@ -7596,7 +8211,7 @@
                 <a:ea typeface="Calibri" pitchFamily="34" charset="-122"/>
                 <a:cs typeface="Calibri" pitchFamily="34" charset="-120"/>
               </a:rPr>
-              <a:t>Aplicación desplegada, código fuente y demostración.</a:t>
+              <a:t>Ser honesto respecto de los límites de la herramienta también forma parte de su diseño.</a:t>
             </a:r>
             <a:endParaRPr lang="en-US" sz="1500" dirty="0"/>
           </a:p>
@@ -7610,12 +8225,12 @@
         </p:nvSpPr>
         <p:spPr>
           <a:xfrm>
-            <a:off x="685800" y="1874520"/>
-            <a:ext cx="10820095" cy="1234440"/>
+            <a:off x="685800" y="1920240"/>
+            <a:ext cx="5193792" cy="1828800"/>
           </a:xfrm>
           <a:prstGeom prst="roundRect">
             <a:avLst>
-              <a:gd name="adj" fmla="val 6667"/>
+              <a:gd name="adj" fmla="val 4500"/>
             </a:avLst>
           </a:prstGeom>
           <a:solidFill>
@@ -7637,18 +8252,18 @@
         </p:nvSpPr>
         <p:spPr>
           <a:xfrm>
-            <a:off x="1005840" y="2240280"/>
-            <a:ext cx="512064" cy="512064"/>
+            <a:off x="1005840" y="2194560"/>
+            <a:ext cx="475488" cy="475488"/>
           </a:xfrm>
           <a:prstGeom prst="ellipse">
             <a:avLst/>
           </a:prstGeom>
           <a:solidFill>
-            <a:srgbClr val="1F7A8C"/>
+            <a:srgbClr val="D64545"/>
           </a:solidFill>
           <a:ln w="12700">
             <a:solidFill>
-              <a:srgbClr val="1F7A8C"/>
+              <a:srgbClr val="D64545"/>
             </a:solidFill>
             <a:prstDash val="solid"/>
           </a:ln>
@@ -7662,8 +8277,8 @@
         </p:nvSpPr>
         <p:spPr>
           <a:xfrm>
-            <a:off x="1005840" y="2240280"/>
-            <a:ext cx="512064" cy="512064"/>
+            <a:off x="1005840" y="2194560"/>
+            <a:ext cx="475488" cy="475488"/>
           </a:xfrm>
           <a:prstGeom prst="rect">
             <a:avLst/>
@@ -7679,7 +8294,7 @@
               <a:buNone/>
             </a:pPr>
             <a:r>
-              <a:rPr lang="en-US" sz="1800" b="1" dirty="0">
+              <a:rPr lang="en-US" sz="1600" b="1" dirty="0">
                 <a:solidFill>
                   <a:srgbClr val="FFFFFF"/>
                 </a:solidFill>
@@ -7687,9 +8302,9 @@
                 <a:ea typeface="Calibri" pitchFamily="34" charset="-122"/>
                 <a:cs typeface="Calibri" pitchFamily="34" charset="-120"/>
               </a:rPr>
-              <a:t>1</a:t>
-            </a:r>
-            <a:endParaRPr lang="en-US" sz="1800" dirty="0"/>
+              <a:t>!</a:t>
+            </a:r>
+            <a:endParaRPr lang="en-US" sz="1600" dirty="0"/>
           </a:p>
         </p:txBody>
       </p:sp>
@@ -7701,8 +8316,8 @@
         </p:nvSpPr>
         <p:spPr>
           <a:xfrm>
-            <a:off x="1783080" y="2039112"/>
-            <a:ext cx="4114800" cy="219456"/>
+            <a:off x="1645920" y="2194560"/>
+            <a:ext cx="4023360" cy="475488"/>
           </a:xfrm>
           <a:prstGeom prst="rect">
             <a:avLst/>
@@ -7718,17 +8333,17 @@
               <a:buNone/>
             </a:pPr>
             <a:r>
-              <a:rPr lang="en-US" sz="950" b="1" spc="110" kern="0" dirty="0">
-                <a:solidFill>
-                  <a:srgbClr val="1F7A8C"/>
-                </a:solidFill>
-                <a:latin typeface="Calibri" pitchFamily="34" charset="0"/>
-                <a:ea typeface="Calibri" pitchFamily="34" charset="-122"/>
-                <a:cs typeface="Calibri" pitchFamily="34" charset="-120"/>
-              </a:rPr>
-              <a:t>APLICACIÓN DESPLEGADA</a:t>
-            </a:r>
-            <a:endParaRPr lang="en-US" sz="950" dirty="0"/>
+              <a:rPr lang="en-US" sz="1500" b="1" dirty="0">
+                <a:solidFill>
+                  <a:srgbClr val="0B2E4F"/>
+                </a:solidFill>
+                <a:latin typeface="Calibri" pitchFamily="34" charset="0"/>
+                <a:ea typeface="Calibri" pitchFamily="34" charset="-122"/>
+                <a:cs typeface="Calibri" pitchFamily="34" charset="-120"/>
+              </a:rPr>
+              <a:t>Alucinaciones y falsos negativos</a:t>
+            </a:r>
+            <a:endParaRPr lang="en-US" sz="1500" dirty="0"/>
           </a:p>
         </p:txBody>
       </p:sp>
@@ -7740,47 +8355,8 @@
         </p:nvSpPr>
         <p:spPr>
           <a:xfrm>
-            <a:off x="1783080" y="2258568"/>
-            <a:ext cx="4114800" cy="329184"/>
-          </a:xfrm>
-          <a:prstGeom prst="rect">
-            <a:avLst/>
-          </a:prstGeom>
-          <a:noFill/>
-          <a:ln/>
-        </p:spPr>
-        <p:txBody>
-          <a:bodyPr wrap="square" lIns="0" tIns="0" rIns="0" bIns="0" rtlCol="0" anchor="ctr"/>
-          <a:lstStyle/>
-          <a:p>
-            <a:pPr indent="0" marL="0">
-              <a:buNone/>
-            </a:pPr>
-            <a:r>
-              <a:rPr lang="en-US" sz="1600" b="1" dirty="0">
-                <a:solidFill>
-                  <a:srgbClr val="0B2E4F"/>
-                </a:solidFill>
-                <a:latin typeface="Calibri" pitchFamily="34" charset="0"/>
-                <a:ea typeface="Calibri" pitchFamily="34" charset="-122"/>
-                <a:cs typeface="Calibri" pitchFamily="34" charset="-120"/>
-              </a:rPr>
-              <a:t>Streamlit Community Cloud</a:t>
-            </a:r>
-            <a:endParaRPr lang="en-US" sz="1600" dirty="0"/>
-          </a:p>
-        </p:txBody>
-      </p:sp>
-      <p:sp>
-        <p:nvSpPr>
-          <p:cNvPr id="9" name="Text 7"/>
-          <p:cNvSpPr/>
-          <p:nvPr/>
-        </p:nvSpPr>
-        <p:spPr>
-          <a:xfrm>
-            <a:off x="1783080" y="2606040"/>
-            <a:ext cx="4754880" cy="457200"/>
+            <a:off x="1033272" y="2788920"/>
+            <a:ext cx="4526280" cy="841248"/>
           </a:xfrm>
           <a:prstGeom prst="rect">
             <a:avLst/>
@@ -7794,12 +8370,12 @@
           <a:p>
             <a:pPr indent="0" marL="0">
               <a:lnSpc>
-                <a:spcPct val="110000"/>
+                <a:spcPct val="114000"/>
               </a:lnSpc>
               <a:buNone/>
             </a:pPr>
             <a:r>
-              <a:rPr lang="en-US" sz="1100" dirty="0">
+              <a:rPr lang="en-US" sz="1150" dirty="0">
                 <a:solidFill>
                   <a:srgbClr val="26323E"/>
                 </a:solidFill>
@@ -7807,92 +8383,26 @@
                 <a:ea typeface="Calibri" pitchFamily="34" charset="-122"/>
                 <a:cs typeface="Calibri" pitchFamily="34" charset="-120"/>
               </a:rPr>
-              <a:t>Se puede interactuar con la app desde el navegador, sin instalar nada.</a:t>
-            </a:r>
-            <a:endParaRPr lang="en-US" sz="1100" dirty="0"/>
-          </a:p>
-        </p:txBody>
-      </p:sp>
-      <p:sp>
-        <p:nvSpPr>
-          <p:cNvPr id="10" name="Shape 8"/>
-          <p:cNvSpPr/>
-          <p:nvPr/>
-        </p:nvSpPr>
-        <p:spPr>
-          <a:xfrm>
-            <a:off x="6492240" y="2258568"/>
-            <a:ext cx="4754880" cy="457200"/>
+              <a:t>El modelo puede equivocarse en ambos sentidos. GuardIA se presenta como un asistente, no como un veredicto final: siempre recomienda verificar por un canal oficial.</a:t>
+            </a:r>
+            <a:endParaRPr lang="en-US" sz="1150" dirty="0"/>
+          </a:p>
+        </p:txBody>
+      </p:sp>
+      <p:sp>
+        <p:nvSpPr>
+          <p:cNvPr id="9" name="Shape 7"/>
+          <p:cNvSpPr/>
+          <p:nvPr/>
+        </p:nvSpPr>
+        <p:spPr>
+          <a:xfrm>
+            <a:off x="6309360" y="1920240"/>
+            <a:ext cx="5193792" cy="1828800"/>
           </a:xfrm>
           <a:prstGeom prst="roundRect">
             <a:avLst>
-              <a:gd name="adj" fmla="val 16000"/>
-            </a:avLst>
-          </a:prstGeom>
-          <a:solidFill>
-            <a:srgbClr val="FFFFFF"/>
-          </a:solidFill>
-          <a:ln w="15875">
-            <a:solidFill>
-              <a:srgbClr val="1F7A8C"/>
-            </a:solidFill>
-            <a:prstDash val="solid"/>
-          </a:ln>
-        </p:spPr>
-      </p:sp>
-      <p:sp>
-        <p:nvSpPr>
-          <p:cNvPr id="11" name="Text 9"/>
-          <p:cNvSpPr/>
-          <p:nvPr/>
-        </p:nvSpPr>
-        <p:spPr>
-          <a:xfrm>
-            <a:off x="6583680" y="2258568"/>
-            <a:ext cx="4572000" cy="457200"/>
-          </a:xfrm>
-          <a:prstGeom prst="rect">
-            <a:avLst/>
-          </a:prstGeom>
-          <a:noFill/>
-          <a:ln/>
-        </p:spPr>
-        <p:txBody>
-          <a:bodyPr wrap="square" lIns="0" tIns="0" rIns="0" bIns="0" rtlCol="0" anchor="ctr"/>
-          <a:lstStyle/>
-          <a:p>
-            <a:pPr algn="ctr" indent="0" marL="0">
-              <a:buNone/>
-            </a:pPr>
-            <a:r>
-              <a:rPr lang="en-US" sz="1100" dirty="0">
-                <a:solidFill>
-                  <a:srgbClr val="1F7A8C"/>
-                </a:solidFill>
-                <a:latin typeface="Courier New" pitchFamily="34" charset="0"/>
-                <a:ea typeface="Courier New" pitchFamily="34" charset="-122"/>
-                <a:cs typeface="Courier New" pitchFamily="34" charset="-120"/>
-              </a:rPr>
-              <a:t>https://guardia.streamlit.app</a:t>
-            </a:r>
-            <a:endParaRPr lang="en-US" sz="1100" dirty="0"/>
-          </a:p>
-        </p:txBody>
-      </p:sp>
-      <p:sp>
-        <p:nvSpPr>
-          <p:cNvPr id="12" name="Shape 10"/>
-          <p:cNvSpPr/>
-          <p:nvPr/>
-        </p:nvSpPr>
-        <p:spPr>
-          <a:xfrm>
-            <a:off x="685800" y="3246120"/>
-            <a:ext cx="10820095" cy="1234440"/>
-          </a:xfrm>
-          <a:prstGeom prst="roundRect">
-            <a:avLst>
-              <a:gd name="adj" fmla="val 6667"/>
+              <a:gd name="adj" fmla="val 4500"/>
             </a:avLst>
           </a:prstGeom>
           <a:solidFill>
@@ -7908,24 +8418,24 @@
       </p:sp>
       <p:sp>
         <p:nvSpPr>
-          <p:cNvPr id="13" name="Shape 11"/>
-          <p:cNvSpPr/>
-          <p:nvPr/>
-        </p:nvSpPr>
-        <p:spPr>
-          <a:xfrm>
-            <a:off x="1005840" y="3611880"/>
-            <a:ext cx="512064" cy="512064"/>
+          <p:cNvPr id="10" name="Shape 8"/>
+          <p:cNvSpPr/>
+          <p:nvPr/>
+        </p:nvSpPr>
+        <p:spPr>
+          <a:xfrm>
+            <a:off x="6629400" y="2194560"/>
+            <a:ext cx="475488" cy="475488"/>
           </a:xfrm>
           <a:prstGeom prst="ellipse">
             <a:avLst/>
           </a:prstGeom>
           <a:solidFill>
-            <a:srgbClr val="1F7A8C"/>
+            <a:srgbClr val="D64545"/>
           </a:solidFill>
           <a:ln w="12700">
             <a:solidFill>
-              <a:srgbClr val="1F7A8C"/>
+              <a:srgbClr val="D64545"/>
             </a:solidFill>
             <a:prstDash val="solid"/>
           </a:ln>
@@ -7933,14 +8443,14 @@
       </p:sp>
       <p:sp>
         <p:nvSpPr>
-          <p:cNvPr id="14" name="Text 12"/>
-          <p:cNvSpPr/>
-          <p:nvPr/>
-        </p:nvSpPr>
-        <p:spPr>
-          <a:xfrm>
-            <a:off x="1005840" y="3611880"/>
-            <a:ext cx="512064" cy="512064"/>
+          <p:cNvPr id="11" name="Text 9"/>
+          <p:cNvSpPr/>
+          <p:nvPr/>
+        </p:nvSpPr>
+        <p:spPr>
+          <a:xfrm>
+            <a:off x="6629400" y="2194560"/>
+            <a:ext cx="475488" cy="475488"/>
           </a:xfrm>
           <a:prstGeom prst="rect">
             <a:avLst/>
@@ -7956,7 +8466,7 @@
               <a:buNone/>
             </a:pPr>
             <a:r>
-              <a:rPr lang="en-US" sz="1800" b="1" dirty="0">
+              <a:rPr lang="en-US" sz="1600" b="1" dirty="0">
                 <a:solidFill>
                   <a:srgbClr val="FFFFFF"/>
                 </a:solidFill>
@@ -7964,22 +8474,22 @@
                 <a:ea typeface="Calibri" pitchFamily="34" charset="-122"/>
                 <a:cs typeface="Calibri" pitchFamily="34" charset="-120"/>
               </a:rPr>
-              <a:t>2</a:t>
-            </a:r>
-            <a:endParaRPr lang="en-US" sz="1800" dirty="0"/>
-          </a:p>
-        </p:txBody>
-      </p:sp>
-      <p:sp>
-        <p:nvSpPr>
-          <p:cNvPr id="15" name="Text 13"/>
-          <p:cNvSpPr/>
-          <p:nvPr/>
-        </p:nvSpPr>
-        <p:spPr>
-          <a:xfrm>
-            <a:off x="1783080" y="3410712"/>
-            <a:ext cx="4114800" cy="219456"/>
+              <a:t>!</a:t>
+            </a:r>
+            <a:endParaRPr lang="en-US" sz="1600" dirty="0"/>
+          </a:p>
+        </p:txBody>
+      </p:sp>
+      <p:sp>
+        <p:nvSpPr>
+          <p:cNvPr id="12" name="Text 10"/>
+          <p:cNvSpPr/>
+          <p:nvPr/>
+        </p:nvSpPr>
+        <p:spPr>
+          <a:xfrm>
+            <a:off x="7269480" y="2194560"/>
+            <a:ext cx="4023360" cy="475488"/>
           </a:xfrm>
           <a:prstGeom prst="rect">
             <a:avLst/>
@@ -7995,46 +8505,7 @@
               <a:buNone/>
             </a:pPr>
             <a:r>
-              <a:rPr lang="en-US" sz="950" b="1" spc="110" kern="0" dirty="0">
-                <a:solidFill>
-                  <a:srgbClr val="1F7A8C"/>
-                </a:solidFill>
-                <a:latin typeface="Calibri" pitchFamily="34" charset="0"/>
-                <a:ea typeface="Calibri" pitchFamily="34" charset="-122"/>
-                <a:cs typeface="Calibri" pitchFamily="34" charset="-120"/>
-              </a:rPr>
-              <a:t>CÓDIGO FUENTE</a:t>
-            </a:r>
-            <a:endParaRPr lang="en-US" sz="950" dirty="0"/>
-          </a:p>
-        </p:txBody>
-      </p:sp>
-      <p:sp>
-        <p:nvSpPr>
-          <p:cNvPr id="16" name="Text 14"/>
-          <p:cNvSpPr/>
-          <p:nvPr/>
-        </p:nvSpPr>
-        <p:spPr>
-          <a:xfrm>
-            <a:off x="1783080" y="3630168"/>
-            <a:ext cx="4114800" cy="329184"/>
-          </a:xfrm>
-          <a:prstGeom prst="rect">
-            <a:avLst/>
-          </a:prstGeom>
-          <a:noFill/>
-          <a:ln/>
-        </p:spPr>
-        <p:txBody>
-          <a:bodyPr wrap="square" lIns="0" tIns="0" rIns="0" bIns="0" rtlCol="0" anchor="ctr"/>
-          <a:lstStyle/>
-          <a:p>
-            <a:pPr indent="0" marL="0">
-              <a:buNone/>
-            </a:pPr>
-            <a:r>
-              <a:rPr lang="en-US" sz="1600" b="1" dirty="0">
+              <a:rPr lang="en-US" sz="1500" b="1" dirty="0">
                 <a:solidFill>
                   <a:srgbClr val="0B2E4F"/>
                 </a:solidFill>
@@ -8042,22 +8513,22 @@
                 <a:ea typeface="Calibri" pitchFamily="34" charset="-122"/>
                 <a:cs typeface="Calibri" pitchFamily="34" charset="-120"/>
               </a:rPr>
-              <a:t>Repositorio en GitHub</a:t>
-            </a:r>
-            <a:endParaRPr lang="en-US" sz="1600" dirty="0"/>
-          </a:p>
-        </p:txBody>
-      </p:sp>
-      <p:sp>
-        <p:nvSpPr>
-          <p:cNvPr id="17" name="Text 15"/>
-          <p:cNvSpPr/>
-          <p:nvPr/>
-        </p:nvSpPr>
-        <p:spPr>
-          <a:xfrm>
-            <a:off x="1783080" y="3977640"/>
-            <a:ext cx="4754880" cy="457200"/>
+              <a:t>Datos sensibles</a:t>
+            </a:r>
+            <a:endParaRPr lang="en-US" sz="1500" dirty="0"/>
+          </a:p>
+        </p:txBody>
+      </p:sp>
+      <p:sp>
+        <p:nvSpPr>
+          <p:cNvPr id="13" name="Text 11"/>
+          <p:cNvSpPr/>
+          <p:nvPr/>
+        </p:nvSpPr>
+        <p:spPr>
+          <a:xfrm>
+            <a:off x="6656832" y="2788920"/>
+            <a:ext cx="4526280" cy="841248"/>
           </a:xfrm>
           <a:prstGeom prst="rect">
             <a:avLst/>
@@ -8071,12 +8542,12 @@
           <a:p>
             <a:pPr indent="0" marL="0">
               <a:lnSpc>
-                <a:spcPct val="110000"/>
+                <a:spcPct val="114000"/>
               </a:lnSpc>
               <a:buNone/>
             </a:pPr>
             <a:r>
-              <a:rPr lang="en-US" sz="1100" dirty="0">
+              <a:rPr lang="en-US" sz="1150" dirty="0">
                 <a:solidFill>
                   <a:srgbClr val="26323E"/>
                 </a:solidFill>
@@ -8084,92 +8555,26 @@
                 <a:ea typeface="Calibri" pitchFamily="34" charset="-122"/>
                 <a:cs typeface="Calibri" pitchFamily="34" charset="-120"/>
               </a:rPr>
-              <a:t>Código comentado y organizado: app.py para la interfaz y el paquete guardia/ para la lógica.</a:t>
-            </a:r>
-            <a:endParaRPr lang="en-US" sz="1100" dirty="0"/>
-          </a:p>
-        </p:txBody>
-      </p:sp>
-      <p:sp>
-        <p:nvSpPr>
-          <p:cNvPr id="18" name="Shape 16"/>
-          <p:cNvSpPr/>
-          <p:nvPr/>
-        </p:nvSpPr>
-        <p:spPr>
-          <a:xfrm>
-            <a:off x="6492240" y="3630168"/>
-            <a:ext cx="4754880" cy="457200"/>
+              <a:t>El texto se envía a la API de Google Gemini. No debe pegarse información confidencial innecesaria; en un uso productivo correspondería anonimizar y contemplar acuerdos de tratamiento de datos.</a:t>
+            </a:r>
+            <a:endParaRPr lang="en-US" sz="1150" dirty="0"/>
+          </a:p>
+        </p:txBody>
+      </p:sp>
+      <p:sp>
+        <p:nvSpPr>
+          <p:cNvPr id="14" name="Shape 12"/>
+          <p:cNvSpPr/>
+          <p:nvPr/>
+        </p:nvSpPr>
+        <p:spPr>
+          <a:xfrm>
+            <a:off x="685800" y="3931920"/>
+            <a:ext cx="5193792" cy="1828800"/>
           </a:xfrm>
           <a:prstGeom prst="roundRect">
             <a:avLst>
-              <a:gd name="adj" fmla="val 16000"/>
-            </a:avLst>
-          </a:prstGeom>
-          <a:solidFill>
-            <a:srgbClr val="FFFFFF"/>
-          </a:solidFill>
-          <a:ln w="15875">
-            <a:solidFill>
-              <a:srgbClr val="1F7A8C"/>
-            </a:solidFill>
-            <a:prstDash val="solid"/>
-          </a:ln>
-        </p:spPr>
-      </p:sp>
-      <p:sp>
-        <p:nvSpPr>
-          <p:cNvPr id="19" name="Text 17"/>
-          <p:cNvSpPr/>
-          <p:nvPr/>
-        </p:nvSpPr>
-        <p:spPr>
-          <a:xfrm>
-            <a:off x="6583680" y="3630168"/>
-            <a:ext cx="4572000" cy="457200"/>
-          </a:xfrm>
-          <a:prstGeom prst="rect">
-            <a:avLst/>
-          </a:prstGeom>
-          <a:noFill/>
-          <a:ln/>
-        </p:spPr>
-        <p:txBody>
-          <a:bodyPr wrap="square" lIns="0" tIns="0" rIns="0" bIns="0" rtlCol="0" anchor="ctr"/>
-          <a:lstStyle/>
-          <a:p>
-            <a:pPr algn="ctr" indent="0" marL="0">
-              <a:buNone/>
-            </a:pPr>
-            <a:r>
-              <a:rPr lang="en-US" sz="1100" dirty="0">
-                <a:solidFill>
-                  <a:srgbClr val="1F7A8C"/>
-                </a:solidFill>
-                <a:latin typeface="Courier New" pitchFamily="34" charset="0"/>
-                <a:ea typeface="Courier New" pitchFamily="34" charset="-122"/>
-                <a:cs typeface="Courier New" pitchFamily="34" charset="-120"/>
-              </a:rPr>
-              <a:t>https://github.com/usuario/guardia</a:t>
-            </a:r>
-            <a:endParaRPr lang="en-US" sz="1100" dirty="0"/>
-          </a:p>
-        </p:txBody>
-      </p:sp>
-      <p:sp>
-        <p:nvSpPr>
-          <p:cNvPr id="20" name="Shape 18"/>
-          <p:cNvSpPr/>
-          <p:nvPr/>
-        </p:nvSpPr>
-        <p:spPr>
-          <a:xfrm>
-            <a:off x="685800" y="4617720"/>
-            <a:ext cx="10820095" cy="1234440"/>
-          </a:xfrm>
-          <a:prstGeom prst="roundRect">
-            <a:avLst>
-              <a:gd name="adj" fmla="val 6667"/>
+              <a:gd name="adj" fmla="val 4500"/>
             </a:avLst>
           </a:prstGeom>
           <a:solidFill>
@@ -8185,24 +8590,24 @@
       </p:sp>
       <p:sp>
         <p:nvSpPr>
-          <p:cNvPr id="21" name="Shape 19"/>
-          <p:cNvSpPr/>
-          <p:nvPr/>
-        </p:nvSpPr>
-        <p:spPr>
-          <a:xfrm>
-            <a:off x="1005840" y="4983480"/>
-            <a:ext cx="512064" cy="512064"/>
+          <p:cNvPr id="15" name="Shape 13"/>
+          <p:cNvSpPr/>
+          <p:nvPr/>
+        </p:nvSpPr>
+        <p:spPr>
+          <a:xfrm>
+            <a:off x="1005840" y="4206240"/>
+            <a:ext cx="475488" cy="475488"/>
           </a:xfrm>
           <a:prstGeom prst="ellipse">
             <a:avLst/>
           </a:prstGeom>
           <a:solidFill>
-            <a:srgbClr val="1F7A8C"/>
+            <a:srgbClr val="D64545"/>
           </a:solidFill>
           <a:ln w="12700">
             <a:solidFill>
-              <a:srgbClr val="1F7A8C"/>
+              <a:srgbClr val="D64545"/>
             </a:solidFill>
             <a:prstDash val="solid"/>
           </a:ln>
@@ -8210,14 +8615,14 @@
       </p:sp>
       <p:sp>
         <p:nvSpPr>
-          <p:cNvPr id="22" name="Text 20"/>
-          <p:cNvSpPr/>
-          <p:nvPr/>
-        </p:nvSpPr>
-        <p:spPr>
-          <a:xfrm>
-            <a:off x="1005840" y="4983480"/>
-            <a:ext cx="512064" cy="512064"/>
+          <p:cNvPr id="16" name="Text 14"/>
+          <p:cNvSpPr/>
+          <p:nvPr/>
+        </p:nvSpPr>
+        <p:spPr>
+          <a:xfrm>
+            <a:off x="1005840" y="4206240"/>
+            <a:ext cx="475488" cy="475488"/>
           </a:xfrm>
           <a:prstGeom prst="rect">
             <a:avLst/>
@@ -8233,7 +8638,7 @@
               <a:buNone/>
             </a:pPr>
             <a:r>
-              <a:rPr lang="en-US" sz="1800" b="1" dirty="0">
+              <a:rPr lang="en-US" sz="1600" b="1" dirty="0">
                 <a:solidFill>
                   <a:srgbClr val="FFFFFF"/>
                 </a:solidFill>
@@ -8241,22 +8646,22 @@
                 <a:ea typeface="Calibri" pitchFamily="34" charset="-122"/>
                 <a:cs typeface="Calibri" pitchFamily="34" charset="-120"/>
               </a:rPr>
-              <a:t>3</a:t>
-            </a:r>
-            <a:endParaRPr lang="en-US" sz="1800" dirty="0"/>
-          </a:p>
-        </p:txBody>
-      </p:sp>
-      <p:sp>
-        <p:nvSpPr>
-          <p:cNvPr id="23" name="Text 21"/>
-          <p:cNvSpPr/>
-          <p:nvPr/>
-        </p:nvSpPr>
-        <p:spPr>
-          <a:xfrm>
-            <a:off x="1783080" y="4782312"/>
-            <a:ext cx="4114800" cy="219456"/>
+              <a:t>!</a:t>
+            </a:r>
+            <a:endParaRPr lang="en-US" sz="1600" dirty="0"/>
+          </a:p>
+        </p:txBody>
+      </p:sp>
+      <p:sp>
+        <p:nvSpPr>
+          <p:cNvPr id="17" name="Text 15"/>
+          <p:cNvSpPr/>
+          <p:nvPr/>
+        </p:nvSpPr>
+        <p:spPr>
+          <a:xfrm>
+            <a:off x="1645920" y="4206240"/>
+            <a:ext cx="4023360" cy="475488"/>
           </a:xfrm>
           <a:prstGeom prst="rect">
             <a:avLst/>
@@ -8272,46 +8677,7 @@
               <a:buNone/>
             </a:pPr>
             <a:r>
-              <a:rPr lang="en-US" sz="950" b="1" spc="110" kern="0" dirty="0">
-                <a:solidFill>
-                  <a:srgbClr val="1F7A8C"/>
-                </a:solidFill>
-                <a:latin typeface="Calibri" pitchFamily="34" charset="0"/>
-                <a:ea typeface="Calibri" pitchFamily="34" charset="-122"/>
-                <a:cs typeface="Calibri" pitchFamily="34" charset="-120"/>
-              </a:rPr>
-              <a:t>DEMOSTRACIÓN</a:t>
-            </a:r>
-            <a:endParaRPr lang="en-US" sz="950" dirty="0"/>
-          </a:p>
-        </p:txBody>
-      </p:sp>
-      <p:sp>
-        <p:nvSpPr>
-          <p:cNvPr id="24" name="Text 22"/>
-          <p:cNvSpPr/>
-          <p:nvPr/>
-        </p:nvSpPr>
-        <p:spPr>
-          <a:xfrm>
-            <a:off x="1783080" y="5001768"/>
-            <a:ext cx="4114800" cy="329184"/>
-          </a:xfrm>
-          <a:prstGeom prst="rect">
-            <a:avLst/>
-          </a:prstGeom>
-          <a:noFill/>
-          <a:ln/>
-        </p:spPr>
-        <p:txBody>
-          <a:bodyPr wrap="square" lIns="0" tIns="0" rIns="0" bIns="0" rtlCol="0" anchor="ctr"/>
-          <a:lstStyle/>
-          <a:p>
-            <a:pPr indent="0" marL="0">
-              <a:buNone/>
-            </a:pPr>
-            <a:r>
-              <a:rPr lang="en-US" sz="1600" b="1" dirty="0">
+              <a:rPr lang="en-US" sz="1500" b="1" dirty="0">
                 <a:solidFill>
                   <a:srgbClr val="0B2E4F"/>
                 </a:solidFill>
@@ -8319,22 +8685,22 @@
                 <a:ea typeface="Calibri" pitchFamily="34" charset="-122"/>
                 <a:cs typeface="Calibri" pitchFamily="34" charset="-120"/>
               </a:rPr>
-              <a:t>Video del funcionamiento</a:t>
-            </a:r>
-            <a:endParaRPr lang="en-US" sz="1600" dirty="0"/>
-          </a:p>
-        </p:txBody>
-      </p:sp>
-      <p:sp>
-        <p:nvSpPr>
-          <p:cNvPr id="25" name="Text 23"/>
-          <p:cNvSpPr/>
-          <p:nvPr/>
-        </p:nvSpPr>
-        <p:spPr>
-          <a:xfrm>
-            <a:off x="1783080" y="5349240"/>
-            <a:ext cx="4754880" cy="457200"/>
+              <a:t>Cupos del nivel gratuito</a:t>
+            </a:r>
+            <a:endParaRPr lang="en-US" sz="1500" dirty="0"/>
+          </a:p>
+        </p:txBody>
+      </p:sp>
+      <p:sp>
+        <p:nvSpPr>
+          <p:cNvPr id="18" name="Text 16"/>
+          <p:cNvSpPr/>
+          <p:nvPr/>
+        </p:nvSpPr>
+        <p:spPr>
+          <a:xfrm>
+            <a:off x="1033272" y="4800600"/>
+            <a:ext cx="4526280" cy="841248"/>
           </a:xfrm>
           <a:prstGeom prst="rect">
             <a:avLst/>
@@ -8348,12 +8714,12 @@
           <a:p>
             <a:pPr indent="0" marL="0">
               <a:lnSpc>
-                <a:spcPct val="110000"/>
+                <a:spcPct val="114000"/>
               </a:lnSpc>
               <a:buNone/>
             </a:pPr>
             <a:r>
-              <a:rPr lang="en-US" sz="1100" dirty="0">
+              <a:rPr lang="en-US" sz="1150" dirty="0">
                 <a:solidFill>
                   <a:srgbClr val="26323E"/>
                 </a:solidFill>
@@ -8361,34 +8727,34 @@
                 <a:ea typeface="Calibri" pitchFamily="34" charset="-122"/>
                 <a:cs typeface="Calibri" pitchFamily="34" charset="-120"/>
               </a:rPr>
-              <a:t>Recorrido por la app: análisis de un correo real y generación de la placa.</a:t>
-            </a:r>
-            <a:endParaRPr lang="en-US" sz="1100" dirty="0"/>
-          </a:p>
-        </p:txBody>
-      </p:sp>
-      <p:sp>
-        <p:nvSpPr>
-          <p:cNvPr id="26" name="Shape 24"/>
-          <p:cNvSpPr/>
-          <p:nvPr/>
-        </p:nvSpPr>
-        <p:spPr>
-          <a:xfrm>
-            <a:off x="6492240" y="5001768"/>
-            <a:ext cx="4754880" cy="457200"/>
+              <a:t>El nivel gratuito limita las consultas por minuto y por día. Son holgados para una PyME, pero un pico de tráfico podría agotarlos temporalmente.</a:t>
+            </a:r>
+            <a:endParaRPr lang="en-US" sz="1150" dirty="0"/>
+          </a:p>
+        </p:txBody>
+      </p:sp>
+      <p:sp>
+        <p:nvSpPr>
+          <p:cNvPr id="19" name="Shape 17"/>
+          <p:cNvSpPr/>
+          <p:nvPr/>
+        </p:nvSpPr>
+        <p:spPr>
+          <a:xfrm>
+            <a:off x="6309360" y="3931920"/>
+            <a:ext cx="5193792" cy="1828800"/>
           </a:xfrm>
           <a:prstGeom prst="roundRect">
             <a:avLst>
-              <a:gd name="adj" fmla="val 16000"/>
+              <a:gd name="adj" fmla="val 4500"/>
             </a:avLst>
           </a:prstGeom>
           <a:solidFill>
-            <a:srgbClr val="FFFFFF"/>
+            <a:srgbClr val="F4F7F9"/>
           </a:solidFill>
-          <a:ln w="15875">
+          <a:ln w="12700">
             <a:solidFill>
-              <a:srgbClr val="1F7A8C"/>
+              <a:srgbClr val="DFE6EC"/>
             </a:solidFill>
             <a:prstDash val="solid"/>
           </a:ln>
@@ -8396,14 +8762,39 @@
       </p:sp>
       <p:sp>
         <p:nvSpPr>
-          <p:cNvPr id="27" name="Text 25"/>
-          <p:cNvSpPr/>
-          <p:nvPr/>
-        </p:nvSpPr>
-        <p:spPr>
-          <a:xfrm>
-            <a:off x="6583680" y="5001768"/>
-            <a:ext cx="4572000" cy="457200"/>
+          <p:cNvPr id="20" name="Shape 18"/>
+          <p:cNvSpPr/>
+          <p:nvPr/>
+        </p:nvSpPr>
+        <p:spPr>
+          <a:xfrm>
+            <a:off x="6629400" y="4206240"/>
+            <a:ext cx="475488" cy="475488"/>
+          </a:xfrm>
+          <a:prstGeom prst="ellipse">
+            <a:avLst/>
+          </a:prstGeom>
+          <a:solidFill>
+            <a:srgbClr val="D64545"/>
+          </a:solidFill>
+          <a:ln w="12700">
+            <a:solidFill>
+              <a:srgbClr val="D64545"/>
+            </a:solidFill>
+            <a:prstDash val="solid"/>
+          </a:ln>
+        </p:spPr>
+      </p:sp>
+      <p:sp>
+        <p:nvSpPr>
+          <p:cNvPr id="21" name="Text 19"/>
+          <p:cNvSpPr/>
+          <p:nvPr/>
+        </p:nvSpPr>
+        <p:spPr>
+          <a:xfrm>
+            <a:off x="6629400" y="4206240"/>
+            <a:ext cx="475488" cy="475488"/>
           </a:xfrm>
           <a:prstGeom prst="rect">
             <a:avLst/>
@@ -8419,30 +8810,30 @@
               <a:buNone/>
             </a:pPr>
             <a:r>
-              <a:rPr lang="en-US" sz="1100" dirty="0">
-                <a:solidFill>
-                  <a:srgbClr val="1F7A8C"/>
-                </a:solidFill>
-                <a:latin typeface="Courier New" pitchFamily="34" charset="0"/>
-                <a:ea typeface="Courier New" pitchFamily="34" charset="-122"/>
-                <a:cs typeface="Courier New" pitchFamily="34" charset="-120"/>
-              </a:rPr>
-              <a:t>https://youtu.be/video</a:t>
-            </a:r>
-            <a:endParaRPr lang="en-US" sz="1100" dirty="0"/>
-          </a:p>
-        </p:txBody>
-      </p:sp>
-      <p:sp>
-        <p:nvSpPr>
-          <p:cNvPr id="28" name="Text 26"/>
-          <p:cNvSpPr/>
-          <p:nvPr/>
-        </p:nvSpPr>
-        <p:spPr>
-          <a:xfrm>
-            <a:off x="685800" y="6035040"/>
-            <a:ext cx="10789920" cy="274320"/>
+              <a:rPr lang="en-US" sz="1600" b="1" dirty="0">
+                <a:solidFill>
+                  <a:srgbClr val="FFFFFF"/>
+                </a:solidFill>
+                <a:latin typeface="Calibri" pitchFamily="34" charset="0"/>
+                <a:ea typeface="Calibri" pitchFamily="34" charset="-122"/>
+                <a:cs typeface="Calibri" pitchFamily="34" charset="-120"/>
+              </a:rPr>
+              <a:t>!</a:t>
+            </a:r>
+            <a:endParaRPr lang="en-US" sz="1600" dirty="0"/>
+          </a:p>
+        </p:txBody>
+      </p:sp>
+      <p:sp>
+        <p:nvSpPr>
+          <p:cNvPr id="22" name="Text 20"/>
+          <p:cNvSpPr/>
+          <p:nvPr/>
+        </p:nvSpPr>
+        <p:spPr>
+          <a:xfrm>
+            <a:off x="7269480" y="4206240"/>
+            <a:ext cx="4023360" cy="475488"/>
           </a:xfrm>
           <a:prstGeom prst="rect">
             <a:avLst/>
@@ -8458,23 +8849,65 @@
               <a:buNone/>
             </a:pPr>
             <a:r>
-              <a:rPr lang="en-US" sz="1050" b="1" dirty="0">
-                <a:solidFill>
-                  <a:srgbClr val="D64545"/>
-                </a:solidFill>
-                <a:latin typeface="Calibri" pitchFamily="34" charset="0"/>
-                <a:ea typeface="Calibri" pitchFamily="34" charset="-122"/>
-                <a:cs typeface="Calibri" pitchFamily="34" charset="-120"/>
-              </a:rPr>
-              <a:t>Reemplazá las tres direcciones de arriba por los enlaces definitivos antes de entregar.</a:t>
-            </a:r>
-            <a:endParaRPr lang="en-US" sz="1050" dirty="0"/>
-          </a:p>
-        </p:txBody>
-      </p:sp>
-      <p:sp>
-        <p:nvSpPr>
-          <p:cNvPr id="29" name="Text 27"/>
+              <a:rPr lang="en-US" sz="1500" b="1" dirty="0">
+                <a:solidFill>
+                  <a:srgbClr val="0B2E4F"/>
+                </a:solidFill>
+                <a:latin typeface="Calibri" pitchFamily="34" charset="0"/>
+                <a:ea typeface="Calibri" pitchFamily="34" charset="-122"/>
+                <a:cs typeface="Calibri" pitchFamily="34" charset="-120"/>
+              </a:rPr>
+              <a:t>Alcance acotado</a:t>
+            </a:r>
+            <a:endParaRPr lang="en-US" sz="1500" dirty="0"/>
+          </a:p>
+        </p:txBody>
+      </p:sp>
+      <p:sp>
+        <p:nvSpPr>
+          <p:cNvPr id="23" name="Text 21"/>
+          <p:cNvSpPr/>
+          <p:nvPr/>
+        </p:nvSpPr>
+        <p:spPr>
+          <a:xfrm>
+            <a:off x="6656832" y="4800600"/>
+            <a:ext cx="4526280" cy="841248"/>
+          </a:xfrm>
+          <a:prstGeom prst="rect">
+            <a:avLst/>
+          </a:prstGeom>
+          <a:noFill/>
+          <a:ln/>
+        </p:spPr>
+        <p:txBody>
+          <a:bodyPr wrap="square" lIns="0" tIns="0" rIns="0" bIns="0" rtlCol="0" anchor="t"/>
+          <a:lstStyle/>
+          <a:p>
+            <a:pPr indent="0" marL="0">
+              <a:lnSpc>
+                <a:spcPct val="114000"/>
+              </a:lnSpc>
+              <a:buNone/>
+            </a:pPr>
+            <a:r>
+              <a:rPr lang="en-US" sz="1150" dirty="0">
+                <a:solidFill>
+                  <a:srgbClr val="26323E"/>
+                </a:solidFill>
+                <a:latin typeface="Calibri" pitchFamily="34" charset="0"/>
+                <a:ea typeface="Calibri" pitchFamily="34" charset="-122"/>
+                <a:cs typeface="Calibri" pitchFamily="34" charset="-120"/>
+              </a:rPr>
+              <a:t>Está pensada para phishing por texto: no abre adjuntos ni sigue enlaces. No reemplaza al antivirus, a los filtros de correo ni al MFA, sino que los complementa.</a:t>
+            </a:r>
+            <a:endParaRPr lang="en-US" sz="1150" dirty="0"/>
+          </a:p>
+        </p:txBody>
+      </p:sp>
+      <p:sp>
+        <p:nvSpPr>
+          <p:cNvPr id="24" name="Text 22"/>
           <p:cNvSpPr/>
           <p:nvPr/>
         </p:nvSpPr>
@@ -8527,7 +8960,7 @@
       </p:sp>
       <p:sp>
         <p:nvSpPr>
-          <p:cNvPr id="30" name="Text 28"/>
+          <p:cNvPr id="25" name="Text 23"/>
           <p:cNvSpPr/>
           <p:nvPr/>
         </p:nvSpPr>
@@ -8578,7 +9011,7 @@
     <p:bg>
       <p:bgPr>
         <a:solidFill>
-          <a:srgbClr val="0B2E4F"/>
+          <a:srgbClr val="FFFFFF"/>
         </a:solidFill>
       </p:bgPr>
     </p:bg>
@@ -8623,13 +9056,13 @@
             <a:r>
               <a:rPr lang="en-US" sz="3600" b="1" dirty="0">
                 <a:solidFill>
-                  <a:srgbClr val="FFFFFF"/>
-                </a:solidFill>
-                <a:latin typeface="Calibri" pitchFamily="34" charset="0"/>
-                <a:ea typeface="Calibri" pitchFamily="34" charset="-122"/>
-                <a:cs typeface="Calibri" pitchFamily="34" charset="-120"/>
-              </a:rPr>
-              <a:t>Conclusiones</a:t>
+                  <a:srgbClr val="0B2E4F"/>
+                </a:solidFill>
+                <a:latin typeface="Calibri" pitchFamily="34" charset="0"/>
+                <a:ea typeface="Calibri" pitchFamily="34" charset="-122"/>
+                <a:cs typeface="Calibri" pitchFamily="34" charset="-120"/>
+              </a:rPr>
+              <a:t>Enlaces del proyecto</a:t>
             </a:r>
             <a:endParaRPr lang="en-US" sz="3600" dirty="0"/>
           </a:p>
@@ -8662,13 +9095,13 @@
             <a:r>
               <a:rPr lang="en-US" sz="1500" dirty="0">
                 <a:solidFill>
-                  <a:srgbClr val="8FD3E0"/>
-                </a:solidFill>
-                <a:latin typeface="Calibri" pitchFamily="34" charset="0"/>
-                <a:ea typeface="Calibri" pitchFamily="34" charset="-122"/>
-                <a:cs typeface="Calibri" pitchFamily="34" charset="-120"/>
-              </a:rPr>
-              <a:t>Sobre la importancia de la propuesta y el impacto esperado.</a:t>
+                  <a:srgbClr val="6B7C8C"/>
+                </a:solidFill>
+                <a:latin typeface="Calibri" pitchFamily="34" charset="0"/>
+                <a:ea typeface="Calibri" pitchFamily="34" charset="-122"/>
+                <a:cs typeface="Calibri" pitchFamily="34" charset="-120"/>
+              </a:rPr>
+              <a:t>Aplicación desplegada, código fuente y demostración.</a:t>
             </a:r>
             <a:endParaRPr lang="en-US" sz="1500" dirty="0"/>
           </a:p>
@@ -8682,20 +9115,20 @@
         </p:nvSpPr>
         <p:spPr>
           <a:xfrm>
-            <a:off x="685800" y="1965960"/>
-            <a:ext cx="10820095" cy="1261872"/>
+            <a:off x="685800" y="1874520"/>
+            <a:ext cx="10820095" cy="1234440"/>
           </a:xfrm>
           <a:prstGeom prst="roundRect">
             <a:avLst>
-              <a:gd name="adj" fmla="val 6522"/>
+              <a:gd name="adj" fmla="val 6667"/>
             </a:avLst>
           </a:prstGeom>
           <a:solidFill>
-            <a:srgbClr val="10395C"/>
+            <a:srgbClr val="F4F7F9"/>
           </a:solidFill>
           <a:ln w="12700">
             <a:solidFill>
-              <a:srgbClr val="1B4B72"/>
+              <a:srgbClr val="DFE6EC"/>
             </a:solidFill>
             <a:prstDash val="solid"/>
           </a:ln>
@@ -8709,8 +9142,8 @@
         </p:nvSpPr>
         <p:spPr>
           <a:xfrm>
-            <a:off x="1005840" y="2331720"/>
-            <a:ext cx="530352" cy="530352"/>
+            <a:off x="1005840" y="2240280"/>
+            <a:ext cx="512064" cy="512064"/>
           </a:xfrm>
           <a:prstGeom prst="ellipse">
             <a:avLst/>
@@ -8734,8 +9167,8 @@
         </p:nvSpPr>
         <p:spPr>
           <a:xfrm>
-            <a:off x="1005840" y="2331720"/>
-            <a:ext cx="530352" cy="530352"/>
+            <a:off x="1005840" y="2240280"/>
+            <a:ext cx="512064" cy="512064"/>
           </a:xfrm>
           <a:prstGeom prst="rect">
             <a:avLst/>
@@ -8773,8 +9206,8 @@
         </p:nvSpPr>
         <p:spPr>
           <a:xfrm>
-            <a:off x="1783080" y="2130552"/>
-            <a:ext cx="9509760" cy="329184"/>
+            <a:off x="1783080" y="2039112"/>
+            <a:ext cx="4114800" cy="219456"/>
           </a:xfrm>
           <a:prstGeom prst="rect">
             <a:avLst/>
@@ -8790,15 +9223,54 @@
               <a:buNone/>
             </a:pPr>
             <a:r>
+              <a:rPr lang="en-US" sz="950" b="1" spc="110" kern="0" dirty="0">
+                <a:solidFill>
+                  <a:srgbClr val="1F7A8C"/>
+                </a:solidFill>
+                <a:latin typeface="Calibri" pitchFamily="34" charset="0"/>
+                <a:ea typeface="Calibri" pitchFamily="34" charset="-122"/>
+                <a:cs typeface="Calibri" pitchFamily="34" charset="-120"/>
+              </a:rPr>
+              <a:t>APLICACIÓN DESPLEGADA</a:t>
+            </a:r>
+            <a:endParaRPr lang="en-US" sz="950" dirty="0"/>
+          </a:p>
+        </p:txBody>
+      </p:sp>
+      <p:sp>
+        <p:nvSpPr>
+          <p:cNvPr id="8" name="Text 6"/>
+          <p:cNvSpPr/>
+          <p:nvPr/>
+        </p:nvSpPr>
+        <p:spPr>
+          <a:xfrm>
+            <a:off x="1783080" y="2258568"/>
+            <a:ext cx="4114800" cy="329184"/>
+          </a:xfrm>
+          <a:prstGeom prst="rect">
+            <a:avLst/>
+          </a:prstGeom>
+          <a:noFill/>
+          <a:ln/>
+        </p:spPr>
+        <p:txBody>
+          <a:bodyPr wrap="square" lIns="0" tIns="0" rIns="0" bIns="0" rtlCol="0" anchor="ctr"/>
+          <a:lstStyle/>
+          <a:p>
+            <a:pPr indent="0" marL="0">
+              <a:buNone/>
+            </a:pPr>
+            <a:r>
               <a:rPr lang="en-US" sz="1600" b="1" dirty="0">
                 <a:solidFill>
-                  <a:srgbClr val="8FD3E0"/>
-                </a:solidFill>
-                <a:latin typeface="Calibri" pitchFamily="34" charset="0"/>
-                <a:ea typeface="Calibri" pitchFamily="34" charset="-122"/>
-                <a:cs typeface="Calibri" pitchFamily="34" charset="-120"/>
-              </a:rPr>
-              <a:t>Un problema real, con una solución concreta</a:t>
+                  <a:srgbClr val="0B2E4F"/>
+                </a:solidFill>
+                <a:latin typeface="Calibri" pitchFamily="34" charset="0"/>
+                <a:ea typeface="Calibri" pitchFamily="34" charset="-122"/>
+                <a:cs typeface="Calibri" pitchFamily="34" charset="-120"/>
+              </a:rPr>
+              <a:t>Streamlit Community Cloud</a:t>
             </a:r>
             <a:endParaRPr lang="en-US" sz="1600" dirty="0"/>
           </a:p>
@@ -8806,14 +9278,14 @@
       </p:sp>
       <p:sp>
         <p:nvSpPr>
-          <p:cNvPr id="8" name="Text 6"/>
-          <p:cNvSpPr/>
-          <p:nvPr/>
-        </p:nvSpPr>
-        <p:spPr>
-          <a:xfrm>
-            <a:off x="1783080" y="2478024"/>
-            <a:ext cx="9509760" cy="658368"/>
+          <p:cNvPr id="9" name="Text 7"/>
+          <p:cNvSpPr/>
+          <p:nvPr/>
+        </p:nvSpPr>
+        <p:spPr>
+          <a:xfrm>
+            <a:off x="1783080" y="2606040"/>
+            <a:ext cx="4754880" cy="457200"/>
           </a:xfrm>
           <a:prstGeom prst="rect">
             <a:avLst/>
@@ -8827,47 +9299,113 @@
           <a:p>
             <a:pPr indent="0" marL="0">
               <a:lnSpc>
-                <a:spcPct val="114000"/>
+                <a:spcPct val="110000"/>
               </a:lnSpc>
               <a:buNone/>
             </a:pPr>
             <a:r>
-              <a:rPr lang="en-US" sz="1200" dirty="0">
-                <a:solidFill>
-                  <a:srgbClr val="D6E4EC"/>
-                </a:solidFill>
-                <a:latin typeface="Calibri" pitchFamily="34" charset="0"/>
-                <a:ea typeface="Calibri" pitchFamily="34" charset="-122"/>
-                <a:cs typeface="Calibri" pitchFamily="34" charset="-120"/>
-              </a:rPr>
-              <a:t>GuardIA aborda un problema frecuente y costoso con una herramienta simple, técnicamente realizable y económicamente sostenible: pocos centavos al mes frente al costo de un solo incidente.</a:t>
-            </a:r>
-            <a:endParaRPr lang="en-US" sz="1200" dirty="0"/>
-          </a:p>
-        </p:txBody>
-      </p:sp>
-      <p:sp>
-        <p:nvSpPr>
-          <p:cNvPr id="9" name="Shape 7"/>
-          <p:cNvSpPr/>
-          <p:nvPr/>
-        </p:nvSpPr>
-        <p:spPr>
-          <a:xfrm>
-            <a:off x="685800" y="3383280"/>
-            <a:ext cx="10820095" cy="1261872"/>
+              <a:rPr lang="en-US" sz="1100" dirty="0">
+                <a:solidFill>
+                  <a:srgbClr val="26323E"/>
+                </a:solidFill>
+                <a:latin typeface="Calibri" pitchFamily="34" charset="0"/>
+                <a:ea typeface="Calibri" pitchFamily="34" charset="-122"/>
+                <a:cs typeface="Calibri" pitchFamily="34" charset="-120"/>
+              </a:rPr>
+              <a:t>Se puede interactuar con la app desde el navegador, sin instalar nada.</a:t>
+            </a:r>
+            <a:endParaRPr lang="en-US" sz="1100" dirty="0"/>
+          </a:p>
+        </p:txBody>
+      </p:sp>
+      <p:sp>
+        <p:nvSpPr>
+          <p:cNvPr id="10" name="Shape 8"/>
+          <p:cNvSpPr/>
+          <p:nvPr/>
+        </p:nvSpPr>
+        <p:spPr>
+          <a:xfrm>
+            <a:off x="6492240" y="2258568"/>
+            <a:ext cx="4754880" cy="457200"/>
           </a:xfrm>
           <a:prstGeom prst="roundRect">
             <a:avLst>
-              <a:gd name="adj" fmla="val 6522"/>
+              <a:gd name="adj" fmla="val 16000"/>
             </a:avLst>
           </a:prstGeom>
           <a:solidFill>
-            <a:srgbClr val="10395C"/>
+            <a:srgbClr val="FFFFFF"/>
+          </a:solidFill>
+          <a:ln w="15875">
+            <a:solidFill>
+              <a:srgbClr val="1F7A8C"/>
+            </a:solidFill>
+            <a:prstDash val="solid"/>
+          </a:ln>
+        </p:spPr>
+      </p:sp>
+      <p:sp>
+        <p:nvSpPr>
+          <p:cNvPr id="11" name="Text 9"/>
+          <p:cNvSpPr/>
+          <p:nvPr/>
+        </p:nvSpPr>
+        <p:spPr>
+          <a:xfrm>
+            <a:off x="6583680" y="2258568"/>
+            <a:ext cx="4572000" cy="457200"/>
+          </a:xfrm>
+          <a:prstGeom prst="rect">
+            <a:avLst/>
+          </a:prstGeom>
+          <a:noFill/>
+          <a:ln/>
+        </p:spPr>
+        <p:txBody>
+          <a:bodyPr wrap="square" lIns="0" tIns="0" rIns="0" bIns="0" rtlCol="0" anchor="ctr"/>
+          <a:lstStyle/>
+          <a:p>
+            <a:pPr algn="ctr" indent="0" marL="0">
+              <a:buNone/>
+            </a:pPr>
+            <a:r>
+              <a:rPr lang="en-US" sz="1100" dirty="0">
+                <a:solidFill>
+                  <a:srgbClr val="1F7A8C"/>
+                </a:solidFill>
+                <a:latin typeface="Courier New" pitchFamily="34" charset="0"/>
+                <a:ea typeface="Courier New" pitchFamily="34" charset="-122"/>
+                <a:cs typeface="Courier New" pitchFamily="34" charset="-120"/>
+              </a:rPr>
+              <a:t>https://guardia.streamlit.app</a:t>
+            </a:r>
+            <a:endParaRPr lang="en-US" sz="1100" dirty="0"/>
+          </a:p>
+        </p:txBody>
+      </p:sp>
+      <p:sp>
+        <p:nvSpPr>
+          <p:cNvPr id="12" name="Shape 10"/>
+          <p:cNvSpPr/>
+          <p:nvPr/>
+        </p:nvSpPr>
+        <p:spPr>
+          <a:xfrm>
+            <a:off x="685800" y="3246120"/>
+            <a:ext cx="10820095" cy="1234440"/>
+          </a:xfrm>
+          <a:prstGeom prst="roundRect">
+            <a:avLst>
+              <a:gd name="adj" fmla="val 6667"/>
+            </a:avLst>
+          </a:prstGeom>
+          <a:solidFill>
+            <a:srgbClr val="F4F7F9"/>
           </a:solidFill>
           <a:ln w="12700">
             <a:solidFill>
-              <a:srgbClr val="1B4B72"/>
+              <a:srgbClr val="DFE6EC"/>
             </a:solidFill>
             <a:prstDash val="solid"/>
           </a:ln>
@@ -8875,14 +9413,14 @@
       </p:sp>
       <p:sp>
         <p:nvSpPr>
-          <p:cNvPr id="10" name="Shape 8"/>
-          <p:cNvSpPr/>
-          <p:nvPr/>
-        </p:nvSpPr>
-        <p:spPr>
-          <a:xfrm>
-            <a:off x="1005840" y="3749040"/>
-            <a:ext cx="530352" cy="530352"/>
+          <p:cNvPr id="13" name="Shape 11"/>
+          <p:cNvSpPr/>
+          <p:nvPr/>
+        </p:nvSpPr>
+        <p:spPr>
+          <a:xfrm>
+            <a:off x="1005840" y="3611880"/>
+            <a:ext cx="512064" cy="512064"/>
           </a:xfrm>
           <a:prstGeom prst="ellipse">
             <a:avLst/>
@@ -8900,14 +9438,14 @@
       </p:sp>
       <p:sp>
         <p:nvSpPr>
-          <p:cNvPr id="11" name="Text 9"/>
-          <p:cNvSpPr/>
-          <p:nvPr/>
-        </p:nvSpPr>
-        <p:spPr>
-          <a:xfrm>
-            <a:off x="1005840" y="3749040"/>
-            <a:ext cx="530352" cy="530352"/>
+          <p:cNvPr id="14" name="Text 12"/>
+          <p:cNvSpPr/>
+          <p:nvPr/>
+        </p:nvSpPr>
+        <p:spPr>
+          <a:xfrm>
+            <a:off x="1005840" y="3611880"/>
+            <a:ext cx="512064" cy="512064"/>
           </a:xfrm>
           <a:prstGeom prst="rect">
             <a:avLst/>
@@ -8939,14 +9477,14 @@
       </p:sp>
       <p:sp>
         <p:nvSpPr>
-          <p:cNvPr id="12" name="Text 10"/>
-          <p:cNvSpPr/>
-          <p:nvPr/>
-        </p:nvSpPr>
-        <p:spPr>
-          <a:xfrm>
-            <a:off x="1783080" y="3547872"/>
-            <a:ext cx="9509760" cy="329184"/>
+          <p:cNvPr id="15" name="Text 13"/>
+          <p:cNvSpPr/>
+          <p:nvPr/>
+        </p:nvSpPr>
+        <p:spPr>
+          <a:xfrm>
+            <a:off x="1783080" y="3410712"/>
+            <a:ext cx="4114800" cy="219456"/>
           </a:xfrm>
           <a:prstGeom prst="rect">
             <a:avLst/>
@@ -8962,15 +9500,54 @@
               <a:buNone/>
             </a:pPr>
             <a:r>
+              <a:rPr lang="en-US" sz="950" b="1" spc="110" kern="0" dirty="0">
+                <a:solidFill>
+                  <a:srgbClr val="1F7A8C"/>
+                </a:solidFill>
+                <a:latin typeface="Calibri" pitchFamily="34" charset="0"/>
+                <a:ea typeface="Calibri" pitchFamily="34" charset="-122"/>
+                <a:cs typeface="Calibri" pitchFamily="34" charset="-120"/>
+              </a:rPr>
+              <a:t>CÓDIGO FUENTE</a:t>
+            </a:r>
+            <a:endParaRPr lang="en-US" sz="950" dirty="0"/>
+          </a:p>
+        </p:txBody>
+      </p:sp>
+      <p:sp>
+        <p:nvSpPr>
+          <p:cNvPr id="16" name="Text 14"/>
+          <p:cNvSpPr/>
+          <p:nvPr/>
+        </p:nvSpPr>
+        <p:spPr>
+          <a:xfrm>
+            <a:off x="1783080" y="3630168"/>
+            <a:ext cx="4114800" cy="329184"/>
+          </a:xfrm>
+          <a:prstGeom prst="rect">
+            <a:avLst/>
+          </a:prstGeom>
+          <a:noFill/>
+          <a:ln/>
+        </p:spPr>
+        <p:txBody>
+          <a:bodyPr wrap="square" lIns="0" tIns="0" rIns="0" bIns="0" rtlCol="0" anchor="ctr"/>
+          <a:lstStyle/>
+          <a:p>
+            <a:pPr indent="0" marL="0">
+              <a:buNone/>
+            </a:pPr>
+            <a:r>
               <a:rPr lang="en-US" sz="1600" b="1" dirty="0">
                 <a:solidFill>
-                  <a:srgbClr val="8FD3E0"/>
-                </a:solidFill>
-                <a:latin typeface="Calibri" pitchFamily="34" charset="0"/>
-                <a:ea typeface="Calibri" pitchFamily="34" charset="-122"/>
-                <a:cs typeface="Calibri" pitchFamily="34" charset="-120"/>
-              </a:rPr>
-              <a:t>La IA aplicada donde realmente aporta</a:t>
+                  <a:srgbClr val="0B2E4F"/>
+                </a:solidFill>
+                <a:latin typeface="Calibri" pitchFamily="34" charset="0"/>
+                <a:ea typeface="Calibri" pitchFamily="34" charset="-122"/>
+                <a:cs typeface="Calibri" pitchFamily="34" charset="-120"/>
+              </a:rPr>
+              <a:t>Repositorio en GitHub</a:t>
             </a:r>
             <a:endParaRPr lang="en-US" sz="1600" dirty="0"/>
           </a:p>
@@ -8978,14 +9555,14 @@
       </p:sp>
       <p:sp>
         <p:nvSpPr>
-          <p:cNvPr id="13" name="Text 11"/>
-          <p:cNvSpPr/>
-          <p:nvPr/>
-        </p:nvSpPr>
-        <p:spPr>
-          <a:xfrm>
-            <a:off x="1783080" y="3895344"/>
-            <a:ext cx="9509760" cy="658368"/>
+          <p:cNvPr id="17" name="Text 15"/>
+          <p:cNvSpPr/>
+          <p:nvPr/>
+        </p:nvSpPr>
+        <p:spPr>
+          <a:xfrm>
+            <a:off x="1783080" y="3977640"/>
+            <a:ext cx="4754880" cy="457200"/>
           </a:xfrm>
           <a:prstGeom prst="rect">
             <a:avLst/>
@@ -8999,47 +9576,113 @@
           <a:p>
             <a:pPr indent="0" marL="0">
               <a:lnSpc>
-                <a:spcPct val="114000"/>
+                <a:spcPct val="110000"/>
               </a:lnSpc>
               <a:buNone/>
             </a:pPr>
             <a:r>
-              <a:rPr lang="en-US" sz="1200" dirty="0">
-                <a:solidFill>
-                  <a:srgbClr val="D6E4EC"/>
-                </a:solidFill>
-                <a:latin typeface="Calibri" pitchFamily="34" charset="0"/>
-                <a:ea typeface="Calibri" pitchFamily="34" charset="-122"/>
-                <a:cs typeface="Calibri" pitchFamily="34" charset="-120"/>
-              </a:rPr>
-              <a:t>El proyecto usa los dos modelos del curso de forma complementaria: texto-texto para analizar y texto-imagen para concientizar. La salida dirigida es lo que convierte una respuesta de chat en una funcionalidad confiable.</a:t>
-            </a:r>
-            <a:endParaRPr lang="en-US" sz="1200" dirty="0"/>
-          </a:p>
-        </p:txBody>
-      </p:sp>
-      <p:sp>
-        <p:nvSpPr>
-          <p:cNvPr id="14" name="Shape 12"/>
-          <p:cNvSpPr/>
-          <p:nvPr/>
-        </p:nvSpPr>
-        <p:spPr>
-          <a:xfrm>
-            <a:off x="685800" y="4800600"/>
-            <a:ext cx="10820095" cy="1261872"/>
+              <a:rPr lang="en-US" sz="1100" dirty="0">
+                <a:solidFill>
+                  <a:srgbClr val="26323E"/>
+                </a:solidFill>
+                <a:latin typeface="Calibri" pitchFamily="34" charset="0"/>
+                <a:ea typeface="Calibri" pitchFamily="34" charset="-122"/>
+                <a:cs typeface="Calibri" pitchFamily="34" charset="-120"/>
+              </a:rPr>
+              <a:t>Código comentado y organizado: app.py para la interfaz y el paquete guardia/ para la lógica.</a:t>
+            </a:r>
+            <a:endParaRPr lang="en-US" sz="1100" dirty="0"/>
+          </a:p>
+        </p:txBody>
+      </p:sp>
+      <p:sp>
+        <p:nvSpPr>
+          <p:cNvPr id="18" name="Shape 16"/>
+          <p:cNvSpPr/>
+          <p:nvPr/>
+        </p:nvSpPr>
+        <p:spPr>
+          <a:xfrm>
+            <a:off x="6492240" y="3630168"/>
+            <a:ext cx="4754880" cy="457200"/>
           </a:xfrm>
           <a:prstGeom prst="roundRect">
             <a:avLst>
-              <a:gd name="adj" fmla="val 6522"/>
+              <a:gd name="adj" fmla="val 16000"/>
             </a:avLst>
           </a:prstGeom>
           <a:solidFill>
-            <a:srgbClr val="10395C"/>
+            <a:srgbClr val="FFFFFF"/>
+          </a:solidFill>
+          <a:ln w="15875">
+            <a:solidFill>
+              <a:srgbClr val="1F7A8C"/>
+            </a:solidFill>
+            <a:prstDash val="solid"/>
+          </a:ln>
+        </p:spPr>
+      </p:sp>
+      <p:sp>
+        <p:nvSpPr>
+          <p:cNvPr id="19" name="Text 17"/>
+          <p:cNvSpPr/>
+          <p:nvPr/>
+        </p:nvSpPr>
+        <p:spPr>
+          <a:xfrm>
+            <a:off x="6583680" y="3630168"/>
+            <a:ext cx="4572000" cy="457200"/>
+          </a:xfrm>
+          <a:prstGeom prst="rect">
+            <a:avLst/>
+          </a:prstGeom>
+          <a:noFill/>
+          <a:ln/>
+        </p:spPr>
+        <p:txBody>
+          <a:bodyPr wrap="square" lIns="0" tIns="0" rIns="0" bIns="0" rtlCol="0" anchor="ctr"/>
+          <a:lstStyle/>
+          <a:p>
+            <a:pPr algn="ctr" indent="0" marL="0">
+              <a:buNone/>
+            </a:pPr>
+            <a:r>
+              <a:rPr lang="en-US" sz="1100" dirty="0">
+                <a:solidFill>
+                  <a:srgbClr val="1F7A8C"/>
+                </a:solidFill>
+                <a:latin typeface="Courier New" pitchFamily="34" charset="0"/>
+                <a:ea typeface="Courier New" pitchFamily="34" charset="-122"/>
+                <a:cs typeface="Courier New" pitchFamily="34" charset="-120"/>
+              </a:rPr>
+              <a:t>https://github.com/usuario/guardia</a:t>
+            </a:r>
+            <a:endParaRPr lang="en-US" sz="1100" dirty="0"/>
+          </a:p>
+        </p:txBody>
+      </p:sp>
+      <p:sp>
+        <p:nvSpPr>
+          <p:cNvPr id="20" name="Shape 18"/>
+          <p:cNvSpPr/>
+          <p:nvPr/>
+        </p:nvSpPr>
+        <p:spPr>
+          <a:xfrm>
+            <a:off x="685800" y="4617720"/>
+            <a:ext cx="10820095" cy="1234440"/>
+          </a:xfrm>
+          <a:prstGeom prst="roundRect">
+            <a:avLst>
+              <a:gd name="adj" fmla="val 6667"/>
+            </a:avLst>
+          </a:prstGeom>
+          <a:solidFill>
+            <a:srgbClr val="F4F7F9"/>
           </a:solidFill>
           <a:ln w="12700">
             <a:solidFill>
-              <a:srgbClr val="1B4B72"/>
+              <a:srgbClr val="DFE6EC"/>
             </a:solidFill>
             <a:prstDash val="solid"/>
           </a:ln>
@@ -9047,14 +9690,14 @@
       </p:sp>
       <p:sp>
         <p:nvSpPr>
-          <p:cNvPr id="15" name="Shape 13"/>
-          <p:cNvSpPr/>
-          <p:nvPr/>
-        </p:nvSpPr>
-        <p:spPr>
-          <a:xfrm>
-            <a:off x="1005840" y="5166360"/>
-            <a:ext cx="530352" cy="530352"/>
+          <p:cNvPr id="21" name="Shape 19"/>
+          <p:cNvSpPr/>
+          <p:nvPr/>
+        </p:nvSpPr>
+        <p:spPr>
+          <a:xfrm>
+            <a:off x="1005840" y="4983480"/>
+            <a:ext cx="512064" cy="512064"/>
           </a:xfrm>
           <a:prstGeom prst="ellipse">
             <a:avLst/>
@@ -9072,14 +9715,14 @@
       </p:sp>
       <p:sp>
         <p:nvSpPr>
-          <p:cNvPr id="16" name="Text 14"/>
-          <p:cNvSpPr/>
-          <p:nvPr/>
-        </p:nvSpPr>
-        <p:spPr>
-          <a:xfrm>
-            <a:off x="1005840" y="5166360"/>
-            <a:ext cx="530352" cy="530352"/>
+          <p:cNvPr id="22" name="Text 20"/>
+          <p:cNvSpPr/>
+          <p:nvPr/>
+        </p:nvSpPr>
+        <p:spPr>
+          <a:xfrm>
+            <a:off x="1005840" y="4983480"/>
+            <a:ext cx="512064" cy="512064"/>
           </a:xfrm>
           <a:prstGeom prst="rect">
             <a:avLst/>
@@ -9111,14 +9754,14 @@
       </p:sp>
       <p:sp>
         <p:nvSpPr>
-          <p:cNvPr id="17" name="Text 15"/>
-          <p:cNvSpPr/>
-          <p:nvPr/>
-        </p:nvSpPr>
-        <p:spPr>
-          <a:xfrm>
-            <a:off x="1783080" y="4965192"/>
-            <a:ext cx="9509760" cy="329184"/>
+          <p:cNvPr id="23" name="Text 21"/>
+          <p:cNvSpPr/>
+          <p:nvPr/>
+        </p:nvSpPr>
+        <p:spPr>
+          <a:xfrm>
+            <a:off x="1783080" y="4782312"/>
+            <a:ext cx="4114800" cy="219456"/>
           </a:xfrm>
           <a:prstGeom prst="rect">
             <a:avLst/>
@@ -9134,15 +9777,54 @@
               <a:buNone/>
             </a:pPr>
             <a:r>
+              <a:rPr lang="en-US" sz="950" b="1" spc="110" kern="0" dirty="0">
+                <a:solidFill>
+                  <a:srgbClr val="1F7A8C"/>
+                </a:solidFill>
+                <a:latin typeface="Calibri" pitchFamily="34" charset="0"/>
+                <a:ea typeface="Calibri" pitchFamily="34" charset="-122"/>
+                <a:cs typeface="Calibri" pitchFamily="34" charset="-120"/>
+              </a:rPr>
+              <a:t>DEMOSTRACIÓN</a:t>
+            </a:r>
+            <a:endParaRPr lang="en-US" sz="950" dirty="0"/>
+          </a:p>
+        </p:txBody>
+      </p:sp>
+      <p:sp>
+        <p:nvSpPr>
+          <p:cNvPr id="24" name="Text 22"/>
+          <p:cNvSpPr/>
+          <p:nvPr/>
+        </p:nvSpPr>
+        <p:spPr>
+          <a:xfrm>
+            <a:off x="1783080" y="5001768"/>
+            <a:ext cx="4114800" cy="329184"/>
+          </a:xfrm>
+          <a:prstGeom prst="rect">
+            <a:avLst/>
+          </a:prstGeom>
+          <a:noFill/>
+          <a:ln/>
+        </p:spPr>
+        <p:txBody>
+          <a:bodyPr wrap="square" lIns="0" tIns="0" rIns="0" bIns="0" rtlCol="0" anchor="ctr"/>
+          <a:lstStyle/>
+          <a:p>
+            <a:pPr indent="0" marL="0">
+              <a:buNone/>
+            </a:pPr>
+            <a:r>
               <a:rPr lang="en-US" sz="1600" b="1" dirty="0">
                 <a:solidFill>
-                  <a:srgbClr val="8FD3E0"/>
-                </a:solidFill>
-                <a:latin typeface="Calibri" pitchFamily="34" charset="0"/>
-                <a:ea typeface="Calibri" pitchFamily="34" charset="-122"/>
-                <a:cs typeface="Calibri" pitchFamily="34" charset="-120"/>
-              </a:rPr>
-              <a:t>El impacto está en el momento de la decisión</a:t>
+                  <a:srgbClr val="0B2E4F"/>
+                </a:solidFill>
+                <a:latin typeface="Calibri" pitchFamily="34" charset="0"/>
+                <a:ea typeface="Calibri" pitchFamily="34" charset="-122"/>
+                <a:cs typeface="Calibri" pitchFamily="34" charset="-120"/>
+              </a:rPr>
+              <a:t>Video del funcionamiento</a:t>
             </a:r>
             <a:endParaRPr lang="en-US" sz="1600" dirty="0"/>
           </a:p>
@@ -9150,14 +9832,14 @@
       </p:sp>
       <p:sp>
         <p:nvSpPr>
-          <p:cNvPr id="18" name="Text 16"/>
-          <p:cNvSpPr/>
-          <p:nvPr/>
-        </p:nvSpPr>
-        <p:spPr>
-          <a:xfrm>
-            <a:off x="1783080" y="5312664"/>
-            <a:ext cx="9509760" cy="658368"/>
+          <p:cNvPr id="25" name="Text 23"/>
+          <p:cNvSpPr/>
+          <p:nvPr/>
+        </p:nvSpPr>
+        <p:spPr>
+          <a:xfrm>
+            <a:off x="1783080" y="5349240"/>
+            <a:ext cx="4754880" cy="457200"/>
           </a:xfrm>
           <a:prstGeom prst="rect">
             <a:avLst/>
@@ -9171,28 +9853,133 @@
           <a:p>
             <a:pPr indent="0" marL="0">
               <a:lnSpc>
-                <a:spcPct val="114000"/>
+                <a:spcPct val="110000"/>
               </a:lnSpc>
               <a:buNone/>
             </a:pPr>
             <a:r>
-              <a:rPr lang="en-US" sz="1200" dirty="0">
-                <a:solidFill>
-                  <a:srgbClr val="D6E4EC"/>
-                </a:solidFill>
-                <a:latin typeface="Calibri" pitchFamily="34" charset="0"/>
-                <a:ea typeface="Calibri" pitchFamily="34" charset="-122"/>
-                <a:cs typeface="Calibri" pitchFamily="34" charset="-120"/>
-              </a:rPr>
-              <a:t>El valor de la propuesta es poner el conocimiento de seguridad al alcance de quien no lo tiene, exactamente cuando necesita decidir si hacer clic. Y cada caso analizado se transforma en capacitación para todo el equipo.</a:t>
-            </a:r>
-            <a:endParaRPr lang="en-US" sz="1200" dirty="0"/>
-          </a:p>
-        </p:txBody>
-      </p:sp>
-      <p:sp>
-        <p:nvSpPr>
-          <p:cNvPr id="19" name="Text 17"/>
+              <a:rPr lang="en-US" sz="1100" dirty="0">
+                <a:solidFill>
+                  <a:srgbClr val="26323E"/>
+                </a:solidFill>
+                <a:latin typeface="Calibri" pitchFamily="34" charset="0"/>
+                <a:ea typeface="Calibri" pitchFamily="34" charset="-122"/>
+                <a:cs typeface="Calibri" pitchFamily="34" charset="-120"/>
+              </a:rPr>
+              <a:t>Recorrido por la app: análisis de un correo legítimo y de uno fraudulento.</a:t>
+            </a:r>
+            <a:endParaRPr lang="en-US" sz="1100" dirty="0"/>
+          </a:p>
+        </p:txBody>
+      </p:sp>
+      <p:sp>
+        <p:nvSpPr>
+          <p:cNvPr id="26" name="Shape 24"/>
+          <p:cNvSpPr/>
+          <p:nvPr/>
+        </p:nvSpPr>
+        <p:spPr>
+          <a:xfrm>
+            <a:off x="6492240" y="5001768"/>
+            <a:ext cx="4754880" cy="457200"/>
+          </a:xfrm>
+          <a:prstGeom prst="roundRect">
+            <a:avLst>
+              <a:gd name="adj" fmla="val 16000"/>
+            </a:avLst>
+          </a:prstGeom>
+          <a:solidFill>
+            <a:srgbClr val="FFFFFF"/>
+          </a:solidFill>
+          <a:ln w="15875">
+            <a:solidFill>
+              <a:srgbClr val="1F7A8C"/>
+            </a:solidFill>
+            <a:prstDash val="solid"/>
+          </a:ln>
+        </p:spPr>
+      </p:sp>
+      <p:sp>
+        <p:nvSpPr>
+          <p:cNvPr id="27" name="Text 25"/>
+          <p:cNvSpPr/>
+          <p:nvPr/>
+        </p:nvSpPr>
+        <p:spPr>
+          <a:xfrm>
+            <a:off x="6583680" y="5001768"/>
+            <a:ext cx="4572000" cy="457200"/>
+          </a:xfrm>
+          <a:prstGeom prst="rect">
+            <a:avLst/>
+          </a:prstGeom>
+          <a:noFill/>
+          <a:ln/>
+        </p:spPr>
+        <p:txBody>
+          <a:bodyPr wrap="square" lIns="0" tIns="0" rIns="0" bIns="0" rtlCol="0" anchor="ctr"/>
+          <a:lstStyle/>
+          <a:p>
+            <a:pPr algn="ctr" indent="0" marL="0">
+              <a:buNone/>
+            </a:pPr>
+            <a:r>
+              <a:rPr lang="en-US" sz="1100" dirty="0">
+                <a:solidFill>
+                  <a:srgbClr val="1F7A8C"/>
+                </a:solidFill>
+                <a:latin typeface="Courier New" pitchFamily="34" charset="0"/>
+                <a:ea typeface="Courier New" pitchFamily="34" charset="-122"/>
+                <a:cs typeface="Courier New" pitchFamily="34" charset="-120"/>
+              </a:rPr>
+              <a:t>https://youtu.be/video</a:t>
+            </a:r>
+            <a:endParaRPr lang="en-US" sz="1100" dirty="0"/>
+          </a:p>
+        </p:txBody>
+      </p:sp>
+      <p:sp>
+        <p:nvSpPr>
+          <p:cNvPr id="28" name="Text 26"/>
+          <p:cNvSpPr/>
+          <p:nvPr/>
+        </p:nvSpPr>
+        <p:spPr>
+          <a:xfrm>
+            <a:off x="685800" y="6035040"/>
+            <a:ext cx="10789920" cy="274320"/>
+          </a:xfrm>
+          <a:prstGeom prst="rect">
+            <a:avLst/>
+          </a:prstGeom>
+          <a:noFill/>
+          <a:ln/>
+        </p:spPr>
+        <p:txBody>
+          <a:bodyPr wrap="square" lIns="0" tIns="0" rIns="0" bIns="0" rtlCol="0" anchor="ctr"/>
+          <a:lstStyle/>
+          <a:p>
+            <a:pPr indent="0" marL="0">
+              <a:buNone/>
+            </a:pPr>
+            <a:r>
+              <a:rPr lang="en-US" sz="1050" b="1" dirty="0">
+                <a:solidFill>
+                  <a:srgbClr val="D64545"/>
+                </a:solidFill>
+                <a:latin typeface="Calibri" pitchFamily="34" charset="0"/>
+                <a:ea typeface="Calibri" pitchFamily="34" charset="-122"/>
+                <a:cs typeface="Calibri" pitchFamily="34" charset="-120"/>
+              </a:rPr>
+              <a:t>Reemplazá las tres direcciones de arriba por los enlaces definitivos antes de entregar.</a:t>
+            </a:r>
+            <a:endParaRPr lang="en-US" sz="1050" dirty="0"/>
+          </a:p>
+        </p:txBody>
+      </p:sp>
+      <p:sp>
+        <p:nvSpPr>
+          <p:cNvPr id="29" name="Text 27"/>
           <p:cNvSpPr/>
           <p:nvPr/>
         </p:nvSpPr>
@@ -9217,7 +10004,7 @@
             <a:r>
               <a:rPr lang="en-US" sz="900" b="1" dirty="0">
                 <a:solidFill>
-                  <a:srgbClr val="7E9BB0"/>
+                  <a:srgbClr val="6B7C8C"/>
                 </a:solidFill>
                 <a:latin typeface="Calibri" pitchFamily="34" charset="0"/>
                 <a:ea typeface="Calibri" pitchFamily="34" charset="-122"/>
@@ -9231,7 +10018,7 @@
             <a:r>
               <a:rPr lang="en-US" sz="900" dirty="0">
                 <a:solidFill>
-                  <a:srgbClr val="7E9BB0"/>
+                  <a:srgbClr val="6B7C8C"/>
                 </a:solidFill>
                 <a:latin typeface="Calibri" pitchFamily="34" charset="0"/>
                 <a:ea typeface="Calibri" pitchFamily="34" charset="-122"/>
@@ -9245,7 +10032,7 @@
       </p:sp>
       <p:sp>
         <p:nvSpPr>
-          <p:cNvPr id="20" name="Text 18"/>
+          <p:cNvPr id="30" name="Text 28"/>
           <p:cNvSpPr/>
           <p:nvPr/>
         </p:nvSpPr>
@@ -9270,7 +10057,7 @@
             <a:r>
               <a:rPr lang="en-US" sz="900" dirty="0">
                 <a:solidFill>
-                  <a:srgbClr val="7E9BB0"/>
+                  <a:srgbClr val="6B7C8C"/>
                 </a:solidFill>
                 <a:latin typeface="Calibri" pitchFamily="34" charset="0"/>
                 <a:ea typeface="Calibri" pitchFamily="34" charset="-122"/>
@@ -9322,6 +10109,724 @@
         </p:nvSpPr>
         <p:spPr>
           <a:xfrm>
+            <a:off x="685800" y="411480"/>
+            <a:ext cx="10820095" cy="731520"/>
+          </a:xfrm>
+          <a:prstGeom prst="rect">
+            <a:avLst/>
+          </a:prstGeom>
+          <a:noFill/>
+          <a:ln/>
+        </p:spPr>
+        <p:txBody>
+          <a:bodyPr wrap="square" lIns="0" tIns="0" rIns="0" bIns="0" rtlCol="0" anchor="ctr"/>
+          <a:lstStyle/>
+          <a:p>
+            <a:pPr algn="l" indent="0" marL="0">
+              <a:buNone/>
+            </a:pPr>
+            <a:r>
+              <a:rPr lang="en-US" sz="3600" b="1" dirty="0">
+                <a:solidFill>
+                  <a:srgbClr val="FFFFFF"/>
+                </a:solidFill>
+                <a:latin typeface="Calibri" pitchFamily="34" charset="0"/>
+                <a:ea typeface="Calibri" pitchFamily="34" charset="-122"/>
+                <a:cs typeface="Calibri" pitchFamily="34" charset="-120"/>
+              </a:rPr>
+              <a:t>Conclusiones</a:t>
+            </a:r>
+            <a:endParaRPr lang="en-US" sz="3600" dirty="0"/>
+          </a:p>
+        </p:txBody>
+      </p:sp>
+      <p:sp>
+        <p:nvSpPr>
+          <p:cNvPr id="3" name="Text 1"/>
+          <p:cNvSpPr/>
+          <p:nvPr/>
+        </p:nvSpPr>
+        <p:spPr>
+          <a:xfrm>
+            <a:off x="685800" y="1133856"/>
+            <a:ext cx="10058400" cy="502920"/>
+          </a:xfrm>
+          <a:prstGeom prst="rect">
+            <a:avLst/>
+          </a:prstGeom>
+          <a:noFill/>
+          <a:ln/>
+        </p:spPr>
+        <p:txBody>
+          <a:bodyPr wrap="square" lIns="0" tIns="0" rIns="0" bIns="0" rtlCol="0" anchor="t"/>
+          <a:lstStyle/>
+          <a:p>
+            <a:pPr algn="l" indent="0" marL="0">
+              <a:buNone/>
+            </a:pPr>
+            <a:r>
+              <a:rPr lang="en-US" sz="1500" dirty="0">
+                <a:solidFill>
+                  <a:srgbClr val="8FD3E0"/>
+                </a:solidFill>
+                <a:latin typeface="Calibri" pitchFamily="34" charset="0"/>
+                <a:ea typeface="Calibri" pitchFamily="34" charset="-122"/>
+                <a:cs typeface="Calibri" pitchFamily="34" charset="-120"/>
+              </a:rPr>
+              <a:t>Sobre la importancia de la propuesta y el impacto esperado.</a:t>
+            </a:r>
+            <a:endParaRPr lang="en-US" sz="1500" dirty="0"/>
+          </a:p>
+        </p:txBody>
+      </p:sp>
+      <p:sp>
+        <p:nvSpPr>
+          <p:cNvPr id="4" name="Shape 2"/>
+          <p:cNvSpPr/>
+          <p:nvPr/>
+        </p:nvSpPr>
+        <p:spPr>
+          <a:xfrm>
+            <a:off x="685800" y="1965960"/>
+            <a:ext cx="10820095" cy="1261872"/>
+          </a:xfrm>
+          <a:prstGeom prst="roundRect">
+            <a:avLst>
+              <a:gd name="adj" fmla="val 6522"/>
+            </a:avLst>
+          </a:prstGeom>
+          <a:solidFill>
+            <a:srgbClr val="10395C"/>
+          </a:solidFill>
+          <a:ln w="12700">
+            <a:solidFill>
+              <a:srgbClr val="1B4B72"/>
+            </a:solidFill>
+            <a:prstDash val="solid"/>
+          </a:ln>
+        </p:spPr>
+      </p:sp>
+      <p:sp>
+        <p:nvSpPr>
+          <p:cNvPr id="5" name="Shape 3"/>
+          <p:cNvSpPr/>
+          <p:nvPr/>
+        </p:nvSpPr>
+        <p:spPr>
+          <a:xfrm>
+            <a:off x="1005840" y="2331720"/>
+            <a:ext cx="530352" cy="530352"/>
+          </a:xfrm>
+          <a:prstGeom prst="ellipse">
+            <a:avLst/>
+          </a:prstGeom>
+          <a:solidFill>
+            <a:srgbClr val="1F7A8C"/>
+          </a:solidFill>
+          <a:ln w="12700">
+            <a:solidFill>
+              <a:srgbClr val="1F7A8C"/>
+            </a:solidFill>
+            <a:prstDash val="solid"/>
+          </a:ln>
+        </p:spPr>
+      </p:sp>
+      <p:sp>
+        <p:nvSpPr>
+          <p:cNvPr id="6" name="Text 4"/>
+          <p:cNvSpPr/>
+          <p:nvPr/>
+        </p:nvSpPr>
+        <p:spPr>
+          <a:xfrm>
+            <a:off x="1005840" y="2331720"/>
+            <a:ext cx="530352" cy="530352"/>
+          </a:xfrm>
+          <a:prstGeom prst="rect">
+            <a:avLst/>
+          </a:prstGeom>
+          <a:noFill/>
+          <a:ln/>
+        </p:spPr>
+        <p:txBody>
+          <a:bodyPr wrap="square" lIns="0" tIns="0" rIns="0" bIns="0" rtlCol="0" anchor="ctr"/>
+          <a:lstStyle/>
+          <a:p>
+            <a:pPr algn="ctr" indent="0" marL="0">
+              <a:buNone/>
+            </a:pPr>
+            <a:r>
+              <a:rPr lang="en-US" sz="1800" b="1" dirty="0">
+                <a:solidFill>
+                  <a:srgbClr val="FFFFFF"/>
+                </a:solidFill>
+                <a:latin typeface="Calibri" pitchFamily="34" charset="0"/>
+                <a:ea typeface="Calibri" pitchFamily="34" charset="-122"/>
+                <a:cs typeface="Calibri" pitchFamily="34" charset="-120"/>
+              </a:rPr>
+              <a:t>1</a:t>
+            </a:r>
+            <a:endParaRPr lang="en-US" sz="1800" dirty="0"/>
+          </a:p>
+        </p:txBody>
+      </p:sp>
+      <p:sp>
+        <p:nvSpPr>
+          <p:cNvPr id="7" name="Text 5"/>
+          <p:cNvSpPr/>
+          <p:nvPr/>
+        </p:nvSpPr>
+        <p:spPr>
+          <a:xfrm>
+            <a:off x="1783080" y="2130552"/>
+            <a:ext cx="9509760" cy="329184"/>
+          </a:xfrm>
+          <a:prstGeom prst="rect">
+            <a:avLst/>
+          </a:prstGeom>
+          <a:noFill/>
+          <a:ln/>
+        </p:spPr>
+        <p:txBody>
+          <a:bodyPr wrap="square" lIns="0" tIns="0" rIns="0" bIns="0" rtlCol="0" anchor="ctr"/>
+          <a:lstStyle/>
+          <a:p>
+            <a:pPr indent="0" marL="0">
+              <a:buNone/>
+            </a:pPr>
+            <a:r>
+              <a:rPr lang="en-US" sz="1600" b="1" dirty="0">
+                <a:solidFill>
+                  <a:srgbClr val="8FD3E0"/>
+                </a:solidFill>
+                <a:latin typeface="Calibri" pitchFamily="34" charset="0"/>
+                <a:ea typeface="Calibri" pitchFamily="34" charset="-122"/>
+                <a:cs typeface="Calibri" pitchFamily="34" charset="-120"/>
+              </a:rPr>
+              <a:t>Un problema real, con una solución concreta</a:t>
+            </a:r>
+            <a:endParaRPr lang="en-US" sz="1600" dirty="0"/>
+          </a:p>
+        </p:txBody>
+      </p:sp>
+      <p:sp>
+        <p:nvSpPr>
+          <p:cNvPr id="8" name="Text 6"/>
+          <p:cNvSpPr/>
+          <p:nvPr/>
+        </p:nvSpPr>
+        <p:spPr>
+          <a:xfrm>
+            <a:off x="1783080" y="2478024"/>
+            <a:ext cx="9509760" cy="658368"/>
+          </a:xfrm>
+          <a:prstGeom prst="rect">
+            <a:avLst/>
+          </a:prstGeom>
+          <a:noFill/>
+          <a:ln/>
+        </p:spPr>
+        <p:txBody>
+          <a:bodyPr wrap="square" lIns="0" tIns="0" rIns="0" bIns="0" rtlCol="0" anchor="t"/>
+          <a:lstStyle/>
+          <a:p>
+            <a:pPr indent="0" marL="0">
+              <a:lnSpc>
+                <a:spcPct val="114000"/>
+              </a:lnSpc>
+              <a:buNone/>
+            </a:pPr>
+            <a:r>
+              <a:rPr lang="en-US" sz="1200" dirty="0">
+                <a:solidFill>
+                  <a:srgbClr val="D6E4EC"/>
+                </a:solidFill>
+                <a:latin typeface="Calibri" pitchFamily="34" charset="0"/>
+                <a:ea typeface="Calibri" pitchFamily="34" charset="-122"/>
+                <a:cs typeface="Calibri" pitchFamily="34" charset="-120"/>
+              </a:rPr>
+              <a:t>GuardIA aborda un problema frecuente y costoso con una herramienta simple, técnicamente realizable y de costo operativo cero: cualquier PyME puede usarla sin presupuesto ni equipo de seguridad.</a:t>
+            </a:r>
+            <a:endParaRPr lang="en-US" sz="1200" dirty="0"/>
+          </a:p>
+        </p:txBody>
+      </p:sp>
+      <p:sp>
+        <p:nvSpPr>
+          <p:cNvPr id="9" name="Shape 7"/>
+          <p:cNvSpPr/>
+          <p:nvPr/>
+        </p:nvSpPr>
+        <p:spPr>
+          <a:xfrm>
+            <a:off x="685800" y="3383280"/>
+            <a:ext cx="10820095" cy="1261872"/>
+          </a:xfrm>
+          <a:prstGeom prst="roundRect">
+            <a:avLst>
+              <a:gd name="adj" fmla="val 6522"/>
+            </a:avLst>
+          </a:prstGeom>
+          <a:solidFill>
+            <a:srgbClr val="10395C"/>
+          </a:solidFill>
+          <a:ln w="12700">
+            <a:solidFill>
+              <a:srgbClr val="1B4B72"/>
+            </a:solidFill>
+            <a:prstDash val="solid"/>
+          </a:ln>
+        </p:spPr>
+      </p:sp>
+      <p:sp>
+        <p:nvSpPr>
+          <p:cNvPr id="10" name="Shape 8"/>
+          <p:cNvSpPr/>
+          <p:nvPr/>
+        </p:nvSpPr>
+        <p:spPr>
+          <a:xfrm>
+            <a:off x="1005840" y="3749040"/>
+            <a:ext cx="530352" cy="530352"/>
+          </a:xfrm>
+          <a:prstGeom prst="ellipse">
+            <a:avLst/>
+          </a:prstGeom>
+          <a:solidFill>
+            <a:srgbClr val="1F7A8C"/>
+          </a:solidFill>
+          <a:ln w="12700">
+            <a:solidFill>
+              <a:srgbClr val="1F7A8C"/>
+            </a:solidFill>
+            <a:prstDash val="solid"/>
+          </a:ln>
+        </p:spPr>
+      </p:sp>
+      <p:sp>
+        <p:nvSpPr>
+          <p:cNvPr id="11" name="Text 9"/>
+          <p:cNvSpPr/>
+          <p:nvPr/>
+        </p:nvSpPr>
+        <p:spPr>
+          <a:xfrm>
+            <a:off x="1005840" y="3749040"/>
+            <a:ext cx="530352" cy="530352"/>
+          </a:xfrm>
+          <a:prstGeom prst="rect">
+            <a:avLst/>
+          </a:prstGeom>
+          <a:noFill/>
+          <a:ln/>
+        </p:spPr>
+        <p:txBody>
+          <a:bodyPr wrap="square" lIns="0" tIns="0" rIns="0" bIns="0" rtlCol="0" anchor="ctr"/>
+          <a:lstStyle/>
+          <a:p>
+            <a:pPr algn="ctr" indent="0" marL="0">
+              <a:buNone/>
+            </a:pPr>
+            <a:r>
+              <a:rPr lang="en-US" sz="1800" b="1" dirty="0">
+                <a:solidFill>
+                  <a:srgbClr val="FFFFFF"/>
+                </a:solidFill>
+                <a:latin typeface="Calibri" pitchFamily="34" charset="0"/>
+                <a:ea typeface="Calibri" pitchFamily="34" charset="-122"/>
+                <a:cs typeface="Calibri" pitchFamily="34" charset="-120"/>
+              </a:rPr>
+              <a:t>2</a:t>
+            </a:r>
+            <a:endParaRPr lang="en-US" sz="1800" dirty="0"/>
+          </a:p>
+        </p:txBody>
+      </p:sp>
+      <p:sp>
+        <p:nvSpPr>
+          <p:cNvPr id="12" name="Text 10"/>
+          <p:cNvSpPr/>
+          <p:nvPr/>
+        </p:nvSpPr>
+        <p:spPr>
+          <a:xfrm>
+            <a:off x="1783080" y="3547872"/>
+            <a:ext cx="9509760" cy="329184"/>
+          </a:xfrm>
+          <a:prstGeom prst="rect">
+            <a:avLst/>
+          </a:prstGeom>
+          <a:noFill/>
+          <a:ln/>
+        </p:spPr>
+        <p:txBody>
+          <a:bodyPr wrap="square" lIns="0" tIns="0" rIns="0" bIns="0" rtlCol="0" anchor="ctr"/>
+          <a:lstStyle/>
+          <a:p>
+            <a:pPr indent="0" marL="0">
+              <a:buNone/>
+            </a:pPr>
+            <a:r>
+              <a:rPr lang="en-US" sz="1600" b="1" dirty="0">
+                <a:solidFill>
+                  <a:srgbClr val="8FD3E0"/>
+                </a:solidFill>
+                <a:latin typeface="Calibri" pitchFamily="34" charset="0"/>
+                <a:ea typeface="Calibri" pitchFamily="34" charset="-122"/>
+                <a:cs typeface="Calibri" pitchFamily="34" charset="-120"/>
+              </a:rPr>
+              <a:t>La IA aplicada donde realmente aporta</a:t>
+            </a:r>
+            <a:endParaRPr lang="en-US" sz="1600" dirty="0"/>
+          </a:p>
+        </p:txBody>
+      </p:sp>
+      <p:sp>
+        <p:nvSpPr>
+          <p:cNvPr id="13" name="Text 11"/>
+          <p:cNvSpPr/>
+          <p:nvPr/>
+        </p:nvSpPr>
+        <p:spPr>
+          <a:xfrm>
+            <a:off x="1783080" y="3895344"/>
+            <a:ext cx="9509760" cy="658368"/>
+          </a:xfrm>
+          <a:prstGeom prst="rect">
+            <a:avLst/>
+          </a:prstGeom>
+          <a:noFill/>
+          <a:ln/>
+        </p:spPr>
+        <p:txBody>
+          <a:bodyPr wrap="square" lIns="0" tIns="0" rIns="0" bIns="0" rtlCol="0" anchor="t"/>
+          <a:lstStyle/>
+          <a:p>
+            <a:pPr indent="0" marL="0">
+              <a:lnSpc>
+                <a:spcPct val="114000"/>
+              </a:lnSpc>
+              <a:buNone/>
+            </a:pPr>
+            <a:r>
+              <a:rPr lang="en-US" sz="1200" dirty="0">
+                <a:solidFill>
+                  <a:srgbClr val="D6E4EC"/>
+                </a:solidFill>
+                <a:latin typeface="Calibri" pitchFamily="34" charset="0"/>
+                <a:ea typeface="Calibri" pitchFamily="34" charset="-122"/>
+                <a:cs typeface="Calibri" pitchFamily="34" charset="-120"/>
+              </a:rPr>
+              <a:t>Decidir si un correo es confiable combina lenguaje, contexto y criterio: exactamente donde un modelo de lenguaje suma. Y la salida dirigida es lo que convierte una respuesta de chat en una funcionalidad confiable.</a:t>
+            </a:r>
+            <a:endParaRPr lang="en-US" sz="1200" dirty="0"/>
+          </a:p>
+        </p:txBody>
+      </p:sp>
+      <p:sp>
+        <p:nvSpPr>
+          <p:cNvPr id="14" name="Shape 12"/>
+          <p:cNvSpPr/>
+          <p:nvPr/>
+        </p:nvSpPr>
+        <p:spPr>
+          <a:xfrm>
+            <a:off x="685800" y="4800600"/>
+            <a:ext cx="10820095" cy="1261872"/>
+          </a:xfrm>
+          <a:prstGeom prst="roundRect">
+            <a:avLst>
+              <a:gd name="adj" fmla="val 6522"/>
+            </a:avLst>
+          </a:prstGeom>
+          <a:solidFill>
+            <a:srgbClr val="10395C"/>
+          </a:solidFill>
+          <a:ln w="12700">
+            <a:solidFill>
+              <a:srgbClr val="1B4B72"/>
+            </a:solidFill>
+            <a:prstDash val="solid"/>
+          </a:ln>
+        </p:spPr>
+      </p:sp>
+      <p:sp>
+        <p:nvSpPr>
+          <p:cNvPr id="15" name="Shape 13"/>
+          <p:cNvSpPr/>
+          <p:nvPr/>
+        </p:nvSpPr>
+        <p:spPr>
+          <a:xfrm>
+            <a:off x="1005840" y="5166360"/>
+            <a:ext cx="530352" cy="530352"/>
+          </a:xfrm>
+          <a:prstGeom prst="ellipse">
+            <a:avLst/>
+          </a:prstGeom>
+          <a:solidFill>
+            <a:srgbClr val="1F7A8C"/>
+          </a:solidFill>
+          <a:ln w="12700">
+            <a:solidFill>
+              <a:srgbClr val="1F7A8C"/>
+            </a:solidFill>
+            <a:prstDash val="solid"/>
+          </a:ln>
+        </p:spPr>
+      </p:sp>
+      <p:sp>
+        <p:nvSpPr>
+          <p:cNvPr id="16" name="Text 14"/>
+          <p:cNvSpPr/>
+          <p:nvPr/>
+        </p:nvSpPr>
+        <p:spPr>
+          <a:xfrm>
+            <a:off x="1005840" y="5166360"/>
+            <a:ext cx="530352" cy="530352"/>
+          </a:xfrm>
+          <a:prstGeom prst="rect">
+            <a:avLst/>
+          </a:prstGeom>
+          <a:noFill/>
+          <a:ln/>
+        </p:spPr>
+        <p:txBody>
+          <a:bodyPr wrap="square" lIns="0" tIns="0" rIns="0" bIns="0" rtlCol="0" anchor="ctr"/>
+          <a:lstStyle/>
+          <a:p>
+            <a:pPr algn="ctr" indent="0" marL="0">
+              <a:buNone/>
+            </a:pPr>
+            <a:r>
+              <a:rPr lang="en-US" sz="1800" b="1" dirty="0">
+                <a:solidFill>
+                  <a:srgbClr val="FFFFFF"/>
+                </a:solidFill>
+                <a:latin typeface="Calibri" pitchFamily="34" charset="0"/>
+                <a:ea typeface="Calibri" pitchFamily="34" charset="-122"/>
+                <a:cs typeface="Calibri" pitchFamily="34" charset="-120"/>
+              </a:rPr>
+              <a:t>3</a:t>
+            </a:r>
+            <a:endParaRPr lang="en-US" sz="1800" dirty="0"/>
+          </a:p>
+        </p:txBody>
+      </p:sp>
+      <p:sp>
+        <p:nvSpPr>
+          <p:cNvPr id="17" name="Text 15"/>
+          <p:cNvSpPr/>
+          <p:nvPr/>
+        </p:nvSpPr>
+        <p:spPr>
+          <a:xfrm>
+            <a:off x="1783080" y="4965192"/>
+            <a:ext cx="9509760" cy="329184"/>
+          </a:xfrm>
+          <a:prstGeom prst="rect">
+            <a:avLst/>
+          </a:prstGeom>
+          <a:noFill/>
+          <a:ln/>
+        </p:spPr>
+        <p:txBody>
+          <a:bodyPr wrap="square" lIns="0" tIns="0" rIns="0" bIns="0" rtlCol="0" anchor="ctr"/>
+          <a:lstStyle/>
+          <a:p>
+            <a:pPr indent="0" marL="0">
+              <a:buNone/>
+            </a:pPr>
+            <a:r>
+              <a:rPr lang="en-US" sz="1600" b="1" dirty="0">
+                <a:solidFill>
+                  <a:srgbClr val="8FD3E0"/>
+                </a:solidFill>
+                <a:latin typeface="Calibri" pitchFamily="34" charset="0"/>
+                <a:ea typeface="Calibri" pitchFamily="34" charset="-122"/>
+                <a:cs typeface="Calibri" pitchFamily="34" charset="-120"/>
+              </a:rPr>
+              <a:t>El impacto está en el momento de la decisión</a:t>
+            </a:r>
+            <a:endParaRPr lang="en-US" sz="1600" dirty="0"/>
+          </a:p>
+        </p:txBody>
+      </p:sp>
+      <p:sp>
+        <p:nvSpPr>
+          <p:cNvPr id="18" name="Text 16"/>
+          <p:cNvSpPr/>
+          <p:nvPr/>
+        </p:nvSpPr>
+        <p:spPr>
+          <a:xfrm>
+            <a:off x="1783080" y="5312664"/>
+            <a:ext cx="9509760" cy="658368"/>
+          </a:xfrm>
+          <a:prstGeom prst="rect">
+            <a:avLst/>
+          </a:prstGeom>
+          <a:noFill/>
+          <a:ln/>
+        </p:spPr>
+        <p:txBody>
+          <a:bodyPr wrap="square" lIns="0" tIns="0" rIns="0" bIns="0" rtlCol="0" anchor="t"/>
+          <a:lstStyle/>
+          <a:p>
+            <a:pPr indent="0" marL="0">
+              <a:lnSpc>
+                <a:spcPct val="114000"/>
+              </a:lnSpc>
+              <a:buNone/>
+            </a:pPr>
+            <a:r>
+              <a:rPr lang="en-US" sz="1200" dirty="0">
+                <a:solidFill>
+                  <a:srgbClr val="D6E4EC"/>
+                </a:solidFill>
+                <a:latin typeface="Calibri" pitchFamily="34" charset="0"/>
+                <a:ea typeface="Calibri" pitchFamily="34" charset="-122"/>
+                <a:cs typeface="Calibri" pitchFamily="34" charset="-120"/>
+              </a:rPr>
+              <a:t>El valor de la propuesta es poner el conocimiento de seguridad al alcance de quien no lo tiene, exactamente cuando necesita decidir si hacer clic. Y al no tener costo de operación, esa ayuda llega también a las empresas que hoy no pueden pagar por seguridad.</a:t>
+            </a:r>
+            <a:endParaRPr lang="en-US" sz="1200" dirty="0"/>
+          </a:p>
+        </p:txBody>
+      </p:sp>
+      <p:sp>
+        <p:nvSpPr>
+          <p:cNvPr id="19" name="Text 17"/>
+          <p:cNvSpPr/>
+          <p:nvPr/>
+        </p:nvSpPr>
+        <p:spPr>
+          <a:xfrm>
+            <a:off x="685800" y="6355080"/>
+            <a:ext cx="10271455" cy="274320"/>
+          </a:xfrm>
+          <a:prstGeom prst="rect">
+            <a:avLst/>
+          </a:prstGeom>
+          <a:noFill/>
+          <a:ln/>
+        </p:spPr>
+        <p:txBody>
+          <a:bodyPr wrap="square" lIns="0" tIns="0" rIns="0" bIns="0" rtlCol="0" anchor="ctr"/>
+          <a:lstStyle/>
+          <a:p>
+            <a:pPr indent="0" marL="0">
+              <a:buNone/>
+            </a:pPr>
+            <a:r>
+              <a:rPr lang="en-US" sz="900" b="1" dirty="0">
+                <a:solidFill>
+                  <a:srgbClr val="7E9BB0"/>
+                </a:solidFill>
+                <a:latin typeface="Calibri" pitchFamily="34" charset="0"/>
+                <a:ea typeface="Calibri" pitchFamily="34" charset="-122"/>
+                <a:cs typeface="Calibri" pitchFamily="34" charset="-120"/>
+              </a:rPr>
+              <a:t>GuardIA</a:t>
+            </a:r>
+            <a:pPr indent="0" marL="0">
+              <a:buNone/>
+            </a:pPr>
+            <a:r>
+              <a:rPr lang="en-US" sz="900" dirty="0">
+                <a:solidFill>
+                  <a:srgbClr val="7E9BB0"/>
+                </a:solidFill>
+                <a:latin typeface="Calibri" pitchFamily="34" charset="0"/>
+                <a:ea typeface="Calibri" pitchFamily="34" charset="-122"/>
+                <a:cs typeface="Calibri" pitchFamily="34" charset="-120"/>
+              </a:rPr>
+              <a:t>  ·  Proyecto Final — Prompt Engineering para Programadores · CoderHouse</a:t>
+            </a:r>
+            <a:endParaRPr lang="en-US" sz="900" dirty="0"/>
+          </a:p>
+        </p:txBody>
+      </p:sp>
+      <p:sp>
+        <p:nvSpPr>
+          <p:cNvPr id="20" name="Text 18"/>
+          <p:cNvSpPr/>
+          <p:nvPr/>
+        </p:nvSpPr>
+        <p:spPr>
+          <a:xfrm>
+            <a:off x="11048695" y="6355080"/>
+            <a:ext cx="457200" cy="274320"/>
+          </a:xfrm>
+          <a:prstGeom prst="rect">
+            <a:avLst/>
+          </a:prstGeom>
+          <a:noFill/>
+          <a:ln/>
+        </p:spPr>
+        <p:txBody>
+          <a:bodyPr wrap="square" lIns="0" tIns="0" rIns="0" bIns="0" rtlCol="0" anchor="ctr"/>
+          <a:lstStyle/>
+          <a:p>
+            <a:pPr algn="r" indent="0" marL="0">
+              <a:buNone/>
+            </a:pPr>
+            <a:r>
+              <a:rPr lang="en-US" sz="900" dirty="0">
+                <a:solidFill>
+                  <a:srgbClr val="7E9BB0"/>
+                </a:solidFill>
+                <a:latin typeface="Calibri" pitchFamily="34" charset="0"/>
+                <a:ea typeface="Calibri" pitchFamily="34" charset="-122"/>
+                <a:cs typeface="Calibri" pitchFamily="34" charset="-120"/>
+              </a:rPr>
+              <a:t>16</a:t>
+            </a:r>
+            <a:endParaRPr lang="en-US" sz="900" dirty="0"/>
+          </a:p>
+        </p:txBody>
+      </p:sp>
+    </p:spTree>
+  </p:cSld>
+  <p:clrMapOvr>
+    <a:masterClrMapping/>
+  </p:clrMapOvr>
+</p:sld>
+</file>
+
+<file path=ppt/slides/slide17.xml><?xml version="1.0" encoding="utf-8"?>
+<p:sld xmlns:a="http://schemas.openxmlformats.org/drawingml/2006/main" xmlns:r="http://schemas.openxmlformats.org/officeDocument/2006/relationships" xmlns:p="http://schemas.openxmlformats.org/presentationml/2006/main">
+  <p:cSld name="Slide 17">
+    <p:bg>
+      <p:bgPr>
+        <a:solidFill>
+          <a:srgbClr val="0B2E4F"/>
+        </a:solidFill>
+      </p:bgPr>
+    </p:bg>
+    <p:spTree>
+      <p:nvGrpSpPr>
+        <p:cNvPr id="1" name=""/>
+        <p:cNvGrpSpPr/>
+        <p:nvPr/>
+      </p:nvGrpSpPr>
+      <p:grpSpPr>
+        <a:xfrm>
+          <a:off x="0" y="0"/>
+          <a:ext cx="0" cy="0"/>
+          <a:chOff x="0" y="0"/>
+          <a:chExt cx="0" cy="0"/>
+        </a:xfrm>
+      </p:grpSpPr>
+      <p:sp>
+        <p:nvSpPr>
+          <p:cNvPr id="2" name="Text 0"/>
+          <p:cNvSpPr/>
+          <p:nvPr/>
+        </p:nvSpPr>
+        <p:spPr>
+          <a:xfrm>
             <a:off x="0" y="2286000"/>
             <a:ext cx="12191695" cy="1280160"/>
           </a:xfrm>
@@ -13065,7 +14570,7 @@
                 <a:ea typeface="Calibri" pitchFamily="34" charset="-122"/>
                 <a:cs typeface="Calibri" pitchFamily="34" charset="-120"/>
               </a:rPr>
-              <a:t>GPT-4o mini con salida dirigida</a:t>
+              <a:t>Gemini 2.5 Flash con salida dirigida</a:t>
             </a:r>
             <a:endParaRPr lang="en-US" sz="1900" dirty="0"/>
           </a:p>
@@ -13107,7 +14612,7 @@
                 <a:ea typeface="Calibri" pitchFamily="34" charset="-122"/>
                 <a:cs typeface="Calibri" pitchFamily="34" charset="-120"/>
               </a:rPr>
-              <a:t>El texto se envía con un prompt que asigna el rol de analista de ciberseguridad; la respuesta se valida contra un esquema JSON.</a:t>
+              <a:t>El texto se envía con un prompt que asigna el rol de analista de ciberseguridad, y la API garantiza que la respuesta cumpla un esquema fijo.</a:t>
             </a:r>
             <a:endParaRPr lang="en-US" sz="1150" dirty="0"/>
           </a:p>

--- a/docs/GuardIA-ProyectoFinal-IdoyagaMolina.pptx
+++ b/docs/GuardIA-ProyectoFinal-IdoyagaMolina.pptx
@@ -9655,7 +9655,7 @@
                 <a:ea typeface="Courier New" pitchFamily="34" charset="-122"/>
                 <a:cs typeface="Courier New" pitchFamily="34" charset="-120"/>
               </a:rPr>
-              <a:t>https://github.com/usuario/guardia</a:t>
+              <a:t>https://github.com/cubi20/guardia</a:t>
             </a:r>
             <a:endParaRPr lang="en-US" sz="1100" dirty="0"/>
           </a:p>
@@ -9971,7 +9971,7 @@
                 <a:ea typeface="Calibri" pitchFamily="34" charset="-122"/>
                 <a:cs typeface="Calibri" pitchFamily="34" charset="-120"/>
               </a:rPr>
-              <a:t>Reemplazá las tres direcciones de arriba por los enlaces definitivos antes de entregar.</a:t>
+              <a:t>Falta reemplazar el enlace de Streamlit y el del video por los definitivos.</a:t>
             </a:r>
             <a:endParaRPr lang="en-US" sz="1050" dirty="0"/>
           </a:p>

--- a/docs/GuardIA-ProyectoFinal-IdoyagaMolina.pptx
+++ b/docs/GuardIA-ProyectoFinal-IdoyagaMolina.pptx
@@ -1750,7 +1750,7 @@
           <a:p>
             <a:r>
               <a:rPr lang="en-US" dirty="0"/>
-              <a:t>Captura de la aplicación. Incluye ejemplos cargados para que cualquiera pueda probarla sin tener un correo sospechoso a mano.</a:t>
+              <a:t>La captura de la derecha es un análisis real, no una maqueta. El selector de ejemplos permite probar la app sin tener un correo sospechoso a mano.</a:t>
             </a:r>
             <a:endParaRPr lang="en-US" dirty="0"/>
           </a:p>
@@ -5422,7 +5422,7 @@
                 <a:ea typeface="Calibri" pitchFamily="34" charset="-122"/>
                 <a:cs typeface="Calibri" pitchFamily="34" charset="-120"/>
               </a:rPr>
-              <a:t>Costo cero como parte de la propuesta</a:t>
+              <a:t>Cascada de cuatro modelos</a:t>
             </a:r>
             <a:endParaRPr lang="en-US" sz="1450" dirty="0"/>
           </a:p>
@@ -5464,7 +5464,7 @@
                 <a:ea typeface="Calibri" pitchFamily="34" charset="-122"/>
                 <a:cs typeface="Calibri" pitchFamily="34" charset="-120"/>
               </a:rPr>
-              <a:t>Si la herramienta apunta a PyMEs sin presupuesto de seguridad, que su operación no cueste nada no es un detalle: es parte del argumento.</a:t>
+              <a:t>El cupo gratuito es por modelo, así que usar varios en cascada lo multiplica y además cubre las caídas por sobrecarga del servicio.</a:t>
             </a:r>
             <a:endParaRPr lang="en-US" sz="1050" dirty="0"/>
           </a:p>
@@ -6535,7 +6535,7 @@
                 <a:ea typeface="Calibri" pitchFamily="34" charset="-122"/>
                 <a:cs typeface="Calibri" pitchFamily="34" charset="-120"/>
               </a:rPr>
-              <a:t>Sin tarjeta</a:t>
+              <a:t>~80 por día</a:t>
             </a:r>
             <a:endParaRPr lang="en-US" sz="3200" dirty="0"/>
           </a:p>
@@ -6574,7 +6574,7 @@
                 <a:ea typeface="Calibri" pitchFamily="34" charset="-122"/>
                 <a:cs typeface="Calibri" pitchFamily="34" charset="-120"/>
               </a:rPr>
-              <a:t>no hace falta medio de pago para producción</a:t>
+              <a:t>consultas gratuitas: 20 por modelo, con 4 en cascada</a:t>
             </a:r>
             <a:endParaRPr lang="en-US" sz="1200" dirty="0"/>
           </a:p>
@@ -6613,7 +6613,7 @@
                 <a:ea typeface="Calibri" pitchFamily="34" charset="-122"/>
                 <a:cs typeface="Calibri" pitchFamily="34" charset="-120"/>
               </a:rPr>
-              <a:t>Como referencia de escalabilidad, cada análisis consume unos 1.500 tokens de entrada y 500 de salida. Esto costaría en el nivel pago:</a:t>
+              <a:t>Medido sobre los cinco correos de ejemplo, cada análisis consume unos 1.250 tokens. Esto costaría en el nivel pago:</a:t>
             </a:r>
             <a:endParaRPr lang="en-US" sz="1200" dirty="0"/>
           </a:p>
@@ -6870,7 +6870,7 @@
                           <a:ea typeface="Calibri" pitchFamily="34" charset="-122"/>
                           <a:cs typeface="Calibri" pitchFamily="34" charset="-120"/>
                         </a:rPr>
-                        <a:t>Un análisis (gemini-2.5-flash)</a:t>
+                        <a:t>Un análisis (familia Flash de Gemini)</a:t>
                       </a:r>
                       <a:endParaRPr lang="en-US" sz="1150" dirty="0">
                         <a:latin typeface="Calibri" charset="0"/>
@@ -7006,7 +7006,7 @@
                           <a:ea typeface="Calibri" pitchFamily="34" charset="-122"/>
                           <a:cs typeface="Calibri" pitchFamily="34" charset="-120"/>
                         </a:rPr>
-                        <a:t>≈ US$ 0,0017</a:t>
+                        <a:t>≈ US$ 0,0022</a:t>
                       </a:r>
                       <a:endParaRPr lang="en-US" sz="1150" dirty="0">
                         <a:latin typeface="Calibri" charset="0"/>
@@ -7212,7 +7212,7 @@
                           <a:ea typeface="Calibri" pitchFamily="34" charset="-122"/>
                           <a:cs typeface="Calibri" pitchFamily="34" charset="-120"/>
                         </a:rPr>
-                        <a:t>≈ US$ 0,85</a:t>
+                        <a:t>≈ US$ 1,12</a:t>
                       </a:r>
                       <a:endParaRPr lang="en-US" sz="1150" dirty="0">
                         <a:latin typeface="Calibri" charset="0"/>
@@ -7418,7 +7418,7 @@
                           <a:ea typeface="Calibri" pitchFamily="34" charset="-122"/>
                           <a:cs typeface="Calibri" pitchFamily="34" charset="-120"/>
                         </a:rPr>
-                        <a:t>≈ US$ 8,50</a:t>
+                        <a:t>≈ US$ 11,20</a:t>
                       </a:r>
                       <a:endParaRPr lang="en-US" sz="1150" dirty="0">
                         <a:latin typeface="Calibri" charset="0"/>
@@ -7968,8 +7968,8 @@
         </p:blipFill>
         <p:spPr>
           <a:xfrm>
-            <a:off x="9052560" y="3977640"/>
-            <a:ext cx="1764792" cy="1700784"/>
+            <a:off x="9226296" y="3959352"/>
+            <a:ext cx="1417320" cy="1792224"/>
           </a:xfrm>
           <a:prstGeom prst="rect">
             <a:avLst/>
@@ -8009,7 +8009,7 @@
                 <a:ea typeface="Calibri" pitchFamily="34" charset="-122"/>
                 <a:cs typeface="Calibri" pitchFamily="34" charset="-120"/>
               </a:rPr>
-              <a:t>Precios del nivel pago vigentes en agosto de 2026: US$ 0,30 por millón de tokens de entrada y US$ 2,50 por millón de salida (gemini-2.5-flash).</a:t>
+              <a:t>Precios del nivel pago vigentes en agosto de 2026: US$ 0,75 por millón de tokens de entrada y US$ 3,75 por millón de salida (familia Flash de Gemini 3).</a:t>
             </a:r>
             <a:endParaRPr lang="en-US" sz="950" dirty="0"/>
           </a:p>
@@ -8685,7 +8685,7 @@
                 <a:ea typeface="Calibri" pitchFamily="34" charset="-122"/>
                 <a:cs typeface="Calibri" pitchFamily="34" charset="-120"/>
               </a:rPr>
-              <a:t>Cupos del nivel gratuito</a:t>
+              <a:t>Cupo diario del nivel gratuito</a:t>
             </a:r>
             <a:endParaRPr lang="en-US" sz="1500" dirty="0"/>
           </a:p>
@@ -8727,7 +8727,7 @@
                 <a:ea typeface="Calibri" pitchFamily="34" charset="-122"/>
                 <a:cs typeface="Calibri" pitchFamily="34" charset="-120"/>
               </a:rPr>
-              <a:t>El nivel gratuito limita las consultas por minuto y por día. Son holgados para una PyME, pero un pico de tráfico podría agotarlos temporalmente.</a:t>
+              <a:t>Son 20 consultas por día por modelo. La cascada de cuatro modelos lo multiplica, pero un pico de tráfico podría agotarlo; se renueva a la madrugada.</a:t>
             </a:r>
             <a:endParaRPr lang="en-US" sz="1150" dirty="0"/>
           </a:p>
@@ -14570,7 +14570,7 @@
                 <a:ea typeface="Calibri" pitchFamily="34" charset="-122"/>
                 <a:cs typeface="Calibri" pitchFamily="34" charset="-120"/>
               </a:rPr>
-              <a:t>Gemini 2.5 Flash con salida dirigida</a:t>
+              <a:t>Gemini Flash con salida dirigida</a:t>
             </a:r>
             <a:endParaRPr lang="en-US" sz="1900" dirty="0"/>
           </a:p>
@@ -14790,7 +14790,7 @@
         <p:spPr>
           <a:xfrm>
             <a:off x="685800" y="1133856"/>
-            <a:ext cx="10058400" cy="502920"/>
+            <a:ext cx="10515600" cy="502920"/>
           </a:xfrm>
           <a:prstGeom prst="rect">
             <a:avLst/>
@@ -14815,6 +14815,109 @@
                 <a:cs typeface="Calibri" pitchFamily="34" charset="-120"/>
               </a:rPr>
               <a:t>Construida con Streamlit: título, descripción, formulario, botón de acción y footer.</a:t>
+            </a:r>
+            <a:endParaRPr lang="en-US" sz="1500" dirty="0"/>
+          </a:p>
+        </p:txBody>
+      </p:sp>
+      <p:sp>
+        <p:nvSpPr>
+          <p:cNvPr id="4" name="Shape 2"/>
+          <p:cNvSpPr/>
+          <p:nvPr/>
+        </p:nvSpPr>
+        <p:spPr>
+          <a:xfrm>
+            <a:off x="822960" y="1737360"/>
+            <a:ext cx="384048" cy="384048"/>
+          </a:xfrm>
+          <a:prstGeom prst="ellipse">
+            <a:avLst/>
+          </a:prstGeom>
+          <a:solidFill>
+            <a:srgbClr val="1F7A8C"/>
+          </a:solidFill>
+          <a:ln w="12700">
+            <a:solidFill>
+              <a:srgbClr val="1F7A8C"/>
+            </a:solidFill>
+            <a:prstDash val="solid"/>
+          </a:ln>
+        </p:spPr>
+      </p:sp>
+      <p:sp>
+        <p:nvSpPr>
+          <p:cNvPr id="5" name="Text 3"/>
+          <p:cNvSpPr/>
+          <p:nvPr/>
+        </p:nvSpPr>
+        <p:spPr>
+          <a:xfrm>
+            <a:off x="822960" y="1737360"/>
+            <a:ext cx="384048" cy="384048"/>
+          </a:xfrm>
+          <a:prstGeom prst="rect">
+            <a:avLst/>
+          </a:prstGeom>
+          <a:noFill/>
+          <a:ln/>
+        </p:spPr>
+        <p:txBody>
+          <a:bodyPr wrap="square" lIns="0" tIns="0" rIns="0" bIns="0" rtlCol="0" anchor="ctr"/>
+          <a:lstStyle/>
+          <a:p>
+            <a:pPr algn="ctr" indent="0" marL="0">
+              <a:buNone/>
+            </a:pPr>
+            <a:r>
+              <a:rPr lang="en-US" sz="1300" b="1" dirty="0">
+                <a:solidFill>
+                  <a:srgbClr val="FFFFFF"/>
+                </a:solidFill>
+                <a:latin typeface="Calibri" pitchFamily="34" charset="0"/>
+                <a:ea typeface="Calibri" pitchFamily="34" charset="-122"/>
+                <a:cs typeface="Calibri" pitchFamily="34" charset="-120"/>
+              </a:rPr>
+              <a:t>1</a:t>
+            </a:r>
+            <a:endParaRPr lang="en-US" sz="1300" dirty="0"/>
+          </a:p>
+        </p:txBody>
+      </p:sp>
+      <p:sp>
+        <p:nvSpPr>
+          <p:cNvPr id="6" name="Text 4"/>
+          <p:cNvSpPr/>
+          <p:nvPr/>
+        </p:nvSpPr>
+        <p:spPr>
+          <a:xfrm>
+            <a:off x="1353312" y="1737360"/>
+            <a:ext cx="4206240" cy="384048"/>
+          </a:xfrm>
+          <a:prstGeom prst="rect">
+            <a:avLst/>
+          </a:prstGeom>
+          <a:noFill/>
+          <a:ln/>
+        </p:spPr>
+        <p:txBody>
+          <a:bodyPr wrap="square" lIns="0" tIns="0" rIns="0" bIns="0" rtlCol="0" anchor="ctr"/>
+          <a:lstStyle/>
+          <a:p>
+            <a:pPr indent="0" marL="0">
+              <a:buNone/>
+            </a:pPr>
+            <a:r>
+              <a:rPr lang="en-US" sz="1500" b="1" dirty="0">
+                <a:solidFill>
+                  <a:srgbClr val="0B2E4F"/>
+                </a:solidFill>
+                <a:latin typeface="Calibri" pitchFamily="34" charset="0"/>
+                <a:ea typeface="Calibri" pitchFamily="34" charset="-122"/>
+                <a:cs typeface="Calibri" pitchFamily="34" charset="-120"/>
+              </a:rPr>
+              <a:t>Pegás el mensaje</a:t>
             </a:r>
             <a:endParaRPr lang="en-US" sz="1500" dirty="0"/>
           </a:p>
@@ -14822,7 +14925,7 @@
       </p:sp>
       <p:pic>
         <p:nvPicPr>
-          <p:cNvPr id="4" name="Image 0" descr="/Users/agustin/Documents/Coder House/GuardIA/docs/app-formulario.png">    </p:cNvPr>
+          <p:cNvPr id="7" name="Image 0" descr="/Users/agustin/Documents/Coder House/GuardIA/docs/app-formulario.png">    </p:cNvPr>
           <p:cNvPicPr>
             <a:picLocks noChangeAspect="1"/>
           </p:cNvPicPr>
@@ -14836,8 +14939,8 @@
         </p:blipFill>
         <p:spPr>
           <a:xfrm>
-            <a:off x="2788920" y="1783080"/>
-            <a:ext cx="6629400" cy="4315968"/>
+            <a:off x="822960" y="2212848"/>
+            <a:ext cx="4919472" cy="3749040"/>
           </a:xfrm>
           <a:prstGeom prst="rect">
             <a:avLst/>
@@ -14846,7 +14949,173 @@
       </p:pic>
       <p:sp>
         <p:nvSpPr>
-          <p:cNvPr id="5" name="Text 2"/>
+          <p:cNvPr id="8" name="Shape 5"/>
+          <p:cNvSpPr/>
+          <p:nvPr/>
+        </p:nvSpPr>
+        <p:spPr>
+          <a:xfrm>
+            <a:off x="6446520" y="1737360"/>
+            <a:ext cx="384048" cy="384048"/>
+          </a:xfrm>
+          <a:prstGeom prst="ellipse">
+            <a:avLst/>
+          </a:prstGeom>
+          <a:solidFill>
+            <a:srgbClr val="1F7A8C"/>
+          </a:solidFill>
+          <a:ln w="12700">
+            <a:solidFill>
+              <a:srgbClr val="1F7A8C"/>
+            </a:solidFill>
+            <a:prstDash val="solid"/>
+          </a:ln>
+        </p:spPr>
+      </p:sp>
+      <p:sp>
+        <p:nvSpPr>
+          <p:cNvPr id="9" name="Text 6"/>
+          <p:cNvSpPr/>
+          <p:nvPr/>
+        </p:nvSpPr>
+        <p:spPr>
+          <a:xfrm>
+            <a:off x="6446520" y="1737360"/>
+            <a:ext cx="384048" cy="384048"/>
+          </a:xfrm>
+          <a:prstGeom prst="rect">
+            <a:avLst/>
+          </a:prstGeom>
+          <a:noFill/>
+          <a:ln/>
+        </p:spPr>
+        <p:txBody>
+          <a:bodyPr wrap="square" lIns="0" tIns="0" rIns="0" bIns="0" rtlCol="0" anchor="ctr"/>
+          <a:lstStyle/>
+          <a:p>
+            <a:pPr algn="ctr" indent="0" marL="0">
+              <a:buNone/>
+            </a:pPr>
+            <a:r>
+              <a:rPr lang="en-US" sz="1300" b="1" dirty="0">
+                <a:solidFill>
+                  <a:srgbClr val="FFFFFF"/>
+                </a:solidFill>
+                <a:latin typeface="Calibri" pitchFamily="34" charset="0"/>
+                <a:ea typeface="Calibri" pitchFamily="34" charset="-122"/>
+                <a:cs typeface="Calibri" pitchFamily="34" charset="-120"/>
+              </a:rPr>
+              <a:t>2</a:t>
+            </a:r>
+            <a:endParaRPr lang="en-US" sz="1300" dirty="0"/>
+          </a:p>
+        </p:txBody>
+      </p:sp>
+      <p:sp>
+        <p:nvSpPr>
+          <p:cNvPr id="10" name="Text 7"/>
+          <p:cNvSpPr/>
+          <p:nvPr/>
+        </p:nvSpPr>
+        <p:spPr>
+          <a:xfrm>
+            <a:off x="6976872" y="1737360"/>
+            <a:ext cx="4206240" cy="384048"/>
+          </a:xfrm>
+          <a:prstGeom prst="rect">
+            <a:avLst/>
+          </a:prstGeom>
+          <a:noFill/>
+          <a:ln/>
+        </p:spPr>
+        <p:txBody>
+          <a:bodyPr wrap="square" lIns="0" tIns="0" rIns="0" bIns="0" rtlCol="0" anchor="ctr"/>
+          <a:lstStyle/>
+          <a:p>
+            <a:pPr indent="0" marL="0">
+              <a:buNone/>
+            </a:pPr>
+            <a:r>
+              <a:rPr lang="en-US" sz="1500" b="1" dirty="0">
+                <a:solidFill>
+                  <a:srgbClr val="0B2E4F"/>
+                </a:solidFill>
+                <a:latin typeface="Calibri" pitchFamily="34" charset="0"/>
+                <a:ea typeface="Calibri" pitchFamily="34" charset="-122"/>
+                <a:cs typeface="Calibri" pitchFamily="34" charset="-120"/>
+              </a:rPr>
+              <a:t>Recibís el diagnóstico</a:t>
+            </a:r>
+            <a:endParaRPr lang="en-US" sz="1500" dirty="0"/>
+          </a:p>
+        </p:txBody>
+      </p:sp>
+      <p:pic>
+        <p:nvPicPr>
+          <p:cNvPr id="11" name="Image 1" descr="/Users/agustin/Documents/Coder House/GuardIA/docs/app-resultado.png">    </p:cNvPr>
+          <p:cNvPicPr>
+            <a:picLocks noChangeAspect="1"/>
+          </p:cNvPicPr>
+          <p:nvPr/>
+        </p:nvPicPr>
+        <p:blipFill>
+          <a:blip r:embed="rId2"/>
+          <a:stretch>
+            <a:fillRect/>
+          </a:stretch>
+        </p:blipFill>
+        <p:spPr>
+          <a:xfrm>
+            <a:off x="6446520" y="2212848"/>
+            <a:ext cx="4919472" cy="3749040"/>
+          </a:xfrm>
+          <a:prstGeom prst="rect">
+            <a:avLst/>
+          </a:prstGeom>
+        </p:spPr>
+      </p:pic>
+      <p:sp>
+        <p:nvSpPr>
+          <p:cNvPr id="12" name="Text 8"/>
+          <p:cNvSpPr/>
+          <p:nvPr/>
+        </p:nvSpPr>
+        <p:spPr>
+          <a:xfrm>
+            <a:off x="685800" y="6035040"/>
+            <a:ext cx="10789920" cy="256032"/>
+          </a:xfrm>
+          <a:prstGeom prst="rect">
+            <a:avLst/>
+          </a:prstGeom>
+          <a:noFill/>
+          <a:ln/>
+        </p:spPr>
+        <p:txBody>
+          <a:bodyPr wrap="square" lIns="0" tIns="0" rIns="0" bIns="0" rtlCol="0" anchor="ctr"/>
+          <a:lstStyle/>
+          <a:p>
+            <a:pPr indent="0" marL="0">
+              <a:buNone/>
+            </a:pPr>
+            <a:r>
+              <a:rPr lang="en-US" sz="950" i="1" dirty="0">
+                <a:solidFill>
+                  <a:srgbClr val="6B7C8C"/>
+                </a:solidFill>
+                <a:latin typeface="Calibri" pitchFamily="34" charset="0"/>
+                <a:ea typeface="Calibri" pitchFamily="34" charset="-122"/>
+                <a:cs typeface="Calibri" pitchFamily="34" charset="-120"/>
+              </a:rPr>
+              <a:t>Análisis real, no una maqueta. Probada con cinco correos de ejemplo (cuatro fraudes y uno legítimo): los cinco coincidieron con la evaluación esperada, en 7 segundos promedio.</a:t>
+            </a:r>
+            <a:endParaRPr lang="en-US" sz="950" dirty="0"/>
+          </a:p>
+        </p:txBody>
+      </p:sp>
+      <p:sp>
+        <p:nvSpPr>
+          <p:cNvPr id="13" name="Text 9"/>
           <p:cNvSpPr/>
           <p:nvPr/>
         </p:nvSpPr>
@@ -14899,7 +15168,7 @@
       </p:sp>
       <p:sp>
         <p:nvSpPr>
-          <p:cNvPr id="6" name="Text 3"/>
+          <p:cNvPr id="14" name="Text 10"/>
           <p:cNvSpPr/>
           <p:nvPr/>
         </p:nvSpPr>

--- a/docs/GuardIA-ProyectoFinal-IdoyagaMolina.pptx
+++ b/docs/GuardIA-ProyectoFinal-IdoyagaMolina.pptx
@@ -9378,7 +9378,7 @@
                 <a:ea typeface="Courier New" pitchFamily="34" charset="-122"/>
                 <a:cs typeface="Courier New" pitchFamily="34" charset="-120"/>
               </a:rPr>
-              <a:t>https://guardia.streamlit.app</a:t>
+              <a:t>guardia-iayvrupcyvzqzibgemf7l7.streamlit.app</a:t>
             </a:r>
             <a:endParaRPr lang="en-US" sz="1100" dirty="0"/>
           </a:p>
@@ -9971,7 +9971,7 @@
                 <a:ea typeface="Calibri" pitchFamily="34" charset="-122"/>
                 <a:cs typeface="Calibri" pitchFamily="34" charset="-120"/>
               </a:rPr>
-              <a:t>Falta reemplazar el enlace de Streamlit y el del video por los definitivos.</a:t>
+              <a:t>Falta reemplazar el enlace del video por el definitivo.</a:t>
             </a:r>
             <a:endParaRPr lang="en-US" sz="1050" dirty="0"/>
           </a:p>

--- a/docs/GuardIA-ProyectoFinal-IdoyagaMolina.pptx
+++ b/docs/GuardIA-ProyectoFinal-IdoyagaMolina.pptx
@@ -2471,7 +2471,7 @@
                 <a:ea typeface="Calibri" pitchFamily="34" charset="-122"/>
                 <a:cs typeface="Calibri" pitchFamily="34" charset="-120"/>
               </a:rPr>
-              <a:t>PROYECTO FINAL   ·   PROMPT ENGINEERING PARA PROGRAMADORES</a:t>
+              <a:t>PROYECTO FINAL   ·   INTELIGENCIA ARTIFICIAL: GENERACIÓN DE PROMPTS</a:t>
             </a:r>
             <a:endParaRPr lang="en-US" sz="1200" dirty="0"/>
           </a:p>
@@ -2800,7 +2800,7 @@
                 <a:ea typeface="Calibri" pitchFamily="34" charset="-122"/>
                 <a:cs typeface="Calibri" pitchFamily="34" charset="-120"/>
               </a:rPr>
-              <a:t>Prompt Engineering para Programadores</a:t>
+              <a:t>Inteligencia artificial: Generación de Prompts</a:t>
             </a:r>
             <a:endParaRPr lang="en-US" sz="1600" dirty="0"/>
           </a:p>
@@ -3687,7 +3687,7 @@
                 <a:ea typeface="Calibri" pitchFamily="34" charset="-122"/>
                 <a:cs typeface="Calibri" pitchFamily="34" charset="-120"/>
               </a:rPr>
-              <a:t>  ·  Proyecto Final — Prompt Engineering para Programadores · CoderHouse</a:t>
+              <a:t>  ·  Proyecto Final — Inteligencia artificial: Generación de Prompts · CoderHouse</a:t>
             </a:r>
             <a:endParaRPr lang="en-US" sz="900" dirty="0"/>
           </a:p>
@@ -4760,7 +4760,7 @@
                 <a:ea typeface="Calibri" pitchFamily="34" charset="-122"/>
                 <a:cs typeface="Calibri" pitchFamily="34" charset="-120"/>
               </a:rPr>
-              <a:t>  ·  Proyecto Final — Prompt Engineering para Programadores · CoderHouse</a:t>
+              <a:t>  ·  Proyecto Final — Inteligencia artificial: Generación de Prompts · CoderHouse</a:t>
             </a:r>
             <a:endParaRPr lang="en-US" sz="900" dirty="0"/>
           </a:p>
@@ -6110,7 +6110,7 @@
                 <a:ea typeface="Calibri" pitchFamily="34" charset="-122"/>
                 <a:cs typeface="Calibri" pitchFamily="34" charset="-120"/>
               </a:rPr>
-              <a:t>  ·  Proyecto Final — Prompt Engineering para Programadores · CoderHouse</a:t>
+              <a:t>  ·  Proyecto Final — Inteligencia artificial: Generación de Prompts · CoderHouse</a:t>
             </a:r>
             <a:endParaRPr lang="en-US" sz="900" dirty="0"/>
           </a:p>
@@ -8062,7 +8062,7 @@
                 <a:ea typeface="Calibri" pitchFamily="34" charset="-122"/>
                 <a:cs typeface="Calibri" pitchFamily="34" charset="-120"/>
               </a:rPr>
-              <a:t>  ·  Proyecto Final — Prompt Engineering para Programadores · CoderHouse</a:t>
+              <a:t>  ·  Proyecto Final — Inteligencia artificial: Generación de Prompts · CoderHouse</a:t>
             </a:r>
             <a:endParaRPr lang="en-US" sz="900" dirty="0"/>
           </a:p>
@@ -8952,7 +8952,7 @@
                 <a:ea typeface="Calibri" pitchFamily="34" charset="-122"/>
                 <a:cs typeface="Calibri" pitchFamily="34" charset="-120"/>
               </a:rPr>
-              <a:t>  ·  Proyecto Final — Prompt Engineering para Programadores · CoderHouse</a:t>
+              <a:t>  ·  Proyecto Final — Inteligencia artificial: Generación de Prompts · CoderHouse</a:t>
             </a:r>
             <a:endParaRPr lang="en-US" sz="900" dirty="0"/>
           </a:p>
@@ -10024,7 +10024,7 @@
                 <a:ea typeface="Calibri" pitchFamily="34" charset="-122"/>
                 <a:cs typeface="Calibri" pitchFamily="34" charset="-120"/>
               </a:rPr>
-              <a:t>  ·  Proyecto Final — Prompt Engineering para Programadores · CoderHouse</a:t>
+              <a:t>  ·  Proyecto Final — Inteligencia artificial: Generación de Prompts · CoderHouse</a:t>
             </a:r>
             <a:endParaRPr lang="en-US" sz="900" dirty="0"/>
           </a:p>
@@ -10742,7 +10742,7 @@
                 <a:ea typeface="Calibri" pitchFamily="34" charset="-122"/>
                 <a:cs typeface="Calibri" pitchFamily="34" charset="-120"/>
               </a:rPr>
-              <a:t>  ·  Proyecto Final — Prompt Engineering para Programadores · CoderHouse</a:t>
+              <a:t>  ·  Proyecto Final — Inteligencia artificial: Generación de Prompts · CoderHouse</a:t>
             </a:r>
             <a:endParaRPr lang="en-US" sz="900" dirty="0"/>
           </a:p>
@@ -11694,7 +11694,7 @@
                 <a:ea typeface="Calibri" pitchFamily="34" charset="-122"/>
                 <a:cs typeface="Calibri" pitchFamily="34" charset="-120"/>
               </a:rPr>
-              <a:t>  ·  Proyecto Final — Prompt Engineering para Programadores · CoderHouse</a:t>
+              <a:t>  ·  Proyecto Final — Inteligencia artificial: Generación de Prompts · CoderHouse</a:t>
             </a:r>
             <a:endParaRPr lang="en-US" sz="900" dirty="0"/>
           </a:p>
@@ -12292,7 +12292,7 @@
                 <a:ea typeface="Calibri" pitchFamily="34" charset="-122"/>
                 <a:cs typeface="Calibri" pitchFamily="34" charset="-120"/>
               </a:rPr>
-              <a:t>  ·  Proyecto Final — Prompt Engineering para Programadores · CoderHouse</a:t>
+              <a:t>  ·  Proyecto Final — Inteligencia artificial: Generación de Prompts · CoderHouse</a:t>
             </a:r>
             <a:endParaRPr lang="en-US" sz="900" dirty="0"/>
           </a:p>
@@ -13010,7 +13010,7 @@
                 <a:ea typeface="Calibri" pitchFamily="34" charset="-122"/>
                 <a:cs typeface="Calibri" pitchFamily="34" charset="-120"/>
               </a:rPr>
-              <a:t>  ·  Proyecto Final — Prompt Engineering para Programadores · CoderHouse</a:t>
+              <a:t>  ·  Proyecto Final — Inteligencia artificial: Generación de Prompts · CoderHouse</a:t>
             </a:r>
             <a:endParaRPr lang="en-US" sz="900" dirty="0"/>
           </a:p>
@@ -13875,7 +13875,7 @@
                 <a:ea typeface="Calibri" pitchFamily="34" charset="-122"/>
                 <a:cs typeface="Calibri" pitchFamily="34" charset="-120"/>
               </a:rPr>
-              <a:t>  ·  Proyecto Final — Prompt Engineering para Programadores · CoderHouse</a:t>
+              <a:t>  ·  Proyecto Final — Inteligencia artificial: Generación de Prompts · CoderHouse</a:t>
             </a:r>
             <a:endParaRPr lang="en-US" sz="900" dirty="0"/>
           </a:p>
@@ -14665,7 +14665,7 @@
                 <a:ea typeface="Calibri" pitchFamily="34" charset="-122"/>
                 <a:cs typeface="Calibri" pitchFamily="34" charset="-120"/>
               </a:rPr>
-              <a:t>  ·  Proyecto Final — Prompt Engineering para Programadores · CoderHouse</a:t>
+              <a:t>  ·  Proyecto Final — Inteligencia artificial: Generación de Prompts · CoderHouse</a:t>
             </a:r>
             <a:endParaRPr lang="en-US" sz="900" dirty="0"/>
           </a:p>
@@ -15160,7 +15160,7 @@
                 <a:ea typeface="Calibri" pitchFamily="34" charset="-122"/>
                 <a:cs typeface="Calibri" pitchFamily="34" charset="-120"/>
               </a:rPr>
-              <a:t>  ·  Proyecto Final — Prompt Engineering para Programadores · CoderHouse</a:t>
+              <a:t>  ·  Proyecto Final — Inteligencia artificial: Generación de Prompts · CoderHouse</a:t>
             </a:r>
             <a:endParaRPr lang="en-US" sz="900" dirty="0"/>
           </a:p>
@@ -15966,7 +15966,7 @@
                 <a:ea typeface="Calibri" pitchFamily="34" charset="-122"/>
                 <a:cs typeface="Calibri" pitchFamily="34" charset="-120"/>
               </a:rPr>
-              <a:t>  ·  Proyecto Final — Prompt Engineering para Programadores · CoderHouse</a:t>
+              <a:t>  ·  Proyecto Final — Inteligencia artificial: Generación de Prompts · CoderHouse</a:t>
             </a:r>
             <a:endParaRPr lang="en-US" sz="900" dirty="0"/>
           </a:p>
@@ -17116,7 +17116,7 @@
                 <a:ea typeface="Calibri" pitchFamily="34" charset="-122"/>
                 <a:cs typeface="Calibri" pitchFamily="34" charset="-120"/>
               </a:rPr>
-              <a:t>  ·  Proyecto Final — Prompt Engineering para Programadores · CoderHouse</a:t>
+              <a:t>  ·  Proyecto Final — Inteligencia artificial: Generación de Prompts · CoderHouse</a:t>
             </a:r>
             <a:endParaRPr lang="en-US" sz="900" dirty="0"/>
           </a:p>
